--- a/output/IVO2026_aspiranty_dropout.pptx
+++ b/output/IVO2026_aspiranty_dropout.pptx
@@ -116,23 +116,23 @@
   <p:extLst>
     <p:ext uri="{521415D9-36F7-43E2-AB2F-B90AF26B5E84}">
       <p14:sectionLst xmlns:p14="http://schemas.microsoft.com/office/powerpoint/2010/main">
-        <p14:section name="Вступление" id="{57b90b48-263a-4dd8-ee3a-23fd5f4ef39e}">
+        <p14:section name="Вступление" id="{f612aba6-fcfa-292c-7b15-88d4eb232e9b}">
           <p14:sldIdLst>
             <p14:sldId id="256"/>
           </p14:sldIdLst>
         </p14:section>
-        <p14:section name="Вопрос и данные" id="{20ac2bcd-47c0-b281-dd35-9d8ae5be4f4e}">
+        <p14:section name="Вопрос и данные" id="{8c3f5aa2-ffe7-68a0-ac91-56741371e234}">
           <p14:sldIdLst>
             <p14:sldId id="257"/>
             <p14:sldId id="258"/>
           </p14:sldIdLst>
         </p14:section>
-        <p14:section name="Методы" id="{4d0ce4cc-efeb-2739-b3ca-9c1ace1dbebe}">
+        <p14:section name="Методы" id="{4f60ec3f-d6e9-aa45-7a7e-c6e1bd9ffa53}">
           <p14:sldIdLst>
             <p14:sldId id="259"/>
           </p14:sldIdLst>
         </p14:section>
-        <p14:section name="Результаты" id="{e3893ffd-4f20-49cb-bda4-e84339b050af}">
+        <p14:section name="Результаты" id="{6f5a06c4-84ce-c25b-4144-e2ed74758c9a}">
           <p14:sldIdLst>
             <p14:sldId id="260"/>
             <p14:sldId id="261"/>
@@ -141,7 +141,7 @@
             <p14:sldId id="264"/>
           </p14:sldIdLst>
         </p14:section>
-        <p14:section name="Выводы" id="{37c0ccdf-ac93-7d34-44ac-604414c83d72}">
+        <p14:section name="Выводы" id="{b78d92bd-abbf-d8ce-e8e9-d4344bb0729e}">
           <p14:sldIdLst>
             <p14:sldId id="265"/>
           </p14:sldIdLst>
@@ -1226,586 +1226,6 @@
 </file>
 
 <file path=ppt/charts/chart5.xml><?xml version="1.0" encoding="utf-8"?>
-<c:chartSpace xmlns:c="http://schemas.openxmlformats.org/drawingml/2006/chart" xmlns:a="http://schemas.openxmlformats.org/drawingml/2006/main" xmlns:r="http://schemas.openxmlformats.org/officeDocument/2006/relationships">
-  <c:date1904 val="0"/>
-  <c:roundedCorners val="1"/>
-  <c:chart>
-    <c:title>
-      <c:tx>
-        <c:rich>
-          <a:bodyPr/>
-          <a:lstStyle/>
-          <a:p>
-            <a:pPr>
-              <a:defRPr sz="1300" b="1" i="0" u="none" strike="noStrike">
-                <a:solidFill>
-                  <a:srgbClr val="14213D"/>
-                </a:solidFill>
-                <a:latin typeface="+mn-lt"/>
-              </a:defRPr>
-            </a:pPr>
-            <a:r>
-              <a:rPr sz="1300" b="1" i="0" u="none" strike="noStrike">
-                <a:solidFill>
-                  <a:srgbClr val="14213D"/>
-                </a:solidFill>
-                <a:latin typeface="+mn-lt"/>
-              </a:rPr>
-              <a:t>Называют серьёзной трудностью, % аспирантов</a:t>
-            </a:r>
-          </a:p>
-        </c:rich>
-      </c:tx>
-      <c:layout/>
-      <c:overlay val="0"/>
-    </c:title>
-    <c:autoTitleDeleted val="0"/>
-    <c:plotArea>
-      <c:layout/>
-      <c:barChart>
-        <c:barDir val="bar"/>
-        <c:grouping val="clustered"/>
-        <c:varyColors val="0"/>
-        <c:ser>
-          <c:idx val="0"/>
-          <c:order val="0"/>
-          <c:tx>
-            <c:strRef>
-              <c:f>Sheet1!$B$1</c:f>
-              <c:strCache>
-                <c:ptCount val="1"/>
-                <c:pt idx="0">
-                  <c:v>Серьёзная трудность</c:v>
-                </c:pt>
-              </c:strCache>
-            </c:strRef>
-          </c:tx>
-          <c:spPr>
-            <a:solidFill>
-              <a:srgbClr val="B9B8B2"/>
-            </a:solidFill>
-            <a:effectLst/>
-          </c:spPr>
-          <c:invertIfNegative val="0"/>
-          <c:dLbls>
-            <c:numFmt formatCode="0%" sourceLinked="0"/>
-            <c:txPr>
-              <a:bodyPr/>
-              <a:lstStyle/>
-              <a:p>
-                <a:pPr>
-                  <a:defRPr b="0" i="0" strike="noStrike" sz="1200" u="none">
-                    <a:solidFill>
-                      <a:srgbClr val="14213D"/>
-                    </a:solidFill>
-                    <a:latin typeface="+mn-lt"/>
-                  </a:defRPr>
-                </a:pPr>
-              </a:p>
-            </c:txPr>
-            <c:showLegendKey val="0"/>
-            <c:showVal val="1"/>
-            <c:showCatName val="0"/>
-            <c:showSerName val="0"/>
-            <c:showPercent val="0"/>
-            <c:showBubbleSize val="0"/>
-            <c:showLeaderLines val="0"/>
-          </c:dLbls>
-          <c:cat>
-            <c:multiLvlStrRef>
-              <c:f>Sheet1!$A$2:$A$9</c:f>
-              <c:multiLvlStrCache>
-                <c:ptCount val="8"/>
-                <c:lvl>
-                  <c:pt idx="0">
-                    <c:v>Потеря интереса к теме</c:v>
-                  </c:pt>
-                  <c:pt idx="1">
-                    <c:v>Отношения с руководителем</c:v>
-                  </c:pt>
-                  <c:pt idx="2">
-                    <c:v>Публикации</c:v>
-                  </c:pt>
-                  <c:pt idx="3">
-                    <c:v>Совмещение с работой</c:v>
-                  </c:pt>
-                  <c:pt idx="4">
-                    <c:v>Нехватка навыков</c:v>
-                  </c:pt>
-                  <c:pt idx="5">
-                    <c:v>Тайм-менеджмент</c:v>
-                  </c:pt>
-                  <c:pt idx="6">
-                    <c:v>Нехватка финансирования</c:v>
-                  </c:pt>
-                  <c:pt idx="7">
-                    <c:v>Здоровье</c:v>
-                  </c:pt>
-                </c:lvl>
-              </c:multiLvlStrCache>
-            </c:multiLvlStrRef>
-          </c:cat>
-          <c:val>
-            <c:numRef>
-              <c:f>Sheet1!$B$2:$B$9</c:f>
-              <c:numCache>
-                <c:formatCode>General</c:formatCode>
-                <c:ptCount val="8"/>
-                <c:pt idx="0">
-                  <c:v>0.12371854613233924</c:v>
-                </c:pt>
-                <c:pt idx="1">
-                  <c:v>0.06047851129818343</c:v>
-                </c:pt>
-                <c:pt idx="2">
-                  <c:v>0.2280225988700565</c:v>
-                </c:pt>
-                <c:pt idx="3">
-                  <c:v>0.44735663082437277</c:v>
-                </c:pt>
-                <c:pt idx="4">
-                  <c:v>0.15563587079286198</c:v>
-                </c:pt>
-                <c:pt idx="5">
-                  <c:v>0.16808988764044944</c:v>
-                </c:pt>
-                <c:pt idx="6">
-                  <c:v>0.2825875486381323</c:v>
-                </c:pt>
-                <c:pt idx="7">
-                  <c:v>0.09847276042853886</c:v>
-                </c:pt>
-              </c:numCache>
-            </c:numRef>
-          </c:val>
-        </c:ser>
-        <c:dLbls>
-          <c:numFmt formatCode="0%" sourceLinked="0"/>
-          <c:txPr>
-            <a:bodyPr/>
-            <a:lstStyle/>
-            <a:p>
-              <a:pPr>
-                <a:defRPr b="0" i="0" strike="noStrike" sz="1200" u="none">
-                  <a:solidFill>
-                    <a:srgbClr val="14213D"/>
-                  </a:solidFill>
-                  <a:latin typeface="+mn-lt"/>
-                </a:defRPr>
-              </a:pPr>
-            </a:p>
-          </c:txPr>
-          <c:showLegendKey val="0"/>
-          <c:showVal val="1"/>
-          <c:showCatName val="0"/>
-          <c:showSerName val="0"/>
-          <c:showPercent val="0"/>
-          <c:showBubbleSize val="0"/>
-          <c:showLeaderLines val="0"/>
-        </c:dLbls>
-        <c:gapWidth val="45"/>
-        <c:overlap val="0"/>
-        <c:axId val="2094734554"/>
-        <c:axId val="2094734552"/>
-        <c:axId val="2094734556"/>
-      </c:barChart>
-      <c:catAx>
-        <c:axId val="2094734554"/>
-        <c:scaling>
-          <c:orientation val="maxMin"/>
-        </c:scaling>
-        <c:delete val="0"/>
-        <c:axPos val="l"/>
-        <c:numFmt formatCode="General" sourceLinked="1"/>
-        <c:majorTickMark val="out"/>
-        <c:minorTickMark val="none"/>
-        <c:tickLblPos val="nextTo"/>
-        <c:spPr>
-          <a:ln w="12700" cap="flat">
-            <a:solidFill>
-              <a:srgbClr val="E6E5E0"/>
-            </a:solidFill>
-            <a:prstDash val="solid"/>
-            <a:round/>
-          </a:ln>
-        </c:spPr>
-        <c:txPr>
-          <a:bodyPr/>
-          <a:lstStyle/>
-          <a:p>
-            <a:pPr>
-              <a:defRPr sz="1200" b="0" i="0" u="none" strike="noStrike">
-                <a:solidFill>
-                  <a:srgbClr val="52514E"/>
-                </a:solidFill>
-                <a:latin typeface="+mn-lt"/>
-              </a:defRPr>
-            </a:pPr>
-            <a:endParaRPr lang="en-US"/>
-          </a:p>
-        </c:txPr>
-        <c:crossAx val="2094734552"/>
-        <c:crosses val="autoZero"/>
-        <c:auto val="1"/>
-        <c:lblAlgn val="ctr"/>
-        <c:noMultiLvlLbl val="1"/>
-      </c:catAx>
-      <c:valAx>
-        <c:axId val="2094734552"/>
-        <c:scaling>
-          <c:orientation val="minMax"/>
-          <c:max val="0.6"/>
-          <c:min val="0"/>
-        </c:scaling>
-        <c:delete val="1"/>
-        <c:axPos val="b"/>
-        <c:numFmt formatCode="General" sourceLinked="0"/>
-        <c:majorTickMark val="out"/>
-        <c:minorTickMark val="none"/>
-        <c:tickLblPos val="low"/>
-        <c:spPr>
-          <a:ln w="12700" cap="flat">
-            <a:solidFill>
-              <a:srgbClr val="888888"/>
-            </a:solidFill>
-            <a:prstDash val="solid"/>
-            <a:round/>
-          </a:ln>
-        </c:spPr>
-        <c:txPr>
-          <a:bodyPr/>
-          <a:lstStyle/>
-          <a:p>
-            <a:pPr>
-              <a:defRPr sz="1200" b="0" i="0" u="none" strike="noStrike">
-                <a:solidFill>
-                  <a:srgbClr val="52514E"/>
-                </a:solidFill>
-                <a:latin typeface="+mn-lt"/>
-              </a:defRPr>
-            </a:pPr>
-            <a:endParaRPr lang="en-US"/>
-          </a:p>
-        </c:txPr>
-        <c:crossAx val="2094734554"/>
-        <c:crosses val="autoZero"/>
-        <c:crossBetween val="between"/>
-      </c:valAx>
-      <c:spPr>
-        <a:noFill/>
-        <a:ln>
-          <a:noFill/>
-        </a:ln>
-        <a:effectLst/>
-      </c:spPr>
-    </c:plotArea>
-    <c:plotVisOnly val="1"/>
-    <c:dispBlanksAs val="span"/>
-  </c:chart>
-  <c:spPr>
-    <a:noFill/>
-    <a:ln>
-      <a:noFill/>
-    </a:ln>
-    <a:effectLst/>
-  </c:spPr>
-  <c:externalData r:id="rId1">
-    <c:autoUpdate val="0"/>
-  </c:externalData>
-</c:chartSpace>
-</file>
-
-<file path=ppt/charts/chart6.xml><?xml version="1.0" encoding="utf-8"?>
-<c:chartSpace xmlns:c="http://schemas.openxmlformats.org/drawingml/2006/chart" xmlns:a="http://schemas.openxmlformats.org/drawingml/2006/main" xmlns:r="http://schemas.openxmlformats.org/officeDocument/2006/relationships">
-  <c:date1904 val="0"/>
-  <c:roundedCorners val="1"/>
-  <c:chart>
-    <c:title>
-      <c:tx>
-        <c:rich>
-          <a:bodyPr/>
-          <a:lstStyle/>
-          <a:p>
-            <a:pPr>
-              <a:defRPr sz="1300" b="1" i="0" u="none" strike="noStrike">
-                <a:solidFill>
-                  <a:srgbClr val="14213D"/>
-                </a:solidFill>
-                <a:latin typeface="+mn-lt"/>
-              </a:defRPr>
-            </a:pPr>
-            <a:r>
-              <a:rPr sz="1300" b="1" i="0" u="none" strike="noStrike">
-                <a:solidFill>
-                  <a:srgbClr val="14213D"/>
-                </a:solidFill>
-                <a:latin typeface="+mn-lt"/>
-              </a:rPr>
-              <a:t>Во сколько раз чаще хотят бросить</a:t>
-            </a:r>
-          </a:p>
-        </c:rich>
-      </c:tx>
-      <c:layout/>
-      <c:overlay val="0"/>
-    </c:title>
-    <c:autoTitleDeleted val="0"/>
-    <c:plotArea>
-      <c:layout/>
-      <c:barChart>
-        <c:barDir val="bar"/>
-        <c:grouping val="clustered"/>
-        <c:varyColors val="0"/>
-        <c:ser>
-          <c:idx val="0"/>
-          <c:order val="0"/>
-          <c:tx>
-            <c:strRef>
-              <c:f>Sheet1!$B$1</c:f>
-              <c:strCache>
-                <c:ptCount val="1"/>
-                <c:pt idx="0">
-                  <c:v>Отн. риск</c:v>
-                </c:pt>
-              </c:strCache>
-            </c:strRef>
-          </c:tx>
-          <c:spPr>
-            <a:solidFill>
-              <a:srgbClr val="2A78D6"/>
-            </a:solidFill>
-            <a:effectLst/>
-          </c:spPr>
-          <c:invertIfNegative val="0"/>
-          <c:dLbls>
-            <c:numFmt formatCode="&quot;×&quot;0.0" sourceLinked="0"/>
-            <c:txPr>
-              <a:bodyPr/>
-              <a:lstStyle/>
-              <a:p>
-                <a:pPr>
-                  <a:defRPr b="0" i="0" strike="noStrike" sz="1200" u="none">
-                    <a:solidFill>
-                      <a:srgbClr val="14213D"/>
-                    </a:solidFill>
-                    <a:latin typeface="+mn-lt"/>
-                  </a:defRPr>
-                </a:pPr>
-              </a:p>
-            </c:txPr>
-            <c:showLegendKey val="0"/>
-            <c:showVal val="1"/>
-            <c:showCatName val="0"/>
-            <c:showSerName val="0"/>
-            <c:showPercent val="0"/>
-            <c:showBubbleSize val="0"/>
-            <c:showLeaderLines val="0"/>
-          </c:dLbls>
-          <c:cat>
-            <c:multiLvlStrRef>
-              <c:f>Sheet1!$A$2:$A$9</c:f>
-              <c:multiLvlStrCache>
-                <c:ptCount val="8"/>
-                <c:lvl>
-                  <c:pt idx="0">
-                    <c:v>Потеря интереса к теме</c:v>
-                  </c:pt>
-                  <c:pt idx="1">
-                    <c:v>Отношения с руководителем</c:v>
-                  </c:pt>
-                  <c:pt idx="2">
-                    <c:v>Публикации</c:v>
-                  </c:pt>
-                  <c:pt idx="3">
-                    <c:v>Совмещение с работой</c:v>
-                  </c:pt>
-                  <c:pt idx="4">
-                    <c:v>Нехватка навыков</c:v>
-                  </c:pt>
-                  <c:pt idx="5">
-                    <c:v>Тайм-менеджмент</c:v>
-                  </c:pt>
-                  <c:pt idx="6">
-                    <c:v>Нехватка финансирования</c:v>
-                  </c:pt>
-                  <c:pt idx="7">
-                    <c:v>Здоровье</c:v>
-                  </c:pt>
-                </c:lvl>
-              </c:multiLvlStrCache>
-            </c:multiLvlStrRef>
-          </c:cat>
-          <c:val>
-            <c:numRef>
-              <c:f>Sheet1!$B$2:$B$9</c:f>
-              <c:numCache>
-                <c:formatCode>General</c:formatCode>
-                <c:ptCount val="8"/>
-                <c:pt idx="0">
-                  <c:v>4.8</c:v>
-                </c:pt>
-                <c:pt idx="1">
-                  <c:v>3.2</c:v>
-                </c:pt>
-                <c:pt idx="2">
-                  <c:v>2.6</c:v>
-                </c:pt>
-                <c:pt idx="3">
-                  <c:v>2.5</c:v>
-                </c:pt>
-                <c:pt idx="4">
-                  <c:v>2.4</c:v>
-                </c:pt>
-                <c:pt idx="5">
-                  <c:v>2</c:v>
-                </c:pt>
-                <c:pt idx="6">
-                  <c:v>2</c:v>
-                </c:pt>
-                <c:pt idx="7">
-                  <c:v>1.9</c:v>
-                </c:pt>
-              </c:numCache>
-            </c:numRef>
-          </c:val>
-        </c:ser>
-        <c:dLbls>
-          <c:numFmt formatCode="&quot;×&quot;0.0" sourceLinked="0"/>
-          <c:txPr>
-            <a:bodyPr/>
-            <a:lstStyle/>
-            <a:p>
-              <a:pPr>
-                <a:defRPr b="0" i="0" strike="noStrike" sz="1200" u="none">
-                  <a:solidFill>
-                    <a:srgbClr val="14213D"/>
-                  </a:solidFill>
-                  <a:latin typeface="+mn-lt"/>
-                </a:defRPr>
-              </a:pPr>
-            </a:p>
-          </c:txPr>
-          <c:showLegendKey val="0"/>
-          <c:showVal val="1"/>
-          <c:showCatName val="0"/>
-          <c:showSerName val="0"/>
-          <c:showPercent val="0"/>
-          <c:showBubbleSize val="0"/>
-          <c:showLeaderLines val="0"/>
-        </c:dLbls>
-        <c:gapWidth val="45"/>
-        <c:overlap val="0"/>
-        <c:axId val="2094734554"/>
-        <c:axId val="2094734552"/>
-        <c:axId val="2094734556"/>
-      </c:barChart>
-      <c:catAx>
-        <c:axId val="2094734554"/>
-        <c:scaling>
-          <c:orientation val="maxMin"/>
-        </c:scaling>
-        <c:delete val="1"/>
-        <c:axPos val="l"/>
-        <c:numFmt formatCode="General" sourceLinked="1"/>
-        <c:majorTickMark val="out"/>
-        <c:minorTickMark val="none"/>
-        <c:tickLblPos val="nextTo"/>
-        <c:spPr>
-          <a:ln w="12700" cap="flat">
-            <a:solidFill>
-              <a:srgbClr val="E6E5E0"/>
-            </a:solidFill>
-            <a:prstDash val="solid"/>
-            <a:round/>
-          </a:ln>
-        </c:spPr>
-        <c:txPr>
-          <a:bodyPr/>
-          <a:lstStyle/>
-          <a:p>
-            <a:pPr>
-              <a:defRPr sz="1100" b="0" i="0" u="none" strike="noStrike">
-                <a:solidFill>
-                  <a:srgbClr val="52514E"/>
-                </a:solidFill>
-                <a:latin typeface="+mn-lt"/>
-              </a:defRPr>
-            </a:pPr>
-            <a:endParaRPr lang="en-US"/>
-          </a:p>
-        </c:txPr>
-        <c:crossAx val="2094734552"/>
-        <c:crosses val="autoZero"/>
-        <c:auto val="1"/>
-        <c:lblAlgn val="ctr"/>
-        <c:noMultiLvlLbl val="1"/>
-      </c:catAx>
-      <c:valAx>
-        <c:axId val="2094734552"/>
-        <c:scaling>
-          <c:orientation val="minMax"/>
-          <c:max val="6"/>
-          <c:min val="0"/>
-        </c:scaling>
-        <c:delete val="1"/>
-        <c:axPos val="b"/>
-        <c:numFmt formatCode="General" sourceLinked="0"/>
-        <c:majorTickMark val="out"/>
-        <c:minorTickMark val="none"/>
-        <c:tickLblPos val="low"/>
-        <c:spPr>
-          <a:ln w="12700" cap="flat">
-            <a:solidFill>
-              <a:srgbClr val="888888"/>
-            </a:solidFill>
-            <a:prstDash val="solid"/>
-            <a:round/>
-          </a:ln>
-        </c:spPr>
-        <c:txPr>
-          <a:bodyPr/>
-          <a:lstStyle/>
-          <a:p>
-            <a:pPr>
-              <a:defRPr sz="1200" b="0" i="0" u="none" strike="noStrike">
-                <a:solidFill>
-                  <a:srgbClr val="52514E"/>
-                </a:solidFill>
-                <a:latin typeface="+mn-lt"/>
-              </a:defRPr>
-            </a:pPr>
-            <a:endParaRPr lang="en-US"/>
-          </a:p>
-        </c:txPr>
-        <c:crossAx val="2094734554"/>
-        <c:crosses val="autoZero"/>
-        <c:crossBetween val="between"/>
-      </c:valAx>
-      <c:spPr>
-        <a:noFill/>
-        <a:ln>
-          <a:noFill/>
-        </a:ln>
-        <a:effectLst/>
-      </c:spPr>
-    </c:plotArea>
-    <c:plotVisOnly val="1"/>
-    <c:dispBlanksAs val="span"/>
-  </c:chart>
-  <c:spPr>
-    <a:noFill/>
-    <a:ln>
-      <a:noFill/>
-    </a:ln>
-    <a:effectLst/>
-  </c:spPr>
-  <c:externalData r:id="rId1">
-    <c:autoUpdate val="0"/>
-  </c:externalData>
-</c:chartSpace>
-</file>
-
-<file path=ppt/charts/chart7.xml><?xml version="1.0" encoding="utf-8"?>
 <c:chartSpace xmlns:c="http://schemas.openxmlformats.org/drawingml/2006/chart" xmlns:a="http://schemas.openxmlformats.org/drawingml/2006/main" xmlns:r="http://schemas.openxmlformats.org/officeDocument/2006/relationships">
   <c:date1904 val="0"/>
   <c:roundedCorners val="1"/>
@@ -2008,7 +1428,7 @@
           <a:lstStyle/>
           <a:p>
             <a:pPr>
-              <a:defRPr sz="1300" b="0" i="0" u="none" strike="noStrike">
+              <a:defRPr sz="1200" b="0" i="0" u="none" strike="noStrike">
                 <a:solidFill>
                   <a:srgbClr val="52514E"/>
                 </a:solidFill>
@@ -2029,6 +1449,284 @@
         <c:scaling>
           <c:orientation val="minMax"/>
           <c:max val="0.32"/>
+          <c:min val="0"/>
+        </c:scaling>
+        <c:delete val="1"/>
+        <c:axPos val="b"/>
+        <c:numFmt formatCode="General" sourceLinked="0"/>
+        <c:majorTickMark val="out"/>
+        <c:minorTickMark val="none"/>
+        <c:tickLblPos val="low"/>
+        <c:spPr>
+          <a:ln w="12700" cap="flat">
+            <a:solidFill>
+              <a:srgbClr val="888888"/>
+            </a:solidFill>
+            <a:prstDash val="solid"/>
+            <a:round/>
+          </a:ln>
+        </c:spPr>
+        <c:txPr>
+          <a:bodyPr/>
+          <a:lstStyle/>
+          <a:p>
+            <a:pPr>
+              <a:defRPr sz="1200" b="0" i="0" u="none" strike="noStrike">
+                <a:solidFill>
+                  <a:srgbClr val="52514E"/>
+                </a:solidFill>
+                <a:latin typeface="+mn-lt"/>
+              </a:defRPr>
+            </a:pPr>
+            <a:endParaRPr lang="en-US"/>
+          </a:p>
+        </c:txPr>
+        <c:crossAx val="2094734554"/>
+        <c:crosses val="autoZero"/>
+        <c:crossBetween val="between"/>
+      </c:valAx>
+      <c:spPr>
+        <a:noFill/>
+        <a:ln>
+          <a:noFill/>
+        </a:ln>
+        <a:effectLst/>
+      </c:spPr>
+    </c:plotArea>
+    <c:plotVisOnly val="1"/>
+    <c:dispBlanksAs val="span"/>
+  </c:chart>
+  <c:spPr>
+    <a:noFill/>
+    <a:ln>
+      <a:noFill/>
+    </a:ln>
+    <a:effectLst/>
+  </c:spPr>
+  <c:externalData r:id="rId1">
+    <c:autoUpdate val="0"/>
+  </c:externalData>
+</c:chartSpace>
+</file>
+
+<file path=ppt/charts/chart6.xml><?xml version="1.0" encoding="utf-8"?>
+<c:chartSpace xmlns:c="http://schemas.openxmlformats.org/drawingml/2006/chart" xmlns:a="http://schemas.openxmlformats.org/drawingml/2006/main" xmlns:r="http://schemas.openxmlformats.org/officeDocument/2006/relationships">
+  <c:date1904 val="0"/>
+  <c:roundedCorners val="1"/>
+  <c:chart>
+    <c:title>
+      <c:tx>
+        <c:rich>
+          <a:bodyPr/>
+          <a:lstStyle/>
+          <a:p>
+            <a:pPr>
+              <a:defRPr sz="1300" b="1" i="0" u="none" strike="noStrike">
+                <a:solidFill>
+                  <a:srgbClr val="FFFFFF"/>
+                </a:solidFill>
+                <a:latin typeface="+mn-lt"/>
+              </a:defRPr>
+            </a:pPr>
+            <a:r>
+              <a:rPr sz="1300" b="1" i="0" u="none" strike="noStrike">
+                <a:solidFill>
+                  <a:srgbClr val="FFFFFF"/>
+                </a:solidFill>
+                <a:latin typeface="+mn-lt"/>
+              </a:rPr>
+              <a:t>Снижение доли «хочу бросить», п.п. (база 20%)</a:t>
+            </a:r>
+          </a:p>
+        </c:rich>
+      </c:tx>
+      <c:layout/>
+      <c:overlay val="0"/>
+    </c:title>
+    <c:autoTitleDeleted val="0"/>
+    <c:plotArea>
+      <c:layout/>
+      <c:barChart>
+        <c:barDir val="bar"/>
+        <c:grouping val="clustered"/>
+        <c:varyColors val="0"/>
+        <c:ser>
+          <c:idx val="0"/>
+          <c:order val="0"/>
+          <c:tx>
+            <c:strRef>
+              <c:f>Sheet1!$B$1</c:f>
+              <c:strCache>
+                <c:ptCount val="1"/>
+                <c:pt idx="0">
+                  <c:v>Δ</c:v>
+                </c:pt>
+              </c:strCache>
+            </c:strRef>
+          </c:tx>
+          <c:spPr>
+            <a:solidFill>
+              <a:srgbClr val="EB6834"/>
+            </a:solidFill>
+            <a:effectLst/>
+          </c:spPr>
+          <c:invertIfNegative val="0"/>
+          <c:dLbls>
+            <c:numFmt formatCode="0.0" sourceLinked="0"/>
+            <c:txPr>
+              <a:bodyPr/>
+              <a:lstStyle/>
+              <a:p>
+                <a:pPr>
+                  <a:defRPr b="0" i="0" strike="noStrike" sz="1200" u="none">
+                    <a:solidFill>
+                      <a:srgbClr val="FFFFFF"/>
+                    </a:solidFill>
+                    <a:latin typeface="+mn-lt"/>
+                  </a:defRPr>
+                </a:pPr>
+              </a:p>
+            </c:txPr>
+            <c:showLegendKey val="0"/>
+            <c:showVal val="1"/>
+            <c:showCatName val="0"/>
+            <c:showSerName val="0"/>
+            <c:showPercent val="0"/>
+            <c:showBubbleSize val="0"/>
+            <c:showLeaderLines val="0"/>
+          </c:dLbls>
+          <c:cat>
+            <c:multiLvlStrRef>
+              <c:f>Sheet1!$A$2:$A$7</c:f>
+              <c:multiLvlStrCache>
+                <c:ptCount val="6"/>
+                <c:lvl>
+                  <c:pt idx="0">
+                    <c:v>Комплекс: встречи + принадлежность + помощь</c:v>
+                  </c:pt>
+                  <c:pt idx="1">
+                    <c:v>Принадлежность ниже медианы → медиана</c:v>
+                  </c:pt>
+                  <c:pt idx="2">
+                    <c:v>Психологическая помощь: −5 баллов PHQ-8 при PHQ ≥ 10</c:v>
+                  </c:pt>
+                  <c:pt idx="3">
+                    <c:v>Встречи с руководителем ≥2 раз в месяц</c:v>
+                  </c:pt>
+                  <c:pt idx="4">
+                    <c:v>Неудовлетворённые руководителем → «скорее удовлетворены»</c:v>
+                  </c:pt>
+                  <c:pt idx="5">
+                    <c:v>Все работающие полный день уходят с работы</c:v>
+                  </c:pt>
+                </c:lvl>
+              </c:multiLvlStrCache>
+            </c:multiLvlStrRef>
+          </c:cat>
+          <c:val>
+            <c:numRef>
+              <c:f>Sheet1!$B$2:$B$7</c:f>
+              <c:numCache>
+                <c:formatCode>General</c:formatCode>
+                <c:ptCount val="6"/>
+                <c:pt idx="0">
+                  <c:v>7.2</c:v>
+                </c:pt>
+                <c:pt idx="1">
+                  <c:v>4.2</c:v>
+                </c:pt>
+                <c:pt idx="2">
+                  <c:v>2</c:v>
+                </c:pt>
+                <c:pt idx="3">
+                  <c:v>1.2</c:v>
+                </c:pt>
+                <c:pt idx="4">
+                  <c:v>0.7</c:v>
+                </c:pt>
+                <c:pt idx="5">
+                  <c:v>0.1</c:v>
+                </c:pt>
+              </c:numCache>
+            </c:numRef>
+          </c:val>
+        </c:ser>
+        <c:dLbls>
+          <c:numFmt formatCode="0.0" sourceLinked="0"/>
+          <c:txPr>
+            <a:bodyPr/>
+            <a:lstStyle/>
+            <a:p>
+              <a:pPr>
+                <a:defRPr b="0" i="0" strike="noStrike" sz="1200" u="none">
+                  <a:solidFill>
+                    <a:srgbClr val="FFFFFF"/>
+                  </a:solidFill>
+                  <a:latin typeface="+mn-lt"/>
+                </a:defRPr>
+              </a:pPr>
+            </a:p>
+          </c:txPr>
+          <c:showLegendKey val="0"/>
+          <c:showVal val="1"/>
+          <c:showCatName val="0"/>
+          <c:showSerName val="0"/>
+          <c:showPercent val="0"/>
+          <c:showBubbleSize val="0"/>
+          <c:showLeaderLines val="0"/>
+        </c:dLbls>
+        <c:gapWidth val="45"/>
+        <c:overlap val="0"/>
+        <c:axId val="2094734554"/>
+        <c:axId val="2094734552"/>
+        <c:axId val="2094734556"/>
+      </c:barChart>
+      <c:catAx>
+        <c:axId val="2094734554"/>
+        <c:scaling>
+          <c:orientation val="maxMin"/>
+        </c:scaling>
+        <c:delete val="0"/>
+        <c:axPos val="l"/>
+        <c:numFmt formatCode="General" sourceLinked="1"/>
+        <c:majorTickMark val="out"/>
+        <c:minorTickMark val="none"/>
+        <c:tickLblPos val="nextTo"/>
+        <c:spPr>
+          <a:ln w="12700" cap="flat">
+            <a:solidFill>
+              <a:srgbClr val="52627F"/>
+            </a:solidFill>
+            <a:prstDash val="solid"/>
+            <a:round/>
+          </a:ln>
+        </c:spPr>
+        <c:txPr>
+          <a:bodyPr/>
+          <a:lstStyle/>
+          <a:p>
+            <a:pPr>
+              <a:defRPr sz="1100" b="0" i="0" u="none" strike="noStrike">
+                <a:solidFill>
+                  <a:srgbClr val="FFFFFF"/>
+                </a:solidFill>
+                <a:latin typeface="+mn-lt"/>
+              </a:defRPr>
+            </a:pPr>
+            <a:endParaRPr lang="en-US"/>
+          </a:p>
+        </c:txPr>
+        <c:crossAx val="2094734552"/>
+        <c:crosses val="autoZero"/>
+        <c:auto val="1"/>
+        <c:lblAlgn val="ctr"/>
+        <c:noMultiLvlLbl val="1"/>
+      </c:catAx>
+      <c:valAx>
+        <c:axId val="2094734552"/>
+        <c:scaling>
+          <c:orientation val="minMax"/>
+          <c:max val="9"/>
           <c:min val="0"/>
         </c:scaling>
         <c:delete val="1"/>
@@ -2484,7 +2182,7 @@
           <a:p>
             <a:r>
               <a:rPr lang="en-US" dirty="0"/>
-              <a:t>Титульный слайд. Название команды и участников добавить перед отправкой.</a:t>
+              <a:t>Главная мысль за 10 секунд: работа почти не связана с желанием уйти; решают руководитель, академическое сообщество и ментальное здоровье, а вузы с «конвейером защит» усиливают риск.</a:t>
             </a:r>
             <a:endParaRPr lang="en-US" dirty="0"/>
           </a:p>
@@ -2660,7 +2358,7 @@
           <a:p>
             <a:r>
               <a:rPr lang="en-US" dirty="0"/>
-              <a:t>Зависимая переменная предложена организаторами: Q13_r3 «Я часто хочу бросить обучение в аспирантуре».</a:t>
+              <a:t/>
             </a:r>
             <a:endParaRPr lang="en-US" dirty="0"/>
           </a:p>
@@ -3188,7 +2886,7 @@
           <a:p>
             <a:r>
               <a:rPr lang="en-US" dirty="0"/>
-              <a:t>Здоровье, среда и руководитель вместе дают около 67% объяснённой вариации; мотивация (интерес к теме, цель получить степень) около 22%.</a:t>
+              <a:t/>
             </a:r>
             <a:endParaRPr lang="en-US" dirty="0"/>
           </a:p>
@@ -3530,7 +3228,7 @@
         <p:spPr>
           <a:xfrm>
             <a:off x="548640" y="6400800"/>
-            <a:ext cx="8229600" cy="274320"/>
+            <a:ext cx="10058400" cy="274320"/>
           </a:xfrm>
           <a:prstGeom prst="rect">
             <a:avLst/>
@@ -3553,7 +3251,7 @@
                   </a:schemeClr>
                 </a:solidFill>
               </a:rPr>
-              <a:t>Данные: Всероссийский опрос аспирантов, 2021 (НИУ ВШЭ, HSE-BR-2025-009)</a:t>
+              <a:t>Данные: Всероссийский опрос аспирантов 2021 (HSE-BR-2025-009); Мониторинг эффективности вузов 2022 (Минобрнауки)</a:t>
             </a:r>
             <a:endParaRPr lang="en-US" sz="1000" dirty="0"/>
           </a:p>
@@ -4102,7 +3800,7 @@
                   <a:schemeClr val="bg1"/>
                 </a:solidFill>
               </a:rPr>
-              <a:t>Не работа, а среда: что толкает аспирантов к мысли об отчислении</a:t>
+              <a:t>Не работа, а среда: кто и почему хочет бросить аспирантуру</a:t>
             </a:r>
             <a:endParaRPr lang="en-US" sz="4000" dirty="0"/>
           </a:p>
@@ -4140,7 +3838,7 @@
                   <a:schemeClr val="bg2"/>
                 </a:solidFill>
               </a:rPr>
-              <a:t>Научный руководитель, академическая принадлежность и ментальное здоровье против внешней занятости</a:t>
+              <a:t>Связка двух массивов хакатона: опрос 5 007 аспирантов × Мониторинг эффективности вузов</a:t>
             </a:r>
             <a:endParaRPr lang="en-US" sz="1800" dirty="0"/>
           </a:p>
@@ -4154,7 +3852,7 @@
                   <a:schemeClr val="bg2"/>
                 </a:solidFill>
               </a:rPr>
-              <a:t>Хакатон исследователей высшего образования · Конференция ИВО 2026 · номинация «Анализ данных»</a:t>
+              <a:t>Егор Чуланов · Хакатон исследователей высшего образования, Конференция ИВО 2026 · номинация «Анализ данных»</a:t>
             </a:r>
             <a:endParaRPr lang="en-US" sz="1800" dirty="0"/>
           </a:p>
@@ -4217,26 +3915,42 @@
                   <a:schemeClr val="bg1"/>
                 </a:solidFill>
               </a:rPr>
-              <a:t>Выводы и что может сделать вуз</a:t>
+              <a:t>Что даст вузу каждая мера: симуляция на модели</a:t>
             </a:r>
             <a:endParaRPr lang="en-US" sz="2600" dirty="0"/>
           </a:p>
         </p:txBody>
       </p:sp>
-      <p:sp>
-        <p:nvSpPr>
-          <p:cNvPr id="3" name="Shape 1"/>
+      <p:graphicFrame>
+        <p:nvGraphicFramePr>
+          <p:cNvPr id="3" name="Chart 0" descr=""/>
+          <p:cNvGraphicFramePr/>
+          <p:nvPr/>
+        </p:nvGraphicFramePr>
+        <p:xfrm>
+          <a:off x="548640" y="1234440"/>
+          <a:ext cx="6766560" cy="3931920"/>
+        </p:xfrm>
+        <a:graphic xmlns:a="http://schemas.openxmlformats.org/drawingml/2006/main">
+          <a:graphicData uri="http://schemas.openxmlformats.org/drawingml/2006/chart">
+            <c:chart xmlns:c="http://schemas.openxmlformats.org/drawingml/2006/chart" r:id="rId1"/>
+          </a:graphicData>
+        </a:graphic>
+      </p:graphicFrame>
+      <p:sp>
+        <p:nvSpPr>
+          <p:cNvPr id="4" name="Shape 1"/>
           <p:cNvSpPr/>
           <p:nvPr/>
         </p:nvSpPr>
         <p:spPr>
           <a:xfrm>
-            <a:off x="548640" y="1371600"/>
-            <a:ext cx="3520440" cy="4434840"/>
+            <a:off x="7543800" y="1234440"/>
+            <a:ext cx="4114800" cy="3931920"/>
           </a:xfrm>
           <a:prstGeom prst="roundRect">
             <a:avLst>
-              <a:gd name="adj" fmla="val 2078"/>
+              <a:gd name="adj" fmla="val 1860"/>
             </a:avLst>
           </a:prstGeom>
           <a:solidFill>
@@ -4252,14 +3966,14 @@
       </p:sp>
       <p:sp>
         <p:nvSpPr>
-          <p:cNvPr id="4" name="Text 2"/>
+          <p:cNvPr id="5" name="Text 2"/>
           <p:cNvSpPr txBox="1"/>
           <p:nvPr/>
         </p:nvSpPr>
         <p:spPr>
           <a:xfrm>
-            <a:off x="822960" y="1554480"/>
-            <a:ext cx="3017520" cy="411480"/>
+            <a:off x="7772400" y="1417320"/>
+            <a:ext cx="3657600" cy="365760"/>
           </a:xfrm>
           <a:prstGeom prst="rect">
             <a:avLst/>
@@ -4275,27 +3989,27 @@
               <a:buNone/>
             </a:pPr>
             <a:r>
-              <a:rPr lang="en-US" sz="1900" b="1" dirty="0">
-                <a:solidFill>
-                  <a:schemeClr val="bg1"/>
-                </a:solidFill>
-              </a:rPr>
-              <a:t>Что нашли</a:t>
-            </a:r>
-            <a:endParaRPr lang="en-US" sz="1900" dirty="0"/>
-          </a:p>
-        </p:txBody>
-      </p:sp>
-      <p:sp>
-        <p:nvSpPr>
-          <p:cNvPr id="5" name="Text 3"/>
+              <a:rPr lang="en-US" sz="1700" b="1" dirty="0">
+                <a:solidFill>
+                  <a:schemeClr val="accent2"/>
+                </a:solidFill>
+              </a:rPr>
+              <a:t>Рекомендации</a:t>
+            </a:r>
+            <a:endParaRPr lang="en-US" sz="1700" dirty="0"/>
+          </a:p>
+        </p:txBody>
+      </p:sp>
+      <p:sp>
+        <p:nvSpPr>
+          <p:cNvPr id="6" name="Text 3"/>
           <p:cNvSpPr txBox="1"/>
           <p:nvPr/>
         </p:nvSpPr>
         <p:spPr>
           <a:xfrm>
-            <a:off x="822960" y="2103120"/>
-            <a:ext cx="3017520" cy="3566160"/>
+            <a:off x="7772400" y="1874520"/>
+            <a:ext cx="3703320" cy="3200400"/>
           </a:xfrm>
           <a:prstGeom prst="rect">
             <a:avLst/>
@@ -4309,7 +4023,7 @@
           <a:p>
             <a:pPr marL="342900" indent="-342900">
               <a:spcAft>
-                <a:spcPts val="1000"/>
+                <a:spcPts val="800"/>
               </a:spcAft>
               <a:buSzPct val="100000"/>
               <a:buChar char="•"/>
@@ -4320,14 +4034,14 @@
                   <a:schemeClr val="bg1"/>
                 </a:solidFill>
               </a:rPr>
-              <a:t>H1 нет: тип занятости не связан с намерением уйти</a:t>
+              <a:t>Ежегодный скрининг PHQ-8 и путь к психологу</a:t>
             </a:r>
             <a:endParaRPr lang="en-US" sz="1400" dirty="0"/>
           </a:p>
           <a:p>
             <a:pPr marL="342900" indent="-342900">
               <a:spcAft>
-                <a:spcPts val="1000"/>
+                <a:spcPts val="800"/>
               </a:spcAft>
               <a:buSzPct val="100000"/>
               <a:buChar char="•"/>
@@ -4338,14 +4052,14 @@
                   <a:schemeClr val="bg1"/>
                 </a:solidFill>
               </a:rPr>
-              <a:t>H2 да: руководитель, среда и здоровье дают ~2/3 объяснённого</a:t>
+              <a:t>Стандарт: встреча с руководителем ≥ 2 раз в месяц</a:t>
             </a:r>
             <a:endParaRPr lang="en-US" sz="1400" dirty="0"/>
           </a:p>
           <a:p>
             <a:pPr marL="342900" indent="-342900">
               <a:spcAft>
-                <a:spcPts val="1000"/>
+                <a:spcPts val="800"/>
               </a:spcAft>
               <a:buSzPct val="100000"/>
               <a:buChar char="•"/>
@@ -4356,14 +4070,14 @@
                   <a:schemeClr val="bg1"/>
                 </a:solidFill>
               </a:rPr>
-              <a:t>H3 частично: 17% эффекта среды идёт через здоровье</a:t>
+              <a:t>Аспирантские семинары и сообщество кафедры</a:t>
             </a:r>
             <a:endParaRPr lang="en-US" sz="1400" dirty="0"/>
           </a:p>
           <a:p>
             <a:pPr marL="342900" indent="-342900">
               <a:spcAft>
-                <a:spcPts val="1000"/>
+                <a:spcPts val="800"/>
               </a:spcAft>
               <a:buSzPct val="100000"/>
               <a:buChar char="•"/>
@@ -4374,99 +4088,14 @@
                   <a:schemeClr val="bg1"/>
                 </a:solidFill>
               </a:rPr>
-              <a:t>H4 да: принадлежность сильнее защищает работающих</a:t>
+              <a:t>Ранний сигнал: короткая анкета находит 20% группы риска</a:t>
             </a:r>
             <a:endParaRPr lang="en-US" sz="1400" dirty="0"/>
           </a:p>
-        </p:txBody>
-      </p:sp>
-      <p:sp>
-        <p:nvSpPr>
-          <p:cNvPr id="6" name="Shape 4"/>
-          <p:cNvSpPr/>
-          <p:nvPr/>
-        </p:nvSpPr>
-        <p:spPr>
-          <a:xfrm>
-            <a:off x="4297680" y="1371600"/>
-            <a:ext cx="3520440" cy="4434840"/>
-          </a:xfrm>
-          <a:prstGeom prst="roundRect">
-            <a:avLst>
-              <a:gd name="adj" fmla="val 2078"/>
-            </a:avLst>
-          </a:prstGeom>
-          <a:solidFill>
-            <a:srgbClr val="22335A"/>
-          </a:solidFill>
-          <a:ln w="12700">
-            <a:solidFill>
-              <a:srgbClr val="22335A"/>
-            </a:solidFill>
-            <a:prstDash val="solid"/>
-          </a:ln>
-        </p:spPr>
-      </p:sp>
-      <p:sp>
-        <p:nvSpPr>
-          <p:cNvPr id="7" name="Text 5"/>
-          <p:cNvSpPr txBox="1"/>
-          <p:nvPr/>
-        </p:nvSpPr>
-        <p:spPr>
-          <a:xfrm>
-            <a:off x="4572000" y="1554480"/>
-            <a:ext cx="3017520" cy="411480"/>
-          </a:xfrm>
-          <a:prstGeom prst="rect">
-            <a:avLst/>
-          </a:prstGeom>
-          <a:noFill/>
-          <a:ln/>
-        </p:spPr>
-        <p:txBody>
-          <a:bodyPr wrap="square" lIns="0" tIns="0" rIns="0" bIns="0" rtlCol="0" anchor="ctr"/>
-          <a:lstStyle/>
-          <a:p>
-            <a:pPr indent="0" marL="0">
-              <a:buNone/>
-            </a:pPr>
-            <a:r>
-              <a:rPr lang="en-US" sz="1900" b="1" dirty="0">
-                <a:solidFill>
-                  <a:schemeClr val="accent2"/>
-                </a:solidFill>
-              </a:rPr>
-              <a:t>Что делать вузу</a:t>
-            </a:r>
-            <a:endParaRPr lang="en-US" sz="1900" dirty="0"/>
-          </a:p>
-        </p:txBody>
-      </p:sp>
-      <p:sp>
-        <p:nvSpPr>
-          <p:cNvPr id="8" name="Text 6"/>
-          <p:cNvSpPr txBox="1"/>
-          <p:nvPr/>
-        </p:nvSpPr>
-        <p:spPr>
-          <a:xfrm>
-            <a:off x="4572000" y="2103120"/>
-            <a:ext cx="3017520" cy="3566160"/>
-          </a:xfrm>
-          <a:prstGeom prst="rect">
-            <a:avLst/>
-          </a:prstGeom>
-          <a:noFill/>
-          <a:ln/>
-        </p:spPr>
-        <p:txBody>
-          <a:bodyPr wrap="square" lIns="0" tIns="0" rIns="0" bIns="0" rtlCol="0" anchor="t"/>
-          <a:lstStyle/>
           <a:p>
             <a:pPr marL="342900" indent="-342900">
               <a:spcAft>
-                <a:spcPts val="1000"/>
+                <a:spcPts val="800"/>
               </a:spcAft>
               <a:buSzPct val="100000"/>
               <a:buChar char="•"/>
@@ -4477,103 +4106,22 @@
                   <a:schemeClr val="bg1"/>
                 </a:solidFill>
               </a:rPr>
-              <a:t>Скрининг благополучия (PHQ-8) на ежегодной аттестации</a:t>
+              <a:t>Не запрещать работу: это не помогает</a:t>
             </a:r>
             <a:endParaRPr lang="en-US" sz="1400" dirty="0"/>
           </a:p>
-          <a:p>
-            <a:pPr marL="342900" indent="-342900">
-              <a:spcAft>
-                <a:spcPts val="1000"/>
-              </a:spcAft>
-              <a:buSzPct val="100000"/>
-              <a:buChar char="•"/>
-            </a:pPr>
-            <a:r>
-              <a:rPr lang="en-US" sz="1400" dirty="0">
-                <a:solidFill>
-                  <a:schemeClr val="bg1"/>
-                </a:solidFill>
-              </a:rPr>
-              <a:t>Стандарт: встреча с руководителем не реже 2 раз в месяц</a:t>
-            </a:r>
-            <a:endParaRPr lang="en-US" sz="1400" dirty="0"/>
-          </a:p>
-          <a:p>
-            <a:pPr marL="342900" indent="-342900">
-              <a:spcAft>
-                <a:spcPts val="1000"/>
-              </a:spcAft>
-              <a:buSzPct val="100000"/>
-              <a:buChar char="•"/>
-            </a:pPr>
-            <a:r>
-              <a:rPr lang="en-US" sz="1400" dirty="0">
-                <a:solidFill>
-                  <a:schemeClr val="bg1"/>
-                </a:solidFill>
-              </a:rPr>
-              <a:t>Аспирантские семинары и сообщество, особенно для работающих</a:t>
-            </a:r>
-            <a:endParaRPr lang="en-US" sz="1400" dirty="0"/>
-          </a:p>
-          <a:p>
-            <a:pPr marL="342900" indent="-342900">
-              <a:spcAft>
-                <a:spcPts val="1000"/>
-              </a:spcAft>
-              <a:buSzPct val="100000"/>
-              <a:buChar char="•"/>
-            </a:pPr>
-            <a:r>
-              <a:rPr lang="en-US" sz="1400" dirty="0">
-                <a:solidFill>
-                  <a:schemeClr val="bg1"/>
-                </a:solidFill>
-              </a:rPr>
-              <a:t>Не ограничивать работу, а связывать её с темой диссертации</a:t>
-            </a:r>
-            <a:endParaRPr lang="en-US" sz="1400" dirty="0"/>
-          </a:p>
-        </p:txBody>
-      </p:sp>
-      <p:sp>
-        <p:nvSpPr>
-          <p:cNvPr id="9" name="Shape 7"/>
-          <p:cNvSpPr/>
-          <p:nvPr/>
-        </p:nvSpPr>
-        <p:spPr>
-          <a:xfrm>
-            <a:off x="8046720" y="1371600"/>
-            <a:ext cx="3520440" cy="4434840"/>
-          </a:xfrm>
-          <a:prstGeom prst="roundRect">
-            <a:avLst>
-              <a:gd name="adj" fmla="val 2078"/>
-            </a:avLst>
-          </a:prstGeom>
-          <a:solidFill>
-            <a:srgbClr val="22335A"/>
-          </a:solidFill>
-          <a:ln w="12700">
-            <a:solidFill>
-              <a:srgbClr val="22335A"/>
-            </a:solidFill>
-            <a:prstDash val="solid"/>
-          </a:ln>
-        </p:spPr>
-      </p:sp>
-      <p:sp>
-        <p:nvSpPr>
-          <p:cNvPr id="10" name="Text 8"/>
+        </p:txBody>
+      </p:sp>
+      <p:sp>
+        <p:nvSpPr>
+          <p:cNvPr id="7" name="Text 4"/>
           <p:cNvSpPr txBox="1"/>
           <p:nvPr/>
         </p:nvSpPr>
         <p:spPr>
           <a:xfrm>
-            <a:off x="8321040" y="1554480"/>
-            <a:ext cx="3017520" cy="411480"/>
+            <a:off x="548640" y="5349240"/>
+            <a:ext cx="11094415" cy="548640"/>
           </a:xfrm>
           <a:prstGeom prst="rect">
             <a:avLst/>
@@ -4582,34 +4130,45 @@
           <a:ln/>
         </p:spPr>
         <p:txBody>
-          <a:bodyPr wrap="square" lIns="0" tIns="0" rIns="0" bIns="0" rtlCol="0" anchor="ctr"/>
+          <a:bodyPr wrap="square" lIns="0" tIns="0" rIns="0" bIns="0" rtlCol="0" anchor="t"/>
           <a:lstStyle/>
           <a:p>
             <a:pPr indent="0" marL="0">
               <a:buNone/>
             </a:pPr>
             <a:r>
-              <a:rPr lang="en-US" sz="1900" b="1" dirty="0">
+              <a:rPr lang="en-US" sz="1200" b="1" dirty="0">
                 <a:solidFill>
                   <a:schemeClr val="bg1"/>
                 </a:solidFill>
               </a:rPr>
-              <a:t>Ограничения</a:t>
-            </a:r>
-            <a:endParaRPr lang="en-US" sz="1900" dirty="0"/>
-          </a:p>
-        </p:txBody>
-      </p:sp>
-      <p:sp>
-        <p:nvSpPr>
-          <p:cNvPr id="11" name="Text 9"/>
+              <a:t>Ограничения: </a:t>
+            </a:r>
+            <a:pPr indent="0" marL="0">
+              <a:buNone/>
+            </a:pPr>
+            <a:r>
+              <a:rPr lang="en-US" sz="1200" dirty="0">
+                <a:solidFill>
+                  <a:schemeClr val="bg1"/>
+                </a:solidFill>
+              </a:rPr>
+              <a:t>кросс-секционные данные (связи, не причинность), намерение вместо факта отчисления, онлайн-опрос весны 2021 года. Далее: лонгитюд и данные о фактических отчислениях.</a:t>
+            </a:r>
+            <a:endParaRPr lang="en-US" sz="1200" dirty="0"/>
+          </a:p>
+        </p:txBody>
+      </p:sp>
+      <p:sp>
+        <p:nvSpPr>
+          <p:cNvPr id="8" name="Text 5"/>
           <p:cNvSpPr txBox="1"/>
           <p:nvPr/>
         </p:nvSpPr>
         <p:spPr>
           <a:xfrm>
-            <a:off x="8321040" y="2103120"/>
-            <a:ext cx="3017520" cy="3566160"/>
+            <a:off x="548640" y="5989320"/>
+            <a:ext cx="10180015" cy="365760"/>
           </a:xfrm>
           <a:prstGeom prst="rect">
             <a:avLst/>
@@ -4618,100 +4177,6 @@
           <a:ln/>
         </p:spPr>
         <p:txBody>
-          <a:bodyPr wrap="square" lIns="0" tIns="0" rIns="0" bIns="0" rtlCol="0" anchor="t"/>
-          <a:lstStyle/>
-          <a:p>
-            <a:pPr marL="342900" indent="-342900">
-              <a:spcAft>
-                <a:spcPts val="1000"/>
-              </a:spcAft>
-              <a:buSzPct val="100000"/>
-              <a:buChar char="•"/>
-            </a:pPr>
-            <a:r>
-              <a:rPr lang="en-US" sz="1400" dirty="0">
-                <a:solidFill>
-                  <a:schemeClr val="bg1"/>
-                </a:solidFill>
-              </a:rPr>
-              <a:t>Кросс-секционные данные: связи, не причинность</a:t>
-            </a:r>
-            <a:endParaRPr lang="en-US" sz="1400" dirty="0"/>
-          </a:p>
-          <a:p>
-            <a:pPr marL="342900" indent="-342900">
-              <a:spcAft>
-                <a:spcPts val="1000"/>
-              </a:spcAft>
-              <a:buSzPct val="100000"/>
-              <a:buChar char="•"/>
-            </a:pPr>
-            <a:r>
-              <a:rPr lang="en-US" sz="1400" dirty="0">
-                <a:solidFill>
-                  <a:schemeClr val="bg1"/>
-                </a:solidFill>
-              </a:rPr>
-              <a:t>Намерение, а не факт отчисления</a:t>
-            </a:r>
-            <a:endParaRPr lang="en-US" sz="1400" dirty="0"/>
-          </a:p>
-          <a:p>
-            <a:pPr marL="342900" indent="-342900">
-              <a:spcAft>
-                <a:spcPts val="1000"/>
-              </a:spcAft>
-              <a:buSzPct val="100000"/>
-              <a:buChar char="•"/>
-            </a:pPr>
-            <a:r>
-              <a:rPr lang="en-US" sz="1400" dirty="0">
-                <a:solidFill>
-                  <a:schemeClr val="bg1"/>
-                </a:solidFill>
-              </a:rPr>
-              <a:t>Самоотбор в онлайн-опросе, весна 2021 (пандемия)</a:t>
-            </a:r>
-            <a:endParaRPr lang="en-US" sz="1400" dirty="0"/>
-          </a:p>
-          <a:p>
-            <a:pPr marL="342900" indent="-342900">
-              <a:spcAft>
-                <a:spcPts val="1000"/>
-              </a:spcAft>
-              <a:buSzPct val="100000"/>
-              <a:buChar char="•"/>
-            </a:pPr>
-            <a:r>
-              <a:rPr lang="en-US" sz="1400" dirty="0">
-                <a:solidFill>
-                  <a:schemeClr val="bg1"/>
-                </a:solidFill>
-              </a:rPr>
-              <a:t>Дальше: связать с данными МЭВ по выпуску аспирантов</a:t>
-            </a:r>
-            <a:endParaRPr lang="en-US" sz="1400" dirty="0"/>
-          </a:p>
-        </p:txBody>
-      </p:sp>
-      <p:sp>
-        <p:nvSpPr>
-          <p:cNvPr id="12" name="Text 10"/>
-          <p:cNvSpPr txBox="1"/>
-          <p:nvPr/>
-        </p:nvSpPr>
-        <p:spPr>
-          <a:xfrm>
-            <a:off x="548640" y="5989320"/>
-            <a:ext cx="10180015" cy="365760"/>
-          </a:xfrm>
-          <a:prstGeom prst="rect">
-            <a:avLst/>
-          </a:prstGeom>
-          <a:noFill/>
-          <a:ln/>
-        </p:spPr>
-        <p:txBody>
           <a:bodyPr wrap="square" lIns="0" tIns="0" rIns="0" bIns="0" rtlCol="0" anchor="ctr"/>
           <a:lstStyle/>
           <a:p>
@@ -4724,7 +4189,7 @@
                   <a:schemeClr val="bg2"/>
                 </a:solidFill>
               </a:rPr>
-              <a:t>Исследование осуществлено с использованием данных Программы фундаментальных исследований НИУ ВШЭ (HSE-BR-2025-009). Контекст о защитах: ИСИЭЗ НИУ ВШЭ.</a:t>
+              <a:t>Исследование осуществлено в рамках Программы фундаментальных исследований НИУ ВШЭ (HSE-BR-2025-009). Авторы благодарят лабораторию «Развитие университетов» ИО НИУ ВШЭ за сводную базу МЭВ.</a:t>
             </a:r>
             <a:endParaRPr lang="en-US" sz="1000" dirty="0"/>
           </a:p>
@@ -4832,7 +4297,7 @@
                   <a:schemeClr val="tx2"/>
                 </a:solidFill>
               </a:rPr>
-              <a:t>Почему важно понять, кто хочет уйти из аспирантуры</a:t>
+              <a:t>Вопрос: что на самом деле толкает аспирантов к мысли об уходе</a:t>
             </a:r>
             <a:endParaRPr lang="en-US" sz="2600" dirty="0"/>
           </a:p>
@@ -4847,11 +4312,11 @@
         <p:spPr>
           <a:xfrm>
             <a:off x="548640" y="1325880"/>
-            <a:ext cx="5120640" cy="4754880"/>
+            <a:ext cx="5074920" cy="4800600"/>
           </a:xfrm>
           <a:prstGeom prst="roundRect">
             <a:avLst>
-              <a:gd name="adj" fmla="val 1538"/>
+              <a:gd name="adj" fmla="val 1524"/>
             </a:avLst>
           </a:prstGeom>
           <a:solidFill>
@@ -4873,7 +4338,7 @@
         </p:nvSpPr>
         <p:spPr>
           <a:xfrm>
-            <a:off x="868680" y="1508760"/>
+            <a:off x="822960" y="1508760"/>
             <a:ext cx="4572000" cy="365760"/>
           </a:xfrm>
           <a:prstGeom prst="rect">
@@ -4890,14 +4355,14 @@
               <a:buNone/>
             </a:pPr>
             <a:r>
-              <a:rPr lang="en-US" sz="1800" b="1" dirty="0">
+              <a:rPr lang="en-US" sz="1700" b="1" dirty="0">
                 <a:solidFill>
                   <a:schemeClr val="tx2"/>
                 </a:solidFill>
               </a:rPr>
-              <a:t>Контекст</a:t>
-            </a:r>
-            <a:endParaRPr lang="en-US" sz="1800" dirty="0"/>
+              <a:t>Почему это важно</a:t>
+            </a:r>
+            <a:endParaRPr lang="en-US" sz="1700" dirty="0"/>
           </a:p>
         </p:txBody>
       </p:sp>
@@ -4909,8 +4374,8 @@
         </p:nvSpPr>
         <p:spPr>
           <a:xfrm>
-            <a:off x="868680" y="1965960"/>
-            <a:ext cx="4572000" cy="3108960"/>
+            <a:off x="822960" y="1965960"/>
+            <a:ext cx="4572000" cy="4023360"/>
           </a:xfrm>
           <a:prstGeom prst="rect">
             <a:avLst/>
@@ -4924,7 +4389,7 @@
           <a:p>
             <a:pPr marL="342900" indent="-342900">
               <a:spcAft>
-                <a:spcPts val="1000"/>
+                <a:spcPts val="800"/>
               </a:spcAft>
               <a:buSzPct val="100000"/>
               <a:buChar char="•"/>
@@ -4942,7 +4407,7 @@
           <a:p>
             <a:pPr marL="342900" indent="-342900">
               <a:spcAft>
-                <a:spcPts val="1000"/>
+                <a:spcPts val="800"/>
               </a:spcAft>
               <a:buSzPct val="100000"/>
               <a:buChar char="•"/>
@@ -4953,14 +4418,14 @@
                   <a:schemeClr val="tx1"/>
                 </a:solidFill>
               </a:rPr>
-              <a:t>Намерение уйти предшествует отчислению: это ранний сигнал, который вуз может заметить</a:t>
+              <a:t>Намерение уйти опережает отчисление: это сигнал, который вуз может поймать заранее</a:t>
             </a:r>
             <a:endParaRPr lang="en-US" sz="1500" dirty="0"/>
           </a:p>
           <a:p>
             <a:pPr marL="342900" indent="-342900">
               <a:spcAft>
-                <a:spcPts val="1000"/>
+                <a:spcPts val="800"/>
               </a:spcAft>
               <a:buSzPct val="100000"/>
               <a:buChar char="•"/>
@@ -4971,7 +4436,25 @@
                   <a:schemeClr val="tx1"/>
                 </a:solidFill>
               </a:rPr>
-              <a:t>Частое объяснение «аспиранты уходят, потому что работают». Мы проверяем, так ли это</a:t>
+              <a:t>Расхожее объяснение: «уходят, потому что работают». Политика часто строится на нём</a:t>
+            </a:r>
+            <a:endParaRPr lang="en-US" sz="1500" dirty="0"/>
+          </a:p>
+          <a:p>
+            <a:pPr marL="342900" indent="-342900">
+              <a:spcAft>
+                <a:spcPts val="800"/>
+              </a:spcAft>
+              <a:buSzPct val="100000"/>
+              <a:buChar char="•"/>
+            </a:pPr>
+            <a:r>
+              <a:rPr lang="en-US" sz="1500" dirty="0">
+                <a:solidFill>
+                  <a:schemeClr val="tx1"/>
+                </a:solidFill>
+              </a:rPr>
+              <a:t>Если оно неверно, вузы тратят ресурс не туда</a:t>
             </a:r>
             <a:endParaRPr lang="en-US" sz="1500" dirty="0"/>
           </a:p>
@@ -4985,8 +4468,8 @@
         </p:nvSpPr>
         <p:spPr>
           <a:xfrm>
-            <a:off x="6172200" y="1371600"/>
-            <a:ext cx="5486400" cy="365760"/>
+            <a:off x="5989320" y="1371600"/>
+            <a:ext cx="5669280" cy="365760"/>
           </a:xfrm>
           <a:prstGeom prst="rect">
             <a:avLst/>
@@ -5002,14 +4485,14 @@
               <a:buNone/>
             </a:pPr>
             <a:r>
-              <a:rPr lang="en-US" sz="1800" b="1" dirty="0">
+              <a:rPr lang="en-US" sz="1700" b="1" dirty="0">
                 <a:solidFill>
                   <a:schemeClr val="tx2"/>
                 </a:solidFill>
               </a:rPr>
               <a:t>Исследовательский вопрос</a:t>
             </a:r>
-            <a:endParaRPr lang="en-US" sz="1800" dirty="0"/>
+            <a:endParaRPr lang="en-US" sz="1700" dirty="0"/>
           </a:p>
         </p:txBody>
       </p:sp>
@@ -5021,8 +4504,8 @@
         </p:nvSpPr>
         <p:spPr>
           <a:xfrm>
-            <a:off x="6172200" y="1783080"/>
-            <a:ext cx="5486400" cy="1371600"/>
+            <a:off x="5989320" y="1783080"/>
+            <a:ext cx="5669280" cy="1188720"/>
           </a:xfrm>
           <a:prstGeom prst="rect">
             <a:avLst/>
@@ -5035,15 +4518,18 @@
           <a:lstStyle/>
           <a:p>
             <a:pPr indent="0" marL="0">
+              <a:spcAft>
+                <a:spcPts val="600"/>
+              </a:spcAft>
               <a:buNone/>
             </a:pPr>
             <a:r>
-              <a:rPr lang="en-US" sz="1600" i="1" dirty="0">
+              <a:rPr lang="en-US" sz="1600" dirty="0">
                 <a:solidFill>
                   <a:schemeClr val="tx1"/>
                 </a:solidFill>
               </a:rPr>
-              <a:t>Что сильнее связано с желанием бросить аспирантуру: внешняя нагрузка (работа, семья, финансы) или качество академической среды и научного руководства? И через что действует эта связь?</a:t>
+              <a:t>Что сильнее связано с желанием бросить аспирантуру: внешняя нагрузка или академическая среда, научное руководство и ментальное здоровье, и есть ли эффект самого вуза?</a:t>
             </a:r>
             <a:endParaRPr lang="en-US" sz="1600" dirty="0"/>
           </a:p>
@@ -5057,8 +4543,8 @@
         </p:nvSpPr>
         <p:spPr>
           <a:xfrm>
-            <a:off x="6172200" y="3291840"/>
-            <a:ext cx="502920" cy="502920"/>
+            <a:off x="5989320" y="3108960"/>
+            <a:ext cx="457200" cy="457200"/>
           </a:xfrm>
           <a:prstGeom prst="ellipse">
             <a:avLst/>
@@ -5082,8 +4568,8 @@
         </p:nvSpPr>
         <p:spPr>
           <a:xfrm>
-            <a:off x="6172200" y="3291840"/>
-            <a:ext cx="502920" cy="502920"/>
+            <a:off x="5989320" y="3108960"/>
+            <a:ext cx="457200" cy="457200"/>
           </a:xfrm>
           <a:prstGeom prst="rect">
             <a:avLst/>
@@ -5099,14 +4585,14 @@
               <a:buNone/>
             </a:pPr>
             <a:r>
-              <a:rPr lang="en-US" sz="1300" b="1" dirty="0">
+              <a:rPr lang="en-US" sz="1200" b="1" dirty="0">
                 <a:solidFill>
                   <a:schemeClr val="bg1"/>
                 </a:solidFill>
               </a:rPr>
               <a:t>H1</a:t>
             </a:r>
-            <a:endParaRPr lang="en-US" sz="1300" dirty="0"/>
+            <a:endParaRPr lang="en-US" sz="1200" dirty="0"/>
           </a:p>
         </p:txBody>
       </p:sp>
@@ -5118,8 +4604,8 @@
         </p:nvSpPr>
         <p:spPr>
           <a:xfrm>
-            <a:off x="6812280" y="3291840"/>
-            <a:ext cx="4846320" cy="502920"/>
+            <a:off x="6583680" y="3108960"/>
+            <a:ext cx="5074920" cy="457200"/>
           </a:xfrm>
           <a:prstGeom prst="rect">
             <a:avLst/>
@@ -5154,8 +4640,8 @@
         </p:nvSpPr>
         <p:spPr>
           <a:xfrm>
-            <a:off x="6172200" y="3977640"/>
-            <a:ext cx="502920" cy="502920"/>
+            <a:off x="5989320" y="3712464"/>
+            <a:ext cx="457200" cy="457200"/>
           </a:xfrm>
           <a:prstGeom prst="ellipse">
             <a:avLst/>
@@ -5179,8 +4665,8 @@
         </p:nvSpPr>
         <p:spPr>
           <a:xfrm>
-            <a:off x="6172200" y="3977640"/>
-            <a:ext cx="502920" cy="502920"/>
+            <a:off x="5989320" y="3712464"/>
+            <a:ext cx="457200" cy="457200"/>
           </a:xfrm>
           <a:prstGeom prst="rect">
             <a:avLst/>
@@ -5196,14 +4682,14 @@
               <a:buNone/>
             </a:pPr>
             <a:r>
-              <a:rPr lang="en-US" sz="1300" b="1" dirty="0">
+              <a:rPr lang="en-US" sz="1200" b="1" dirty="0">
                 <a:solidFill>
                   <a:schemeClr val="bg1"/>
                 </a:solidFill>
               </a:rPr>
               <a:t>H2</a:t>
             </a:r>
-            <a:endParaRPr lang="en-US" sz="1300" dirty="0"/>
+            <a:endParaRPr lang="en-US" sz="1200" dirty="0"/>
           </a:p>
         </p:txBody>
       </p:sp>
@@ -5215,8 +4701,8 @@
         </p:nvSpPr>
         <p:spPr>
           <a:xfrm>
-            <a:off x="6812280" y="3977640"/>
-            <a:ext cx="4846320" cy="502920"/>
+            <a:off x="6583680" y="3712464"/>
+            <a:ext cx="5074920" cy="457200"/>
           </a:xfrm>
           <a:prstGeom prst="rect">
             <a:avLst/>
@@ -5237,7 +4723,7 @@
                   <a:schemeClr val="tx1"/>
                 </a:solidFill>
               </a:rPr>
-              <a:t>Руководитель и среда снижают риск сильнее, чем работа повышает</a:t>
+              <a:t>Руководитель и среда весят больше, чем работа</a:t>
             </a:r>
             <a:endParaRPr lang="en-US" sz="1400" dirty="0"/>
           </a:p>
@@ -5251,8 +4737,8 @@
         </p:nvSpPr>
         <p:spPr>
           <a:xfrm>
-            <a:off x="6172200" y="4663440"/>
-            <a:ext cx="502920" cy="502920"/>
+            <a:off x="5989320" y="4315968"/>
+            <a:ext cx="457200" cy="457200"/>
           </a:xfrm>
           <a:prstGeom prst="ellipse">
             <a:avLst/>
@@ -5276,8 +4762,8 @@
         </p:nvSpPr>
         <p:spPr>
           <a:xfrm>
-            <a:off x="6172200" y="4663440"/>
-            <a:ext cx="502920" cy="502920"/>
+            <a:off x="5989320" y="4315968"/>
+            <a:ext cx="457200" cy="457200"/>
           </a:xfrm>
           <a:prstGeom prst="rect">
             <a:avLst/>
@@ -5293,14 +4779,14 @@
               <a:buNone/>
             </a:pPr>
             <a:r>
-              <a:rPr lang="en-US" sz="1300" b="1" dirty="0">
+              <a:rPr lang="en-US" sz="1200" b="1" dirty="0">
                 <a:solidFill>
                   <a:schemeClr val="bg1"/>
                 </a:solidFill>
               </a:rPr>
               <a:t>H3</a:t>
             </a:r>
-            <a:endParaRPr lang="en-US" sz="1300" dirty="0"/>
+            <a:endParaRPr lang="en-US" sz="1200" dirty="0"/>
           </a:p>
         </p:txBody>
       </p:sp>
@@ -5312,8 +4798,8 @@
         </p:nvSpPr>
         <p:spPr>
           <a:xfrm>
-            <a:off x="6812280" y="4663440"/>
-            <a:ext cx="4846320" cy="502920"/>
+            <a:off x="6583680" y="4315968"/>
+            <a:ext cx="5074920" cy="457200"/>
           </a:xfrm>
           <a:prstGeom prst="rect">
             <a:avLst/>
@@ -5334,7 +4820,7 @@
                   <a:schemeClr val="tx1"/>
                 </a:solidFill>
               </a:rPr>
-              <a:t>Связь среды с намерением частично идёт через ментальное здоровье</a:t>
+              <a:t>Часть эффекта среды идёт через ментальное здоровье</a:t>
             </a:r>
             <a:endParaRPr lang="en-US" sz="1400" dirty="0"/>
           </a:p>
@@ -5348,8 +4834,8 @@
         </p:nvSpPr>
         <p:spPr>
           <a:xfrm>
-            <a:off x="6172200" y="5349240"/>
-            <a:ext cx="502920" cy="502920"/>
+            <a:off x="5989320" y="4919472"/>
+            <a:ext cx="457200" cy="457200"/>
           </a:xfrm>
           <a:prstGeom prst="ellipse">
             <a:avLst/>
@@ -5373,8 +4859,8 @@
         </p:nvSpPr>
         <p:spPr>
           <a:xfrm>
-            <a:off x="6172200" y="5349240"/>
-            <a:ext cx="502920" cy="502920"/>
+            <a:off x="5989320" y="4919472"/>
+            <a:ext cx="457200" cy="457200"/>
           </a:xfrm>
           <a:prstGeom prst="rect">
             <a:avLst/>
@@ -5390,14 +4876,14 @@
               <a:buNone/>
             </a:pPr>
             <a:r>
-              <a:rPr lang="en-US" sz="1300" b="1" dirty="0">
+              <a:rPr lang="en-US" sz="1200" b="1" dirty="0">
                 <a:solidFill>
                   <a:schemeClr val="bg1"/>
                 </a:solidFill>
               </a:rPr>
               <a:t>H4</a:t>
             </a:r>
-            <a:endParaRPr lang="en-US" sz="1300" dirty="0"/>
+            <a:endParaRPr lang="en-US" sz="1200" dirty="0"/>
           </a:p>
         </p:txBody>
       </p:sp>
@@ -5409,8 +4895,8 @@
         </p:nvSpPr>
         <p:spPr>
           <a:xfrm>
-            <a:off x="6812280" y="5349240"/>
-            <a:ext cx="4846320" cy="502920"/>
+            <a:off x="6583680" y="4919472"/>
+            <a:ext cx="5074920" cy="457200"/>
           </a:xfrm>
           <a:prstGeom prst="rect">
             <a:avLst/>
@@ -5431,7 +4917,104 @@
                   <a:schemeClr val="tx1"/>
                 </a:solidFill>
               </a:rPr>
-              <a:t>Принадлежность к кафедре особенно защищает работающих</a:t>
+              <a:t>Принадлежность к кафедре защищает работающих</a:t>
+            </a:r>
+            <a:endParaRPr lang="en-US" sz="1400" dirty="0"/>
+          </a:p>
+        </p:txBody>
+      </p:sp>
+      <p:sp>
+        <p:nvSpPr>
+          <p:cNvPr id="20" name="Shape 18"/>
+          <p:cNvSpPr/>
+          <p:nvPr/>
+        </p:nvSpPr>
+        <p:spPr>
+          <a:xfrm>
+            <a:off x="5989320" y="5522976"/>
+            <a:ext cx="457200" cy="457200"/>
+          </a:xfrm>
+          <a:prstGeom prst="ellipse">
+            <a:avLst/>
+          </a:prstGeom>
+          <a:solidFill>
+            <a:schemeClr val="accent1"/>
+          </a:solidFill>
+          <a:ln w="12700">
+            <a:solidFill>
+              <a:schemeClr val="accent1"/>
+            </a:solidFill>
+            <a:prstDash val="solid"/>
+          </a:ln>
+        </p:spPr>
+      </p:sp>
+      <p:sp>
+        <p:nvSpPr>
+          <p:cNvPr id="21" name="Text 19"/>
+          <p:cNvSpPr txBox="1"/>
+          <p:nvPr/>
+        </p:nvSpPr>
+        <p:spPr>
+          <a:xfrm>
+            <a:off x="5989320" y="5522976"/>
+            <a:ext cx="457200" cy="457200"/>
+          </a:xfrm>
+          <a:prstGeom prst="rect">
+            <a:avLst/>
+          </a:prstGeom>
+          <a:noFill/>
+          <a:ln/>
+        </p:spPr>
+        <p:txBody>
+          <a:bodyPr wrap="square" lIns="0" tIns="0" rIns="0" bIns="0" rtlCol="0" anchor="ctr"/>
+          <a:lstStyle/>
+          <a:p>
+            <a:pPr algn="ctr" indent="0" marL="0">
+              <a:buNone/>
+            </a:pPr>
+            <a:r>
+              <a:rPr lang="en-US" sz="1200" b="1" dirty="0">
+                <a:solidFill>
+                  <a:schemeClr val="bg1"/>
+                </a:solidFill>
+              </a:rPr>
+              <a:t>H5</a:t>
+            </a:r>
+            <a:endParaRPr lang="en-US" sz="1200" dirty="0"/>
+          </a:p>
+        </p:txBody>
+      </p:sp>
+      <p:sp>
+        <p:nvSpPr>
+          <p:cNvPr id="22" name="Text 20"/>
+          <p:cNvSpPr txBox="1"/>
+          <p:nvPr/>
+        </p:nvSpPr>
+        <p:spPr>
+          <a:xfrm>
+            <a:off x="6583680" y="5522976"/>
+            <a:ext cx="5074920" cy="457200"/>
+          </a:xfrm>
+          <a:prstGeom prst="rect">
+            <a:avLst/>
+          </a:prstGeom>
+          <a:noFill/>
+          <a:ln/>
+        </p:spPr>
+        <p:txBody>
+          <a:bodyPr wrap="square" lIns="0" tIns="0" rIns="0" bIns="0" rtlCol="0" anchor="ctr"/>
+          <a:lstStyle/>
+          <a:p>
+            <a:pPr indent="0" marL="0">
+              <a:buNone/>
+            </a:pPr>
+            <a:r>
+              <a:rPr lang="en-US" sz="1400" dirty="0">
+                <a:solidFill>
+                  <a:schemeClr val="tx1"/>
+                </a:solidFill>
+              </a:rPr>
+              <a:t>Характеристики вуза (МЭВ) меняют риск сверх индивидуальных</a:t>
             </a:r>
             <a:endParaRPr lang="en-US" sz="1400" dirty="0"/>
           </a:p>
@@ -5539,7 +5122,7 @@
                   <a:schemeClr val="tx2"/>
                 </a:solidFill>
               </a:rPr>
-              <a:t>Данные: 5 007 аспирантов из 249 вузов</a:t>
+              <a:t>Данные: два массива хакатона, связанные на уровне вуза</a:t>
             </a:r>
             <a:endParaRPr lang="en-US" sz="2600" dirty="0"/>
           </a:p>
@@ -5554,11 +5137,11 @@
         <p:spPr>
           <a:xfrm>
             <a:off x="548640" y="1371600"/>
-            <a:ext cx="2560320" cy="1965960"/>
+            <a:ext cx="3520440" cy="2514600"/>
           </a:xfrm>
           <a:prstGeom prst="roundRect">
             <a:avLst>
-              <a:gd name="adj" fmla="val 3721"/>
+              <a:gd name="adj" fmla="val 2909"/>
             </a:avLst>
           </a:prstGeom>
           <a:solidFill>
@@ -5574,14 +5157,39 @@
       </p:sp>
       <p:sp>
         <p:nvSpPr>
-          <p:cNvPr id="4" name="Text 2"/>
+          <p:cNvPr id="4" name="Shape 2"/>
+          <p:cNvSpPr/>
+          <p:nvPr/>
+        </p:nvSpPr>
+        <p:spPr>
+          <a:xfrm>
+            <a:off x="777240" y="1554480"/>
+            <a:ext cx="384048" cy="384048"/>
+          </a:xfrm>
+          <a:prstGeom prst="ellipse">
+            <a:avLst/>
+          </a:prstGeom>
+          <a:solidFill>
+            <a:schemeClr val="accent1"/>
+          </a:solidFill>
+          <a:ln w="12700">
+            <a:solidFill>
+              <a:schemeClr val="accent1"/>
+            </a:solidFill>
+            <a:prstDash val="solid"/>
+          </a:ln>
+        </p:spPr>
+      </p:sp>
+      <p:sp>
+        <p:nvSpPr>
+          <p:cNvPr id="5" name="Text 3"/>
           <p:cNvSpPr txBox="1"/>
           <p:nvPr/>
         </p:nvSpPr>
         <p:spPr>
           <a:xfrm>
-            <a:off x="777240" y="1463040"/>
-            <a:ext cx="2194560" cy="822960"/>
+            <a:off x="777240" y="1554480"/>
+            <a:ext cx="384048" cy="384048"/>
           </a:xfrm>
           <a:prstGeom prst="rect">
             <a:avLst/>
@@ -5590,34 +5198,70 @@
           <a:ln/>
         </p:spPr>
         <p:txBody>
-          <a:bodyPr wrap="square" lIns="0" tIns="0" rIns="0" bIns="0" rtlCol="0" anchor="b"/>
+          <a:bodyPr wrap="square" lIns="0" tIns="0" rIns="0" bIns="0" rtlCol="0" anchor="ctr"/>
+          <a:lstStyle/>
+          <a:p>
+            <a:pPr algn="ctr" indent="0" marL="0">
+              <a:buNone/>
+            </a:pPr>
+            <a:r>
+              <a:rPr lang="en-US" sz="1300" b="1" dirty="0">
+                <a:solidFill>
+                  <a:schemeClr val="bg1"/>
+                </a:solidFill>
+              </a:rPr>
+              <a:t>1</a:t>
+            </a:r>
+            <a:endParaRPr lang="en-US" sz="1300" dirty="0"/>
+          </a:p>
+        </p:txBody>
+      </p:sp>
+      <p:sp>
+        <p:nvSpPr>
+          <p:cNvPr id="6" name="Text 4"/>
+          <p:cNvSpPr txBox="1"/>
+          <p:nvPr/>
+        </p:nvSpPr>
+        <p:spPr>
+          <a:xfrm>
+            <a:off x="1280160" y="1554480"/>
+            <a:ext cx="2651760" cy="411480"/>
+          </a:xfrm>
+          <a:prstGeom prst="rect">
+            <a:avLst/>
+          </a:prstGeom>
+          <a:noFill/>
+          <a:ln/>
+        </p:spPr>
+        <p:txBody>
+          <a:bodyPr wrap="square" lIns="0" tIns="0" rIns="0" bIns="0" rtlCol="0" anchor="ctr"/>
           <a:lstStyle/>
           <a:p>
             <a:pPr indent="0" marL="0">
               <a:buNone/>
             </a:pPr>
             <a:r>
-              <a:rPr lang="en-US" sz="4400" b="1" dirty="0">
-                <a:solidFill>
-                  <a:schemeClr val="accent1"/>
-                </a:solidFill>
-              </a:rPr>
-              <a:t>5 007</a:t>
-            </a:r>
-            <a:endParaRPr lang="en-US" sz="4400" dirty="0"/>
-          </a:p>
-        </p:txBody>
-      </p:sp>
-      <p:sp>
-        <p:nvSpPr>
-          <p:cNvPr id="5" name="Text 3"/>
+              <a:rPr lang="en-US" sz="1500" b="1" dirty="0">
+                <a:solidFill>
+                  <a:schemeClr val="tx2"/>
+                </a:solidFill>
+              </a:rPr>
+              <a:t>Опрос аспирантов, 2021</a:t>
+            </a:r>
+            <a:endParaRPr lang="en-US" sz="1500" dirty="0"/>
+          </a:p>
+        </p:txBody>
+      </p:sp>
+      <p:sp>
+        <p:nvSpPr>
+          <p:cNvPr id="7" name="Text 5"/>
           <p:cNvSpPr txBox="1"/>
           <p:nvPr/>
         </p:nvSpPr>
         <p:spPr>
           <a:xfrm>
-            <a:off x="777240" y="2331720"/>
-            <a:ext cx="2194560" cy="640080"/>
+            <a:off x="777240" y="2148840"/>
+            <a:ext cx="3108960" cy="1645920"/>
           </a:xfrm>
           <a:prstGeom prst="rect">
             <a:avLst/>
@@ -5629,35 +5273,111 @@
           <a:bodyPr wrap="square" lIns="0" tIns="0" rIns="0" bIns="0" rtlCol="0" anchor="t"/>
           <a:lstStyle/>
           <a:p>
-            <a:pPr indent="0" marL="0">
+            <a:pPr marL="342900" indent="-342900">
+              <a:spcAft>
+                <a:spcPts val="800"/>
+              </a:spcAft>
+              <a:buSzPct val="100000"/>
+              <a:buChar char="•"/>
+            </a:pPr>
+            <a:r>
+              <a:rPr lang="en-US" sz="1300" dirty="0">
+                <a:solidFill>
+                  <a:schemeClr val="tx1"/>
+                </a:solidFill>
+              </a:rPr>
+              <a:t>5 007 респондентов</a:t>
+            </a:r>
+            <a:endParaRPr lang="en-US" sz="1300" dirty="0"/>
+          </a:p>
+          <a:p>
+            <a:pPr marL="342900" indent="-342900">
+              <a:spcAft>
+                <a:spcPts val="800"/>
+              </a:spcAft>
+              <a:buSzPct val="100000"/>
+              <a:buChar char="•"/>
+            </a:pPr>
+            <a:r>
+              <a:rPr lang="en-US" sz="1300" dirty="0">
+                <a:solidFill>
+                  <a:schemeClr val="tx1"/>
+                </a:solidFill>
+              </a:rPr>
+              <a:t>249 вузов</a:t>
+            </a:r>
+            <a:endParaRPr lang="en-US" sz="1300" dirty="0"/>
+          </a:p>
+          <a:p>
+            <a:pPr marL="342900" indent="-342900">
+              <a:spcAft>
+                <a:spcPts val="800"/>
+              </a:spcAft>
+              <a:buSzPct val="100000"/>
+              <a:buChar char="•"/>
+            </a:pPr>
+            <a:r>
+              <a:rPr lang="en-US" sz="1300" dirty="0">
+                <a:solidFill>
+                  <a:schemeClr val="tx1"/>
+                </a:solidFill>
+              </a:rPr>
+              <a:t>намерение уйти, руководитель, среда, PHQ-8, работа</a:t>
+            </a:r>
+            <a:endParaRPr lang="en-US" sz="1300" dirty="0"/>
+          </a:p>
+        </p:txBody>
+      </p:sp>
+      <p:sp>
+        <p:nvSpPr>
+          <p:cNvPr id="8" name="Text 6"/>
+          <p:cNvSpPr txBox="1"/>
+          <p:nvPr/>
+        </p:nvSpPr>
+        <p:spPr>
+          <a:xfrm>
+            <a:off x="4069080" y="2331720"/>
+            <a:ext cx="274320" cy="457200"/>
+          </a:xfrm>
+          <a:prstGeom prst="rect">
+            <a:avLst/>
+          </a:prstGeom>
+          <a:noFill/>
+          <a:ln/>
+        </p:spPr>
+        <p:txBody>
+          <a:bodyPr wrap="square" lIns="0" tIns="0" rIns="0" bIns="0" rtlCol="0" anchor="ctr"/>
+          <a:lstStyle/>
+          <a:p>
+            <a:pPr algn="ctr" indent="0" marL="0">
               <a:buNone/>
             </a:pPr>
             <a:r>
-              <a:rPr lang="en-US" sz="1400" dirty="0">
-                <a:solidFill>
-                  <a:schemeClr val="tx1"/>
-                </a:solidFill>
-              </a:rPr>
-              <a:t>респондентов, онлайн-опрос, май–июль 2021</a:t>
-            </a:r>
-            <a:endParaRPr lang="en-US" sz="1400" dirty="0"/>
-          </a:p>
-        </p:txBody>
-      </p:sp>
-      <p:sp>
-        <p:nvSpPr>
-          <p:cNvPr id="6" name="card"/>
+              <a:rPr lang="en-US" sz="2600" b="1" dirty="0">
+                <a:solidFill>
+                  <a:schemeClr val="tx2"/>
+                </a:solidFill>
+              </a:rPr>
+              <a:t>+</a:t>
+            </a:r>
+            <a:endParaRPr lang="en-US" sz="2600" dirty="0"/>
+          </a:p>
+        </p:txBody>
+      </p:sp>
+      <p:sp>
+        <p:nvSpPr>
+          <p:cNvPr id="9" name="card"/>
           <p:cNvSpPr/>
           <p:nvPr/>
         </p:nvSpPr>
         <p:spPr>
           <a:xfrm>
-            <a:off x="3337560" y="1371600"/>
-            <a:ext cx="2560320" cy="1965960"/>
+            <a:off x="4343400" y="1371600"/>
+            <a:ext cx="3520440" cy="2514600"/>
           </a:xfrm>
           <a:prstGeom prst="roundRect">
             <a:avLst>
-              <a:gd name="adj" fmla="val 3721"/>
+              <a:gd name="adj" fmla="val 2909"/>
             </a:avLst>
           </a:prstGeom>
           <a:solidFill>
@@ -5673,14 +5393,39 @@
       </p:sp>
       <p:sp>
         <p:nvSpPr>
-          <p:cNvPr id="7" name="Text 5"/>
+          <p:cNvPr id="10" name="Shape 8"/>
+          <p:cNvSpPr/>
+          <p:nvPr/>
+        </p:nvSpPr>
+        <p:spPr>
+          <a:xfrm>
+            <a:off x="4572000" y="1554480"/>
+            <a:ext cx="384048" cy="384048"/>
+          </a:xfrm>
+          <a:prstGeom prst="ellipse">
+            <a:avLst/>
+          </a:prstGeom>
+          <a:solidFill>
+            <a:schemeClr val="accent5"/>
+          </a:solidFill>
+          <a:ln w="12700">
+            <a:solidFill>
+              <a:schemeClr val="accent5"/>
+            </a:solidFill>
+            <a:prstDash val="solid"/>
+          </a:ln>
+        </p:spPr>
+      </p:sp>
+      <p:sp>
+        <p:nvSpPr>
+          <p:cNvPr id="11" name="Text 9"/>
           <p:cNvSpPr txBox="1"/>
           <p:nvPr/>
         </p:nvSpPr>
         <p:spPr>
           <a:xfrm>
-            <a:off x="3566160" y="1463040"/>
-            <a:ext cx="2194560" cy="822960"/>
+            <a:off x="4572000" y="1554480"/>
+            <a:ext cx="384048" cy="384048"/>
           </a:xfrm>
           <a:prstGeom prst="rect">
             <a:avLst/>
@@ -5689,34 +5434,70 @@
           <a:ln/>
         </p:spPr>
         <p:txBody>
-          <a:bodyPr wrap="square" lIns="0" tIns="0" rIns="0" bIns="0" rtlCol="0" anchor="b"/>
+          <a:bodyPr wrap="square" lIns="0" tIns="0" rIns="0" bIns="0" rtlCol="0" anchor="ctr"/>
+          <a:lstStyle/>
+          <a:p>
+            <a:pPr algn="ctr" indent="0" marL="0">
+              <a:buNone/>
+            </a:pPr>
+            <a:r>
+              <a:rPr lang="en-US" sz="1300" b="1" dirty="0">
+                <a:solidFill>
+                  <a:schemeClr val="bg1"/>
+                </a:solidFill>
+              </a:rPr>
+              <a:t>2</a:t>
+            </a:r>
+            <a:endParaRPr lang="en-US" sz="1300" dirty="0"/>
+          </a:p>
+        </p:txBody>
+      </p:sp>
+      <p:sp>
+        <p:nvSpPr>
+          <p:cNvPr id="12" name="Text 10"/>
+          <p:cNvSpPr txBox="1"/>
+          <p:nvPr/>
+        </p:nvSpPr>
+        <p:spPr>
+          <a:xfrm>
+            <a:off x="5074920" y="1554480"/>
+            <a:ext cx="2651760" cy="411480"/>
+          </a:xfrm>
+          <a:prstGeom prst="rect">
+            <a:avLst/>
+          </a:prstGeom>
+          <a:noFill/>
+          <a:ln/>
+        </p:spPr>
+        <p:txBody>
+          <a:bodyPr wrap="square" lIns="0" tIns="0" rIns="0" bIns="0" rtlCol="0" anchor="ctr"/>
           <a:lstStyle/>
           <a:p>
             <a:pPr indent="0" marL="0">
               <a:buNone/>
             </a:pPr>
             <a:r>
-              <a:rPr lang="en-US" sz="4400" b="1" dirty="0">
-                <a:solidFill>
-                  <a:schemeClr val="accent1"/>
-                </a:solidFill>
-              </a:rPr>
-              <a:t>249</a:t>
-            </a:r>
-            <a:endParaRPr lang="en-US" sz="4400" dirty="0"/>
-          </a:p>
-        </p:txBody>
-      </p:sp>
-      <p:sp>
-        <p:nvSpPr>
-          <p:cNvPr id="8" name="Text 6"/>
+              <a:rPr lang="en-US" sz="1500" b="1" dirty="0">
+                <a:solidFill>
+                  <a:schemeClr val="tx2"/>
+                </a:solidFill>
+              </a:rPr>
+              <a:t>Мониторинг эффективности вузов</a:t>
+            </a:r>
+            <a:endParaRPr lang="en-US" sz="1500" dirty="0"/>
+          </a:p>
+        </p:txBody>
+      </p:sp>
+      <p:sp>
+        <p:nvSpPr>
+          <p:cNvPr id="13" name="Text 11"/>
           <p:cNvSpPr txBox="1"/>
           <p:nvPr/>
         </p:nvSpPr>
         <p:spPr>
           <a:xfrm>
-            <a:off x="3566160" y="2331720"/>
-            <a:ext cx="2194560" cy="640080"/>
+            <a:off x="4572000" y="2148840"/>
+            <a:ext cx="3108960" cy="1645920"/>
           </a:xfrm>
           <a:prstGeom prst="rect">
             <a:avLst/>
@@ -5728,35 +5509,111 @@
           <a:bodyPr wrap="square" lIns="0" tIns="0" rIns="0" bIns="0" rtlCol="0" anchor="t"/>
           <a:lstStyle/>
           <a:p>
-            <a:pPr indent="0" marL="0">
+            <a:pPr marL="342900" indent="-342900">
+              <a:spcAft>
+                <a:spcPts val="800"/>
+              </a:spcAft>
+              <a:buSzPct val="100000"/>
+              <a:buChar char="•"/>
+            </a:pPr>
+            <a:r>
+              <a:rPr lang="en-US" sz="1300" dirty="0">
+                <a:solidFill>
+                  <a:schemeClr val="tx1"/>
+                </a:solidFill>
+              </a:rPr>
+              <a:t>МЭВ-2022 (данные за 2021 год)</a:t>
+            </a:r>
+            <a:endParaRPr lang="en-US" sz="1300" dirty="0"/>
+          </a:p>
+          <a:p>
+            <a:pPr marL="342900" indent="-342900">
+              <a:spcAft>
+                <a:spcPts val="800"/>
+              </a:spcAft>
+              <a:buSzPct val="100000"/>
+              <a:buChar char="•"/>
+            </a:pPr>
+            <a:r>
+              <a:rPr lang="en-US" sz="1300" dirty="0">
+                <a:solidFill>
+                  <a:schemeClr val="tx1"/>
+                </a:solidFill>
+              </a:rPr>
+              <a:t>698 головных вузов, 400+ показателей</a:t>
+            </a:r>
+            <a:endParaRPr lang="en-US" sz="1300" dirty="0"/>
+          </a:p>
+          <a:p>
+            <a:pPr marL="342900" indent="-342900">
+              <a:spcAft>
+                <a:spcPts val="800"/>
+              </a:spcAft>
+              <a:buSzPct val="100000"/>
+              <a:buChar char="•"/>
+            </a:pPr>
+            <a:r>
+              <a:rPr lang="en-US" sz="1300" dirty="0">
+                <a:solidFill>
+                  <a:schemeClr val="tx1"/>
+                </a:solidFill>
+              </a:rPr>
+              <a:t>защиты НПР, аспиранты на 100 студентов, НИОКР, ЕГЭ</a:t>
+            </a:r>
+            <a:endParaRPr lang="en-US" sz="1300" dirty="0"/>
+          </a:p>
+        </p:txBody>
+      </p:sp>
+      <p:sp>
+        <p:nvSpPr>
+          <p:cNvPr id="14" name="Text 12"/>
+          <p:cNvSpPr txBox="1"/>
+          <p:nvPr/>
+        </p:nvSpPr>
+        <p:spPr>
+          <a:xfrm>
+            <a:off x="7863840" y="2331720"/>
+            <a:ext cx="274320" cy="457200"/>
+          </a:xfrm>
+          <a:prstGeom prst="rect">
+            <a:avLst/>
+          </a:prstGeom>
+          <a:noFill/>
+          <a:ln/>
+        </p:spPr>
+        <p:txBody>
+          <a:bodyPr wrap="square" lIns="0" tIns="0" rIns="0" bIns="0" rtlCol="0" anchor="ctr"/>
+          <a:lstStyle/>
+          <a:p>
+            <a:pPr algn="ctr" indent="0" marL="0">
               <a:buNone/>
             </a:pPr>
             <a:r>
-              <a:rPr lang="en-US" sz="1400" dirty="0">
-                <a:solidFill>
-                  <a:schemeClr val="tx1"/>
-                </a:solidFill>
-              </a:rPr>
-              <a:t>вузов (используем для кластерных ошибок)</a:t>
-            </a:r>
-            <a:endParaRPr lang="en-US" sz="1400" dirty="0"/>
-          </a:p>
-        </p:txBody>
-      </p:sp>
-      <p:sp>
-        <p:nvSpPr>
-          <p:cNvPr id="9" name="card"/>
+              <a:rPr lang="en-US" sz="2600" b="1" dirty="0">
+                <a:solidFill>
+                  <a:schemeClr val="tx2"/>
+                </a:solidFill>
+              </a:rPr>
+              <a:t>=</a:t>
+            </a:r>
+            <a:endParaRPr lang="en-US" sz="2600" dirty="0"/>
+          </a:p>
+        </p:txBody>
+      </p:sp>
+      <p:sp>
+        <p:nvSpPr>
+          <p:cNvPr id="15" name="card"/>
           <p:cNvSpPr/>
           <p:nvPr/>
         </p:nvSpPr>
         <p:spPr>
           <a:xfrm>
-            <a:off x="6126480" y="1371600"/>
-            <a:ext cx="2560320" cy="1965960"/>
+            <a:off x="8138160" y="1371600"/>
+            <a:ext cx="3520440" cy="2514600"/>
           </a:xfrm>
           <a:prstGeom prst="roundRect">
             <a:avLst>
-              <a:gd name="adj" fmla="val 3721"/>
+              <a:gd name="adj" fmla="val 2909"/>
             </a:avLst>
           </a:prstGeom>
           <a:solidFill>
@@ -5772,98 +5629,24 @@
       </p:sp>
       <p:sp>
         <p:nvSpPr>
-          <p:cNvPr id="10" name="Text 8"/>
-          <p:cNvSpPr txBox="1"/>
-          <p:nvPr/>
-        </p:nvSpPr>
-        <p:spPr>
-          <a:xfrm>
-            <a:off x="6355080" y="1463040"/>
-            <a:ext cx="2194560" cy="822960"/>
-          </a:xfrm>
-          <a:prstGeom prst="rect">
-            <a:avLst/>
-          </a:prstGeom>
-          <a:noFill/>
-          <a:ln/>
-        </p:spPr>
-        <p:txBody>
-          <a:bodyPr wrap="square" lIns="0" tIns="0" rIns="0" bIns="0" rtlCol="0" anchor="b"/>
-          <a:lstStyle/>
-          <a:p>
-            <a:pPr indent="0" marL="0">
-              <a:buNone/>
-            </a:pPr>
-            <a:r>
-              <a:rPr lang="en-US" sz="4400" b="1" dirty="0">
-                <a:solidFill>
-                  <a:schemeClr val="accent2"/>
-                </a:solidFill>
-              </a:rPr>
-              <a:t>22%</a:t>
-            </a:r>
-            <a:endParaRPr lang="en-US" sz="4400" dirty="0"/>
-          </a:p>
-        </p:txBody>
-      </p:sp>
-      <p:sp>
-        <p:nvSpPr>
-          <p:cNvPr id="11" name="Text 9"/>
-          <p:cNvSpPr txBox="1"/>
-          <p:nvPr/>
-        </p:nvSpPr>
-        <p:spPr>
-          <a:xfrm>
-            <a:off x="6355080" y="2331720"/>
-            <a:ext cx="2194560" cy="640080"/>
-          </a:xfrm>
-          <a:prstGeom prst="rect">
-            <a:avLst/>
-          </a:prstGeom>
-          <a:noFill/>
-          <a:ln/>
-        </p:spPr>
-        <p:txBody>
-          <a:bodyPr wrap="square" lIns="0" tIns="0" rIns="0" bIns="0" rtlCol="0" anchor="t"/>
-          <a:lstStyle/>
-          <a:p>
-            <a:pPr indent="0" marL="0">
-              <a:buNone/>
-            </a:pPr>
-            <a:r>
-              <a:rPr lang="en-US" sz="1400" dirty="0">
-                <a:solidFill>
-                  <a:schemeClr val="tx1"/>
-                </a:solidFill>
-              </a:rPr>
-              <a:t>согласны: «Я часто хочу бросить аспирантуру»</a:t>
-            </a:r>
-            <a:endParaRPr lang="en-US" sz="1400" dirty="0"/>
-          </a:p>
-        </p:txBody>
-      </p:sp>
-      <p:sp>
-        <p:nvSpPr>
-          <p:cNvPr id="12" name="card"/>
+          <p:cNvPr id="16" name="Shape 14"/>
           <p:cNvSpPr/>
           <p:nvPr/>
         </p:nvSpPr>
         <p:spPr>
           <a:xfrm>
-            <a:off x="8915400" y="1371600"/>
-            <a:ext cx="2560320" cy="1965960"/>
-          </a:xfrm>
-          <a:prstGeom prst="roundRect">
-            <a:avLst>
-              <a:gd name="adj" fmla="val 3721"/>
-            </a:avLst>
+            <a:off x="8366760" y="1554480"/>
+            <a:ext cx="384048" cy="384048"/>
+          </a:xfrm>
+          <a:prstGeom prst="ellipse">
+            <a:avLst/>
           </a:prstGeom>
           <a:solidFill>
-            <a:schemeClr val="bg2"/>
+            <a:schemeClr val="accent2"/>
           </a:solidFill>
           <a:ln w="12700">
             <a:solidFill>
-              <a:schemeClr val="bg2"/>
+              <a:schemeClr val="accent2"/>
             </a:solidFill>
             <a:prstDash val="solid"/>
           </a:ln>
@@ -5871,14 +5654,14 @@
       </p:sp>
       <p:sp>
         <p:nvSpPr>
-          <p:cNvPr id="13" name="Text 11"/>
+          <p:cNvPr id="17" name="Text 15"/>
           <p:cNvSpPr txBox="1"/>
           <p:nvPr/>
         </p:nvSpPr>
         <p:spPr>
           <a:xfrm>
-            <a:off x="9144000" y="1463040"/>
-            <a:ext cx="2194560" cy="822960"/>
+            <a:off x="8366760" y="1554480"/>
+            <a:ext cx="384048" cy="384048"/>
           </a:xfrm>
           <a:prstGeom prst="rect">
             <a:avLst/>
@@ -5887,34 +5670,70 @@
           <a:ln/>
         </p:spPr>
         <p:txBody>
-          <a:bodyPr wrap="square" lIns="0" tIns="0" rIns="0" bIns="0" rtlCol="0" anchor="b"/>
+          <a:bodyPr wrap="square" lIns="0" tIns="0" rIns="0" bIns="0" rtlCol="0" anchor="ctr"/>
+          <a:lstStyle/>
+          <a:p>
+            <a:pPr algn="ctr" indent="0" marL="0">
+              <a:buNone/>
+            </a:pPr>
+            <a:r>
+              <a:rPr lang="en-US" sz="1300" b="1" dirty="0">
+                <a:solidFill>
+                  <a:schemeClr val="bg1"/>
+                </a:solidFill>
+              </a:rPr>
+              <a:t>3</a:t>
+            </a:r>
+            <a:endParaRPr lang="en-US" sz="1300" dirty="0"/>
+          </a:p>
+        </p:txBody>
+      </p:sp>
+      <p:sp>
+        <p:nvSpPr>
+          <p:cNvPr id="18" name="Text 16"/>
+          <p:cNvSpPr txBox="1"/>
+          <p:nvPr/>
+        </p:nvSpPr>
+        <p:spPr>
+          <a:xfrm>
+            <a:off x="8869680" y="1554480"/>
+            <a:ext cx="2651760" cy="411480"/>
+          </a:xfrm>
+          <a:prstGeom prst="rect">
+            <a:avLst/>
+          </a:prstGeom>
+          <a:noFill/>
+          <a:ln/>
+        </p:spPr>
+        <p:txBody>
+          <a:bodyPr wrap="square" lIns="0" tIns="0" rIns="0" bIns="0" rtlCol="0" anchor="ctr"/>
           <a:lstStyle/>
           <a:p>
             <a:pPr indent="0" marL="0">
               <a:buNone/>
             </a:pPr>
             <a:r>
-              <a:rPr lang="en-US" sz="4400" b="1" dirty="0">
-                <a:solidFill>
-                  <a:schemeClr val="accent2"/>
-                </a:solidFill>
-              </a:rPr>
-              <a:t>26%</a:t>
-            </a:r>
-            <a:endParaRPr lang="en-US" sz="4400" dirty="0"/>
-          </a:p>
-        </p:txBody>
-      </p:sp>
-      <p:sp>
-        <p:nvSpPr>
-          <p:cNvPr id="14" name="Text 12"/>
+              <a:rPr lang="en-US" sz="1500" b="1" dirty="0">
+                <a:solidFill>
+                  <a:schemeClr val="tx2"/>
+                </a:solidFill>
+              </a:rPr>
+              <a:t>Связанный массив</a:t>
+            </a:r>
+            <a:endParaRPr lang="en-US" sz="1500" dirty="0"/>
+          </a:p>
+        </p:txBody>
+      </p:sp>
+      <p:sp>
+        <p:nvSpPr>
+          <p:cNvPr id="19" name="Text 17"/>
           <p:cNvSpPr txBox="1"/>
           <p:nvPr/>
         </p:nvSpPr>
         <p:spPr>
           <a:xfrm>
-            <a:off x="9144000" y="2331720"/>
-            <a:ext cx="2194560" cy="640080"/>
+            <a:off x="8366760" y="2148840"/>
+            <a:ext cx="3108960" cy="1645920"/>
           </a:xfrm>
           <a:prstGeom prst="rect">
             <a:avLst/>
@@ -5926,31 +5745,107 @@
           <a:bodyPr wrap="square" lIns="0" tIns="0" rIns="0" bIns="0" rtlCol="0" anchor="t"/>
           <a:lstStyle/>
           <a:p>
+            <a:pPr marL="342900" indent="-342900">
+              <a:spcAft>
+                <a:spcPts val="800"/>
+              </a:spcAft>
+              <a:buSzPct val="100000"/>
+              <a:buChar char="•"/>
+            </a:pPr>
+            <a:r>
+              <a:rPr lang="en-US" sz="1300" dirty="0">
+                <a:solidFill>
+                  <a:schemeClr val="tx1"/>
+                </a:solidFill>
+              </a:rPr>
+              <a:t>3 570 аспирантов</a:t>
+            </a:r>
+            <a:endParaRPr lang="en-US" sz="1300" dirty="0"/>
+          </a:p>
+          <a:p>
+            <a:pPr marL="342900" indent="-342900">
+              <a:spcAft>
+                <a:spcPts val="800"/>
+              </a:spcAft>
+              <a:buSzPct val="100000"/>
+              <a:buChar char="•"/>
+            </a:pPr>
+            <a:r>
+              <a:rPr lang="en-US" sz="1300" dirty="0">
+                <a:solidFill>
+                  <a:schemeClr val="tx1"/>
+                </a:solidFill>
+              </a:rPr>
+              <a:t>85 вузов с показателями МЭВ</a:t>
+            </a:r>
+            <a:endParaRPr lang="en-US" sz="1300" dirty="0"/>
+          </a:p>
+          <a:p>
+            <a:pPr marL="342900" indent="-342900">
+              <a:spcAft>
+                <a:spcPts val="800"/>
+              </a:spcAft>
+              <a:buSzPct val="100000"/>
+              <a:buChar char="•"/>
+            </a:pPr>
+            <a:r>
+              <a:rPr lang="en-US" sz="1300" dirty="0">
+                <a:solidFill>
+                  <a:schemeClr val="tx1"/>
+                </a:solidFill>
+              </a:rPr>
+              <a:t>нечёткое сопоставление названий + ручная проверка</a:t>
+            </a:r>
+            <a:endParaRPr lang="en-US" sz="1300" dirty="0"/>
+          </a:p>
+        </p:txBody>
+      </p:sp>
+      <p:sp>
+        <p:nvSpPr>
+          <p:cNvPr id="20" name="Text 18"/>
+          <p:cNvSpPr txBox="1"/>
+          <p:nvPr/>
+        </p:nvSpPr>
+        <p:spPr>
+          <a:xfrm>
+            <a:off x="548640" y="4160520"/>
+            <a:ext cx="2560320" cy="822960"/>
+          </a:xfrm>
+          <a:prstGeom prst="rect">
+            <a:avLst/>
+          </a:prstGeom>
+          <a:noFill/>
+          <a:ln/>
+        </p:spPr>
+        <p:txBody>
+          <a:bodyPr wrap="square" lIns="0" tIns="0" rIns="0" bIns="0" rtlCol="0" anchor="b"/>
+          <a:lstStyle/>
+          <a:p>
             <a:pPr indent="0" marL="0">
               <a:buNone/>
             </a:pPr>
             <a:r>
-              <a:rPr lang="en-US" sz="1400" dirty="0">
-                <a:solidFill>
-                  <a:schemeClr val="tx1"/>
-                </a:solidFill>
-              </a:rPr>
-              <a:t>с умеренными и выше депрессивными симптомами (PHQ-8 ≥ 10)</a:t>
-            </a:r>
-            <a:endParaRPr lang="en-US" sz="1400" dirty="0"/>
-          </a:p>
-        </p:txBody>
-      </p:sp>
-      <p:sp>
-        <p:nvSpPr>
-          <p:cNvPr id="15" name="Text 13"/>
+              <a:rPr lang="en-US" sz="4400" b="1" dirty="0">
+                <a:solidFill>
+                  <a:schemeClr val="accent2"/>
+                </a:solidFill>
+              </a:rPr>
+              <a:t>22%</a:t>
+            </a:r>
+            <a:endParaRPr lang="en-US" sz="4400" dirty="0"/>
+          </a:p>
+        </p:txBody>
+      </p:sp>
+      <p:sp>
+        <p:nvSpPr>
+          <p:cNvPr id="21" name="Text 19"/>
           <p:cNvSpPr txBox="1"/>
           <p:nvPr/>
         </p:nvSpPr>
         <p:spPr>
           <a:xfrm>
-            <a:off x="548640" y="3657600"/>
-            <a:ext cx="5486400" cy="365760"/>
+            <a:off x="548640" y="5029200"/>
+            <a:ext cx="2560320" cy="640080"/>
           </a:xfrm>
           <a:prstGeom prst="rect">
             <a:avLst/>
@@ -5959,762 +5854,240 @@
           <a:ln/>
         </p:spPr>
         <p:txBody>
-          <a:bodyPr wrap="square" lIns="0" tIns="0" rIns="0" bIns="0" rtlCol="0" anchor="ctr"/>
+          <a:bodyPr wrap="square" lIns="0" tIns="0" rIns="0" bIns="0" rtlCol="0" anchor="t"/>
           <a:lstStyle/>
           <a:p>
             <a:pPr indent="0" marL="0">
               <a:buNone/>
             </a:pPr>
             <a:r>
-              <a:rPr lang="en-US" sz="1800" b="1" dirty="0">
-                <a:solidFill>
-                  <a:schemeClr val="tx2"/>
-                </a:solidFill>
-              </a:rPr>
-              <a:t>Ключевые переменные</a:t>
-            </a:r>
-            <a:endParaRPr lang="en-US" sz="1800" dirty="0"/>
-          </a:p>
-        </p:txBody>
-      </p:sp>
-      <p:graphicFrame>
-        <p:nvGraphicFramePr>
-          <p:cNvPr id="4" name="Table 0"/>
-          <p:cNvGraphicFramePr>
-            <a:graphicFrameLocks noGrp="1"/>
-          </p:cNvGraphicFramePr>
-          <p:nvPr>
-            <p:extLst>
-              <p:ext uri="{D42A27DB-BD31-4B8C-83A1-F6EECF244321}">
-                <p14:modId xmlns:p14="http://schemas.microsoft.com/office/powerpoint/2010/main" val="1579011935"/>
-              </p:ext>
-            </p:extLst>
-          </p:nvPr>
-        </p:nvGraphicFramePr>
-        <p:xfrm>
-          <a:off x="548640" y="4069080"/>
-          <a:ext cx="11094415" cy="914400"/>
-        </p:xfrm>
-        <a:graphic>
-          <a:graphicData uri="http://schemas.openxmlformats.org/drawingml/2006/table">
-            <a:tbl>
-              <a:tblPr/>
-              <a:tblGrid>
-                <a:gridCol w="2377440"/>
-                <a:gridCol w="8716975"/>
-              </a:tblGrid>
-              <a:tr h="329184">
-                <a:tc>
-                  <a:txBody>
-                    <a:bodyPr/>
-                    <a:lstStyle/>
-                    <a:p>
-                      <a:pPr indent="0" marL="0">
-                        <a:buNone/>
-                      </a:pPr>
-                      <a:r>
-                        <a:rPr lang="en-US" sz="1300" b="1" dirty="0">
-                          <a:solidFill>
-                            <a:schemeClr val="tx2"/>
-                          </a:solidFill>
-                        </a:rPr>
-                        <a:t>Зависимая</a:t>
-                      </a:r>
-                      <a:endParaRPr lang="en-US" sz="1300" dirty="0"/>
-                    </a:p>
-                  </a:txBody>
-                  <a:tcPr marL="76200" marR="76200" marT="25400" marB="25400">
-                    <a:lnL w="9525" cap="flat" cmpd="sng" algn="ctr">
-                      <a:solidFill>
-                        <a:srgbClr val="E6E5E0"/>
-                      </a:solidFill>
-                      <a:prstDash val="solid"/>
-                      <a:round/>
-                      <a:headEnd type="none" w="med" len="med"/>
-                      <a:tailEnd type="none" w="med" len="med"/>
-                    </a:lnL>
-                    <a:lnR w="9525" cap="flat" cmpd="sng" algn="ctr">
-                      <a:solidFill>
-                        <a:srgbClr val="E6E5E0"/>
-                      </a:solidFill>
-                      <a:prstDash val="solid"/>
-                      <a:round/>
-                      <a:headEnd type="none" w="med" len="med"/>
-                      <a:tailEnd type="none" w="med" len="med"/>
-                    </a:lnR>
-                    <a:lnT w="9525" cap="flat" cmpd="sng" algn="ctr">
-                      <a:solidFill>
-                        <a:srgbClr val="E6E5E0"/>
-                      </a:solidFill>
-                      <a:prstDash val="solid"/>
-                      <a:round/>
-                      <a:headEnd type="none" w="med" len="med"/>
-                      <a:tailEnd type="none" w="med" len="med"/>
-                    </a:lnT>
-                    <a:lnB w="9525" cap="flat" cmpd="sng" algn="ctr">
-                      <a:solidFill>
-                        <a:srgbClr val="E6E5E0"/>
-                      </a:solidFill>
-                      <a:prstDash val="solid"/>
-                      <a:round/>
-                      <a:headEnd type="none" w="med" len="med"/>
-                      <a:tailEnd type="none" w="med" len="med"/>
-                    </a:lnB>
-                  </a:tcPr>
-                </a:tc>
-                <a:tc>
-                  <a:txBody>
-                    <a:bodyPr/>
-                    <a:lstStyle/>
-                    <a:p>
-                      <a:pPr indent="0" marL="0">
-                        <a:buNone/>
-                      </a:pPr>
-                      <a:r>
-                        <a:rPr lang="en-US" sz="1300" dirty="0">
-                          <a:solidFill>
-                            <a:schemeClr val="tx1"/>
-                          </a:solidFill>
-                        </a:rPr>
-                        <a:t>Q13_r3, шкала 1–4; бинарно «скорее/полностью согласен» (основная), порядковая (проверка)</a:t>
-                      </a:r>
-                      <a:endParaRPr lang="en-US" sz="1300" dirty="0"/>
-                    </a:p>
-                  </a:txBody>
-                  <a:tcPr marL="76200" marR="76200" marT="25400" marB="25400">
-                    <a:lnL w="9525" cap="flat" cmpd="sng" algn="ctr">
-                      <a:solidFill>
-                        <a:srgbClr val="E6E5E0"/>
-                      </a:solidFill>
-                      <a:prstDash val="solid"/>
-                      <a:round/>
-                      <a:headEnd type="none" w="med" len="med"/>
-                      <a:tailEnd type="none" w="med" len="med"/>
-                    </a:lnL>
-                    <a:lnR w="9525" cap="flat" cmpd="sng" algn="ctr">
-                      <a:solidFill>
-                        <a:srgbClr val="E6E5E0"/>
-                      </a:solidFill>
-                      <a:prstDash val="solid"/>
-                      <a:round/>
-                      <a:headEnd type="none" w="med" len="med"/>
-                      <a:tailEnd type="none" w="med" len="med"/>
-                    </a:lnR>
-                    <a:lnT w="9525" cap="flat" cmpd="sng" algn="ctr">
-                      <a:solidFill>
-                        <a:srgbClr val="E6E5E0"/>
-                      </a:solidFill>
-                      <a:prstDash val="solid"/>
-                      <a:round/>
-                      <a:headEnd type="none" w="med" len="med"/>
-                      <a:tailEnd type="none" w="med" len="med"/>
-                    </a:lnT>
-                    <a:lnB w="9525" cap="flat" cmpd="sng" algn="ctr">
-                      <a:solidFill>
-                        <a:srgbClr val="E6E5E0"/>
-                      </a:solidFill>
-                      <a:prstDash val="solid"/>
-                      <a:round/>
-                      <a:headEnd type="none" w="med" len="med"/>
-                      <a:tailEnd type="none" w="med" len="med"/>
-                    </a:lnB>
-                  </a:tcPr>
-                </a:tc>
-              </a:tr>
-              <a:tr h="329184">
-                <a:tc>
-                  <a:txBody>
-                    <a:bodyPr/>
-                    <a:lstStyle/>
-                    <a:p>
-                      <a:pPr indent="0" marL="0">
-                        <a:buNone/>
-                      </a:pPr>
-                      <a:r>
-                        <a:rPr lang="en-US" sz="1300" b="1" dirty="0">
-                          <a:solidFill>
-                            <a:schemeClr val="tx2"/>
-                          </a:solidFill>
-                        </a:rPr>
-                        <a:t>Руководитель</a:t>
-                      </a:r>
-                      <a:endParaRPr lang="en-US" sz="1300" dirty="0"/>
-                    </a:p>
-                  </a:txBody>
-                  <a:tcPr marL="76200" marR="76200" marT="25400" marB="25400">
-                    <a:lnL w="9525" cap="flat" cmpd="sng" algn="ctr">
-                      <a:solidFill>
-                        <a:srgbClr val="E6E5E0"/>
-                      </a:solidFill>
-                      <a:prstDash val="solid"/>
-                      <a:round/>
-                      <a:headEnd type="none" w="med" len="med"/>
-                      <a:tailEnd type="none" w="med" len="med"/>
-                    </a:lnL>
-                    <a:lnR w="9525" cap="flat" cmpd="sng" algn="ctr">
-                      <a:solidFill>
-                        <a:srgbClr val="E6E5E0"/>
-                      </a:solidFill>
-                      <a:prstDash val="solid"/>
-                      <a:round/>
-                      <a:headEnd type="none" w="med" len="med"/>
-                      <a:tailEnd type="none" w="med" len="med"/>
-                    </a:lnR>
-                    <a:lnT w="9525" cap="flat" cmpd="sng" algn="ctr">
-                      <a:solidFill>
-                        <a:srgbClr val="E6E5E0"/>
-                      </a:solidFill>
-                      <a:prstDash val="solid"/>
-                      <a:round/>
-                      <a:headEnd type="none" w="med" len="med"/>
-                      <a:tailEnd type="none" w="med" len="med"/>
-                    </a:lnT>
-                    <a:lnB w="9525" cap="flat" cmpd="sng" algn="ctr">
-                      <a:solidFill>
-                        <a:srgbClr val="E6E5E0"/>
-                      </a:solidFill>
-                      <a:prstDash val="solid"/>
-                      <a:round/>
-                      <a:headEnd type="none" w="med" len="med"/>
-                      <a:tailEnd type="none" w="med" len="med"/>
-                    </a:lnB>
-                  </a:tcPr>
-                </a:tc>
-                <a:tc>
-                  <a:txBody>
-                    <a:bodyPr/>
-                    <a:lstStyle/>
-                    <a:p>
-                      <a:pPr indent="0" marL="0">
-                        <a:buNone/>
-                      </a:pPr>
-                      <a:r>
-                        <a:rPr lang="en-US" sz="1300" dirty="0">
-                          <a:solidFill>
-                            <a:schemeClr val="tx1"/>
-                          </a:solidFill>
-                        </a:rPr>
-                        <a:t>удовлетворённость взаимодействием (Q11), частота общения (Q50)</a:t>
-                      </a:r>
-                      <a:endParaRPr lang="en-US" sz="1300" dirty="0"/>
-                    </a:p>
-                  </a:txBody>
-                  <a:tcPr marL="76200" marR="76200" marT="25400" marB="25400">
-                    <a:lnL w="9525" cap="flat" cmpd="sng" algn="ctr">
-                      <a:solidFill>
-                        <a:srgbClr val="E6E5E0"/>
-                      </a:solidFill>
-                      <a:prstDash val="solid"/>
-                      <a:round/>
-                      <a:headEnd type="none" w="med" len="med"/>
-                      <a:tailEnd type="none" w="med" len="med"/>
-                    </a:lnL>
-                    <a:lnR w="9525" cap="flat" cmpd="sng" algn="ctr">
-                      <a:solidFill>
-                        <a:srgbClr val="E6E5E0"/>
-                      </a:solidFill>
-                      <a:prstDash val="solid"/>
-                      <a:round/>
-                      <a:headEnd type="none" w="med" len="med"/>
-                      <a:tailEnd type="none" w="med" len="med"/>
-                    </a:lnR>
-                    <a:lnT w="9525" cap="flat" cmpd="sng" algn="ctr">
-                      <a:solidFill>
-                        <a:srgbClr val="E6E5E0"/>
-                      </a:solidFill>
-                      <a:prstDash val="solid"/>
-                      <a:round/>
-                      <a:headEnd type="none" w="med" len="med"/>
-                      <a:tailEnd type="none" w="med" len="med"/>
-                    </a:lnT>
-                    <a:lnB w="9525" cap="flat" cmpd="sng" algn="ctr">
-                      <a:solidFill>
-                        <a:srgbClr val="E6E5E0"/>
-                      </a:solidFill>
-                      <a:prstDash val="solid"/>
-                      <a:round/>
-                      <a:headEnd type="none" w="med" len="med"/>
-                      <a:tailEnd type="none" w="med" len="med"/>
-                    </a:lnB>
-                  </a:tcPr>
-                </a:tc>
-              </a:tr>
-              <a:tr h="329184">
-                <a:tc>
-                  <a:txBody>
-                    <a:bodyPr/>
-                    <a:lstStyle/>
-                    <a:p>
-                      <a:pPr indent="0" marL="0">
-                        <a:buNone/>
-                      </a:pPr>
-                      <a:r>
-                        <a:rPr lang="en-US" sz="1300" b="1" dirty="0">
-                          <a:solidFill>
-                            <a:schemeClr val="tx2"/>
-                          </a:solidFill>
-                        </a:rPr>
-                        <a:t>Академическая среда</a:t>
-                      </a:r>
-                      <a:endParaRPr lang="en-US" sz="1300" dirty="0"/>
-                    </a:p>
-                  </a:txBody>
-                  <a:tcPr marL="76200" marR="76200" marT="25400" marB="25400">
-                    <a:lnL w="9525" cap="flat" cmpd="sng" algn="ctr">
-                      <a:solidFill>
-                        <a:srgbClr val="E6E5E0"/>
-                      </a:solidFill>
-                      <a:prstDash val="solid"/>
-                      <a:round/>
-                      <a:headEnd type="none" w="med" len="med"/>
-                      <a:tailEnd type="none" w="med" len="med"/>
-                    </a:lnL>
-                    <a:lnR w="9525" cap="flat" cmpd="sng" algn="ctr">
-                      <a:solidFill>
-                        <a:srgbClr val="E6E5E0"/>
-                      </a:solidFill>
-                      <a:prstDash val="solid"/>
-                      <a:round/>
-                      <a:headEnd type="none" w="med" len="med"/>
-                      <a:tailEnd type="none" w="med" len="med"/>
-                    </a:lnR>
-                    <a:lnT w="9525" cap="flat" cmpd="sng" algn="ctr">
-                      <a:solidFill>
-                        <a:srgbClr val="E6E5E0"/>
-                      </a:solidFill>
-                      <a:prstDash val="solid"/>
-                      <a:round/>
-                      <a:headEnd type="none" w="med" len="med"/>
-                      <a:tailEnd type="none" w="med" len="med"/>
-                    </a:lnT>
-                    <a:lnB w="9525" cap="flat" cmpd="sng" algn="ctr">
-                      <a:solidFill>
-                        <a:srgbClr val="E6E5E0"/>
-                      </a:solidFill>
-                      <a:prstDash val="solid"/>
-                      <a:round/>
-                      <a:headEnd type="none" w="med" len="med"/>
-                      <a:tailEnd type="none" w="med" len="med"/>
-                    </a:lnB>
-                  </a:tcPr>
-                </a:tc>
-                <a:tc>
-                  <a:txBody>
-                    <a:bodyPr/>
-                    <a:lstStyle/>
-                    <a:p>
-                      <a:pPr indent="0" marL="0">
-                        <a:buNone/>
-                      </a:pPr>
-                      <a:r>
-                        <a:rPr lang="en-US" sz="1300" dirty="0">
-                          <a:solidFill>
-                            <a:schemeClr val="tx1"/>
-                          </a:solidFill>
-                        </a:rPr>
-                        <a:t>индекс принадлежности из 6 пунктов Qatm, α = 0.87</a:t>
-                      </a:r>
-                      <a:endParaRPr lang="en-US" sz="1300" dirty="0"/>
-                    </a:p>
-                  </a:txBody>
-                  <a:tcPr marL="76200" marR="76200" marT="25400" marB="25400">
-                    <a:lnL w="9525" cap="flat" cmpd="sng" algn="ctr">
-                      <a:solidFill>
-                        <a:srgbClr val="E6E5E0"/>
-                      </a:solidFill>
-                      <a:prstDash val="solid"/>
-                      <a:round/>
-                      <a:headEnd type="none" w="med" len="med"/>
-                      <a:tailEnd type="none" w="med" len="med"/>
-                    </a:lnL>
-                    <a:lnR w="9525" cap="flat" cmpd="sng" algn="ctr">
-                      <a:solidFill>
-                        <a:srgbClr val="E6E5E0"/>
-                      </a:solidFill>
-                      <a:prstDash val="solid"/>
-                      <a:round/>
-                      <a:headEnd type="none" w="med" len="med"/>
-                      <a:tailEnd type="none" w="med" len="med"/>
-                    </a:lnR>
-                    <a:lnT w="9525" cap="flat" cmpd="sng" algn="ctr">
-                      <a:solidFill>
-                        <a:srgbClr val="E6E5E0"/>
-                      </a:solidFill>
-                      <a:prstDash val="solid"/>
-                      <a:round/>
-                      <a:headEnd type="none" w="med" len="med"/>
-                      <a:tailEnd type="none" w="med" len="med"/>
-                    </a:lnT>
-                    <a:lnB w="9525" cap="flat" cmpd="sng" algn="ctr">
-                      <a:solidFill>
-                        <a:srgbClr val="E6E5E0"/>
-                      </a:solidFill>
-                      <a:prstDash val="solid"/>
-                      <a:round/>
-                      <a:headEnd type="none" w="med" len="med"/>
-                      <a:tailEnd type="none" w="med" len="med"/>
-                    </a:lnB>
-                  </a:tcPr>
-                </a:tc>
-              </a:tr>
-              <a:tr h="329184">
-                <a:tc>
-                  <a:txBody>
-                    <a:bodyPr/>
-                    <a:lstStyle/>
-                    <a:p>
-                      <a:pPr indent="0" marL="0">
-                        <a:buNone/>
-                      </a:pPr>
-                      <a:r>
-                        <a:rPr lang="en-US" sz="1300" b="1" dirty="0">
-                          <a:solidFill>
-                            <a:schemeClr val="tx2"/>
-                          </a:solidFill>
-                        </a:rPr>
-                        <a:t>Ментальное здоровье</a:t>
-                      </a:r>
-                      <a:endParaRPr lang="en-US" sz="1300" dirty="0"/>
-                    </a:p>
-                  </a:txBody>
-                  <a:tcPr marL="76200" marR="76200" marT="25400" marB="25400">
-                    <a:lnL w="9525" cap="flat" cmpd="sng" algn="ctr">
-                      <a:solidFill>
-                        <a:srgbClr val="E6E5E0"/>
-                      </a:solidFill>
-                      <a:prstDash val="solid"/>
-                      <a:round/>
-                      <a:headEnd type="none" w="med" len="med"/>
-                      <a:tailEnd type="none" w="med" len="med"/>
-                    </a:lnL>
-                    <a:lnR w="9525" cap="flat" cmpd="sng" algn="ctr">
-                      <a:solidFill>
-                        <a:srgbClr val="E6E5E0"/>
-                      </a:solidFill>
-                      <a:prstDash val="solid"/>
-                      <a:round/>
-                      <a:headEnd type="none" w="med" len="med"/>
-                      <a:tailEnd type="none" w="med" len="med"/>
-                    </a:lnR>
-                    <a:lnT w="9525" cap="flat" cmpd="sng" algn="ctr">
-                      <a:solidFill>
-                        <a:srgbClr val="E6E5E0"/>
-                      </a:solidFill>
-                      <a:prstDash val="solid"/>
-                      <a:round/>
-                      <a:headEnd type="none" w="med" len="med"/>
-                      <a:tailEnd type="none" w="med" len="med"/>
-                    </a:lnT>
-                    <a:lnB w="9525" cap="flat" cmpd="sng" algn="ctr">
-                      <a:solidFill>
-                        <a:srgbClr val="E6E5E0"/>
-                      </a:solidFill>
-                      <a:prstDash val="solid"/>
-                      <a:round/>
-                      <a:headEnd type="none" w="med" len="med"/>
-                      <a:tailEnd type="none" w="med" len="med"/>
-                    </a:lnB>
-                  </a:tcPr>
-                </a:tc>
-                <a:tc>
-                  <a:txBody>
-                    <a:bodyPr/>
-                    <a:lstStyle/>
-                    <a:p>
-                      <a:pPr indent="0" marL="0">
-                        <a:buNone/>
-                      </a:pPr>
-                      <a:r>
-                        <a:rPr lang="en-US" sz="1300" dirty="0">
-                          <a:solidFill>
-                            <a:schemeClr val="tx1"/>
-                          </a:solidFill>
-                        </a:rPr>
-                        <a:t>PHQ-8, 0–24 балла, α = 0.90</a:t>
-                      </a:r>
-                      <a:endParaRPr lang="en-US" sz="1300" dirty="0"/>
-                    </a:p>
-                  </a:txBody>
-                  <a:tcPr marL="76200" marR="76200" marT="25400" marB="25400">
-                    <a:lnL w="9525" cap="flat" cmpd="sng" algn="ctr">
-                      <a:solidFill>
-                        <a:srgbClr val="E6E5E0"/>
-                      </a:solidFill>
-                      <a:prstDash val="solid"/>
-                      <a:round/>
-                      <a:headEnd type="none" w="med" len="med"/>
-                      <a:tailEnd type="none" w="med" len="med"/>
-                    </a:lnL>
-                    <a:lnR w="9525" cap="flat" cmpd="sng" algn="ctr">
-                      <a:solidFill>
-                        <a:srgbClr val="E6E5E0"/>
-                      </a:solidFill>
-                      <a:prstDash val="solid"/>
-                      <a:round/>
-                      <a:headEnd type="none" w="med" len="med"/>
-                      <a:tailEnd type="none" w="med" len="med"/>
-                    </a:lnR>
-                    <a:lnT w="9525" cap="flat" cmpd="sng" algn="ctr">
-                      <a:solidFill>
-                        <a:srgbClr val="E6E5E0"/>
-                      </a:solidFill>
-                      <a:prstDash val="solid"/>
-                      <a:round/>
-                      <a:headEnd type="none" w="med" len="med"/>
-                      <a:tailEnd type="none" w="med" len="med"/>
-                    </a:lnT>
-                    <a:lnB w="9525" cap="flat" cmpd="sng" algn="ctr">
-                      <a:solidFill>
-                        <a:srgbClr val="E6E5E0"/>
-                      </a:solidFill>
-                      <a:prstDash val="solid"/>
-                      <a:round/>
-                      <a:headEnd type="none" w="med" len="med"/>
-                      <a:tailEnd type="none" w="med" len="med"/>
-                    </a:lnB>
-                  </a:tcPr>
-                </a:tc>
-              </a:tr>
-              <a:tr h="329184">
-                <a:tc>
-                  <a:txBody>
-                    <a:bodyPr/>
-                    <a:lstStyle/>
-                    <a:p>
-                      <a:pPr indent="0" marL="0">
-                        <a:buNone/>
-                      </a:pPr>
-                      <a:r>
-                        <a:rPr lang="en-US" sz="1300" b="1" dirty="0">
-                          <a:solidFill>
-                            <a:schemeClr val="tx2"/>
-                          </a:solidFill>
-                        </a:rPr>
-                        <a:t>Занятость</a:t>
-                      </a:r>
-                      <a:endParaRPr lang="en-US" sz="1300" dirty="0"/>
-                    </a:p>
-                  </a:txBody>
-                  <a:tcPr marL="76200" marR="76200" marT="25400" marB="25400">
-                    <a:lnL w="9525" cap="flat" cmpd="sng" algn="ctr">
-                      <a:solidFill>
-                        <a:srgbClr val="E6E5E0"/>
-                      </a:solidFill>
-                      <a:prstDash val="solid"/>
-                      <a:round/>
-                      <a:headEnd type="none" w="med" len="med"/>
-                      <a:tailEnd type="none" w="med" len="med"/>
-                    </a:lnL>
-                    <a:lnR w="9525" cap="flat" cmpd="sng" algn="ctr">
-                      <a:solidFill>
-                        <a:srgbClr val="E6E5E0"/>
-                      </a:solidFill>
-                      <a:prstDash val="solid"/>
-                      <a:round/>
-                      <a:headEnd type="none" w="med" len="med"/>
-                      <a:tailEnd type="none" w="med" len="med"/>
-                    </a:lnR>
-                    <a:lnT w="9525" cap="flat" cmpd="sng" algn="ctr">
-                      <a:solidFill>
-                        <a:srgbClr val="E6E5E0"/>
-                      </a:solidFill>
-                      <a:prstDash val="solid"/>
-                      <a:round/>
-                      <a:headEnd type="none" w="med" len="med"/>
-                      <a:tailEnd type="none" w="med" len="med"/>
-                    </a:lnT>
-                    <a:lnB w="9525" cap="flat" cmpd="sng" algn="ctr">
-                      <a:solidFill>
-                        <a:srgbClr val="E6E5E0"/>
-                      </a:solidFill>
-                      <a:prstDash val="solid"/>
-                      <a:round/>
-                      <a:headEnd type="none" w="med" len="med"/>
-                      <a:tailEnd type="none" w="med" len="med"/>
-                    </a:lnB>
-                  </a:tcPr>
-                </a:tc>
-                <a:tc>
-                  <a:txBody>
-                    <a:bodyPr/>
-                    <a:lstStyle/>
-                    <a:p>
-                      <a:pPr indent="0" marL="0">
-                        <a:buNone/>
-                      </a:pPr>
-                      <a:r>
-                        <a:rPr lang="en-US" sz="1300" dirty="0">
-                          <a:solidFill>
-                            <a:schemeClr val="tx1"/>
-                          </a:solidFill>
-                        </a:rPr>
-                        <a:t>5 типов (Q20) + связь работы с диссертацией (Q23)</a:t>
-                      </a:r>
-                      <a:endParaRPr lang="en-US" sz="1300" dirty="0"/>
-                    </a:p>
-                  </a:txBody>
-                  <a:tcPr marL="76200" marR="76200" marT="25400" marB="25400">
-                    <a:lnL w="9525" cap="flat" cmpd="sng" algn="ctr">
-                      <a:solidFill>
-                        <a:srgbClr val="E6E5E0"/>
-                      </a:solidFill>
-                      <a:prstDash val="solid"/>
-                      <a:round/>
-                      <a:headEnd type="none" w="med" len="med"/>
-                      <a:tailEnd type="none" w="med" len="med"/>
-                    </a:lnL>
-                    <a:lnR w="9525" cap="flat" cmpd="sng" algn="ctr">
-                      <a:solidFill>
-                        <a:srgbClr val="E6E5E0"/>
-                      </a:solidFill>
-                      <a:prstDash val="solid"/>
-                      <a:round/>
-                      <a:headEnd type="none" w="med" len="med"/>
-                      <a:tailEnd type="none" w="med" len="med"/>
-                    </a:lnR>
-                    <a:lnT w="9525" cap="flat" cmpd="sng" algn="ctr">
-                      <a:solidFill>
-                        <a:srgbClr val="E6E5E0"/>
-                      </a:solidFill>
-                      <a:prstDash val="solid"/>
-                      <a:round/>
-                      <a:headEnd type="none" w="med" len="med"/>
-                      <a:tailEnd type="none" w="med" len="med"/>
-                    </a:lnT>
-                    <a:lnB w="9525" cap="flat" cmpd="sng" algn="ctr">
-                      <a:solidFill>
-                        <a:srgbClr val="E6E5E0"/>
-                      </a:solidFill>
-                      <a:prstDash val="solid"/>
-                      <a:round/>
-                      <a:headEnd type="none" w="med" len="med"/>
-                      <a:tailEnd type="none" w="med" len="med"/>
-                    </a:lnB>
-                  </a:tcPr>
-                </a:tc>
-              </a:tr>
-              <a:tr h="329184">
-                <a:tc>
-                  <a:txBody>
-                    <a:bodyPr/>
-                    <a:lstStyle/>
-                    <a:p>
-                      <a:pPr indent="0" marL="0">
-                        <a:buNone/>
-                      </a:pPr>
-                      <a:r>
-                        <a:rPr lang="en-US" sz="1300" b="1" dirty="0">
-                          <a:solidFill>
-                            <a:schemeClr val="tx2"/>
-                          </a:solidFill>
-                        </a:rPr>
-                        <a:t>Контроли</a:t>
-                      </a:r>
-                      <a:endParaRPr lang="en-US" sz="1300" dirty="0"/>
-                    </a:p>
-                  </a:txBody>
-                  <a:tcPr marL="76200" marR="76200" marT="25400" marB="25400">
-                    <a:lnL w="9525" cap="flat" cmpd="sng" algn="ctr">
-                      <a:solidFill>
-                        <a:srgbClr val="E6E5E0"/>
-                      </a:solidFill>
-                      <a:prstDash val="solid"/>
-                      <a:round/>
-                      <a:headEnd type="none" w="med" len="med"/>
-                      <a:tailEnd type="none" w="med" len="med"/>
-                    </a:lnL>
-                    <a:lnR w="9525" cap="flat" cmpd="sng" algn="ctr">
-                      <a:solidFill>
-                        <a:srgbClr val="E6E5E0"/>
-                      </a:solidFill>
-                      <a:prstDash val="solid"/>
-                      <a:round/>
-                      <a:headEnd type="none" w="med" len="med"/>
-                      <a:tailEnd type="none" w="med" len="med"/>
-                    </a:lnR>
-                    <a:lnT w="9525" cap="flat" cmpd="sng" algn="ctr">
-                      <a:solidFill>
-                        <a:srgbClr val="E6E5E0"/>
-                      </a:solidFill>
-                      <a:prstDash val="solid"/>
-                      <a:round/>
-                      <a:headEnd type="none" w="med" len="med"/>
-                      <a:tailEnd type="none" w="med" len="med"/>
-                    </a:lnT>
-                    <a:lnB w="9525" cap="flat" cmpd="sng" algn="ctr">
-                      <a:solidFill>
-                        <a:srgbClr val="E6E5E0"/>
-                      </a:solidFill>
-                      <a:prstDash val="solid"/>
-                      <a:round/>
-                      <a:headEnd type="none" w="med" len="med"/>
-                      <a:tailEnd type="none" w="med" len="med"/>
-                    </a:lnB>
-                  </a:tcPr>
-                </a:tc>
-                <a:tc>
-                  <a:txBody>
-                    <a:bodyPr/>
-                    <a:lstStyle/>
-                    <a:p>
-                      <a:pPr indent="0" marL="0">
-                        <a:buNone/>
-                      </a:pPr>
-                      <a:r>
-                        <a:rPr lang="en-US" sz="1300" dirty="0">
-                          <a:solidFill>
-                            <a:schemeClr val="tx1"/>
-                          </a:solidFill>
-                        </a:rPr>
-                        <a:t>пол, год и форма обучения, платное место, дети, брак, направление, регион, цели, публикации</a:t>
-                      </a:r>
-                      <a:endParaRPr lang="en-US" sz="1300" dirty="0"/>
-                    </a:p>
-                  </a:txBody>
-                  <a:tcPr marL="76200" marR="76200" marT="25400" marB="25400">
-                    <a:lnL w="9525" cap="flat" cmpd="sng" algn="ctr">
-                      <a:solidFill>
-                        <a:srgbClr val="E6E5E0"/>
-                      </a:solidFill>
-                      <a:prstDash val="solid"/>
-                      <a:round/>
-                      <a:headEnd type="none" w="med" len="med"/>
-                      <a:tailEnd type="none" w="med" len="med"/>
-                    </a:lnL>
-                    <a:lnR w="9525" cap="flat" cmpd="sng" algn="ctr">
-                      <a:solidFill>
-                        <a:srgbClr val="E6E5E0"/>
-                      </a:solidFill>
-                      <a:prstDash val="solid"/>
-                      <a:round/>
-                      <a:headEnd type="none" w="med" len="med"/>
-                      <a:tailEnd type="none" w="med" len="med"/>
-                    </a:lnR>
-                    <a:lnT w="9525" cap="flat" cmpd="sng" algn="ctr">
-                      <a:solidFill>
-                        <a:srgbClr val="E6E5E0"/>
-                      </a:solidFill>
-                      <a:prstDash val="solid"/>
-                      <a:round/>
-                      <a:headEnd type="none" w="med" len="med"/>
-                      <a:tailEnd type="none" w="med" len="med"/>
-                    </a:lnT>
-                    <a:lnB w="9525" cap="flat" cmpd="sng" algn="ctr">
-                      <a:solidFill>
-                        <a:srgbClr val="E6E5E0"/>
-                      </a:solidFill>
-                      <a:prstDash val="solid"/>
-                      <a:round/>
-                      <a:headEnd type="none" w="med" len="med"/>
-                      <a:tailEnd type="none" w="med" len="med"/>
-                    </a:lnB>
-                  </a:tcPr>
-                </a:tc>
-              </a:tr>
-            </a:tbl>
-          </a:graphicData>
-        </a:graphic>
-      </p:graphicFrame>
+              <a:rPr lang="en-US" sz="1400" dirty="0">
+                <a:solidFill>
+                  <a:schemeClr val="tx1"/>
+                </a:solidFill>
+              </a:rPr>
+              <a:t>согласны: «Я часто хочу бросить аспирантуру»</a:t>
+            </a:r>
+            <a:endParaRPr lang="en-US" sz="1400" dirty="0"/>
+          </a:p>
+        </p:txBody>
+      </p:sp>
+      <p:sp>
+        <p:nvSpPr>
+          <p:cNvPr id="22" name="Text 20"/>
+          <p:cNvSpPr txBox="1"/>
+          <p:nvPr/>
+        </p:nvSpPr>
+        <p:spPr>
+          <a:xfrm>
+            <a:off x="3337560" y="4160520"/>
+            <a:ext cx="2560320" cy="822960"/>
+          </a:xfrm>
+          <a:prstGeom prst="rect">
+            <a:avLst/>
+          </a:prstGeom>
+          <a:noFill/>
+          <a:ln/>
+        </p:spPr>
+        <p:txBody>
+          <a:bodyPr wrap="square" lIns="0" tIns="0" rIns="0" bIns="0" rtlCol="0" anchor="b"/>
+          <a:lstStyle/>
+          <a:p>
+            <a:pPr indent="0" marL="0">
+              <a:buNone/>
+            </a:pPr>
+            <a:r>
+              <a:rPr lang="en-US" sz="4400" b="1" dirty="0">
+                <a:solidFill>
+                  <a:schemeClr val="accent2"/>
+                </a:solidFill>
+              </a:rPr>
+              <a:t>26%</a:t>
+            </a:r>
+            <a:endParaRPr lang="en-US" sz="4400" dirty="0"/>
+          </a:p>
+        </p:txBody>
+      </p:sp>
+      <p:sp>
+        <p:nvSpPr>
+          <p:cNvPr id="23" name="Text 21"/>
+          <p:cNvSpPr txBox="1"/>
+          <p:nvPr/>
+        </p:nvSpPr>
+        <p:spPr>
+          <a:xfrm>
+            <a:off x="3337560" y="5029200"/>
+            <a:ext cx="2560320" cy="640080"/>
+          </a:xfrm>
+          <a:prstGeom prst="rect">
+            <a:avLst/>
+          </a:prstGeom>
+          <a:noFill/>
+          <a:ln/>
+        </p:spPr>
+        <p:txBody>
+          <a:bodyPr wrap="square" lIns="0" tIns="0" rIns="0" bIns="0" rtlCol="0" anchor="t"/>
+          <a:lstStyle/>
+          <a:p>
+            <a:pPr indent="0" marL="0">
+              <a:buNone/>
+            </a:pPr>
+            <a:r>
+              <a:rPr lang="en-US" sz="1400" dirty="0">
+                <a:solidFill>
+                  <a:schemeClr val="tx1"/>
+                </a:solidFill>
+              </a:rPr>
+              <a:t>с умеренными и выше депрессивными симптомами (PHQ-8 ≥ 10)</a:t>
+            </a:r>
+            <a:endParaRPr lang="en-US" sz="1400" dirty="0"/>
+          </a:p>
+        </p:txBody>
+      </p:sp>
+      <p:sp>
+        <p:nvSpPr>
+          <p:cNvPr id="24" name="Text 22"/>
+          <p:cNvSpPr txBox="1"/>
+          <p:nvPr/>
+        </p:nvSpPr>
+        <p:spPr>
+          <a:xfrm>
+            <a:off x="6126480" y="4160520"/>
+            <a:ext cx="2560320" cy="822960"/>
+          </a:xfrm>
+          <a:prstGeom prst="rect">
+            <a:avLst/>
+          </a:prstGeom>
+          <a:noFill/>
+          <a:ln/>
+        </p:spPr>
+        <p:txBody>
+          <a:bodyPr wrap="square" lIns="0" tIns="0" rIns="0" bIns="0" rtlCol="0" anchor="b"/>
+          <a:lstStyle/>
+          <a:p>
+            <a:pPr indent="0" marL="0">
+              <a:buNone/>
+            </a:pPr>
+            <a:r>
+              <a:rPr lang="en-US" sz="4400" b="1" dirty="0">
+                <a:solidFill>
+                  <a:schemeClr val="accent1"/>
+                </a:solidFill>
+              </a:rPr>
+              <a:t>α = 0.87</a:t>
+            </a:r>
+            <a:endParaRPr lang="en-US" sz="4400" dirty="0"/>
+          </a:p>
+        </p:txBody>
+      </p:sp>
+      <p:sp>
+        <p:nvSpPr>
+          <p:cNvPr id="25" name="Text 23"/>
+          <p:cNvSpPr txBox="1"/>
+          <p:nvPr/>
+        </p:nvSpPr>
+        <p:spPr>
+          <a:xfrm>
+            <a:off x="6126480" y="5029200"/>
+            <a:ext cx="2560320" cy="640080"/>
+          </a:xfrm>
+          <a:prstGeom prst="rect">
+            <a:avLst/>
+          </a:prstGeom>
+          <a:noFill/>
+          <a:ln/>
+        </p:spPr>
+        <p:txBody>
+          <a:bodyPr wrap="square" lIns="0" tIns="0" rIns="0" bIns="0" rtlCol="0" anchor="t"/>
+          <a:lstStyle/>
+          <a:p>
+            <a:pPr indent="0" marL="0">
+              <a:buNone/>
+            </a:pPr>
+            <a:r>
+              <a:rPr lang="en-US" sz="1400" dirty="0">
+                <a:solidFill>
+                  <a:schemeClr val="tx1"/>
+                </a:solidFill>
+              </a:rPr>
+              <a:t>надёжность индекса академической принадлежности (6 пунктов)</a:t>
+            </a:r>
+            <a:endParaRPr lang="en-US" sz="1400" dirty="0"/>
+          </a:p>
+        </p:txBody>
+      </p:sp>
+      <p:sp>
+        <p:nvSpPr>
+          <p:cNvPr id="26" name="Text 24"/>
+          <p:cNvSpPr txBox="1"/>
+          <p:nvPr/>
+        </p:nvSpPr>
+        <p:spPr>
+          <a:xfrm>
+            <a:off x="8915400" y="4160520"/>
+            <a:ext cx="2560320" cy="822960"/>
+          </a:xfrm>
+          <a:prstGeom prst="rect">
+            <a:avLst/>
+          </a:prstGeom>
+          <a:noFill/>
+          <a:ln/>
+        </p:spPr>
+        <p:txBody>
+          <a:bodyPr wrap="square" lIns="0" tIns="0" rIns="0" bIns="0" rtlCol="0" anchor="b"/>
+          <a:lstStyle/>
+          <a:p>
+            <a:pPr indent="0" marL="0">
+              <a:buNone/>
+            </a:pPr>
+            <a:r>
+              <a:rPr lang="en-US" sz="4400" b="1" dirty="0">
+                <a:solidFill>
+                  <a:schemeClr val="accent1"/>
+                </a:solidFill>
+              </a:rPr>
+              <a:t>87%</a:t>
+            </a:r>
+            <a:endParaRPr lang="en-US" sz="4400" dirty="0"/>
+          </a:p>
+        </p:txBody>
+      </p:sp>
+      <p:sp>
+        <p:nvSpPr>
+          <p:cNvPr id="27" name="Text 25"/>
+          <p:cNvSpPr txBox="1"/>
+          <p:nvPr/>
+        </p:nvSpPr>
+        <p:spPr>
+          <a:xfrm>
+            <a:off x="8915400" y="5029200"/>
+            <a:ext cx="2560320" cy="640080"/>
+          </a:xfrm>
+          <a:prstGeom prst="rect">
+            <a:avLst/>
+          </a:prstGeom>
+          <a:noFill/>
+          <a:ln/>
+        </p:spPr>
+        <p:txBody>
+          <a:bodyPr wrap="square" lIns="0" tIns="0" rIns="0" bIns="0" rtlCol="0" anchor="t"/>
+          <a:lstStyle/>
+          <a:p>
+            <a:pPr indent="0" marL="0">
+              <a:buNone/>
+            </a:pPr>
+            <a:r>
+              <a:rPr lang="en-US" sz="1400" dirty="0">
+                <a:solidFill>
+                  <a:schemeClr val="tx1"/>
+                </a:solidFill>
+              </a:rPr>
+              <a:t>анкет с полными ответами для моделей</a:t>
+            </a:r>
+            <a:endParaRPr lang="en-US" sz="1400" dirty="0"/>
+          </a:p>
+        </p:txBody>
+      </p:sp>
       <p:sp>
         <p:nvSpPr>
           <p:cNvPr id="25" name="Slide Number Placeholder 0"/>
@@ -6817,7 +6190,7 @@
                   <a:schemeClr val="tx2"/>
                 </a:solidFill>
               </a:rPr>
-              <a:t>Методы: от описательных срезов к механизмам</a:t>
+              <a:t>Методы: семь инструментов, каждый отвечает на свой вопрос</a:t>
             </a:r>
             <a:endParaRPr lang="en-US" sz="2600" dirty="0"/>
           </a:p>
@@ -6831,12 +6204,12 @@
         </p:nvSpPr>
         <p:spPr>
           <a:xfrm>
-            <a:off x="548640" y="1417320"/>
-            <a:ext cx="2560320" cy="3108960"/>
+            <a:off x="548640" y="1325880"/>
+            <a:ext cx="5440680" cy="1069848"/>
           </a:xfrm>
           <a:prstGeom prst="roundRect">
             <a:avLst>
-              <a:gd name="adj" fmla="val 2857"/>
+              <a:gd name="adj" fmla="val 6838"/>
             </a:avLst>
           </a:prstGeom>
           <a:solidFill>
@@ -6852,28 +6225,39 @@
       </p:sp>
       <p:sp>
         <p:nvSpPr>
-          <p:cNvPr id="4" name="Shape 2"/>
-          <p:cNvSpPr/>
-          <p:nvPr/>
-        </p:nvSpPr>
-        <p:spPr>
-          <a:xfrm>
-            <a:off x="777240" y="1645920"/>
-            <a:ext cx="640080" cy="640080"/>
-          </a:xfrm>
-          <a:prstGeom prst="ellipse">
-            <a:avLst/>
-          </a:prstGeom>
-          <a:solidFill>
-            <a:schemeClr val="accent1"/>
-          </a:solidFill>
-          <a:ln w="12700">
-            <a:solidFill>
-              <a:schemeClr val="accent1"/>
-            </a:solidFill>
-            <a:prstDash val="solid"/>
-          </a:ln>
-        </p:spPr>
+          <p:cNvPr id="4" name="Text 2"/>
+          <p:cNvSpPr txBox="1"/>
+          <p:nvPr/>
+        </p:nvSpPr>
+        <p:spPr>
+          <a:xfrm>
+            <a:off x="777240" y="1444752"/>
+            <a:ext cx="3108960" cy="365760"/>
+          </a:xfrm>
+          <a:prstGeom prst="rect">
+            <a:avLst/>
+          </a:prstGeom>
+          <a:noFill/>
+          <a:ln/>
+        </p:spPr>
+        <p:txBody>
+          <a:bodyPr wrap="square" lIns="0" tIns="0" rIns="0" bIns="0" rtlCol="0" anchor="ctr"/>
+          <a:lstStyle/>
+          <a:p>
+            <a:pPr indent="0" marL="0">
+              <a:buNone/>
+            </a:pPr>
+            <a:r>
+              <a:rPr lang="en-US" sz="1500" b="1" dirty="0">
+                <a:solidFill>
+                  <a:schemeClr val="tx2"/>
+                </a:solidFill>
+              </a:rPr>
+              <a:t>Логит-регрессия</a:t>
+            </a:r>
+            <a:endParaRPr lang="en-US" sz="1500" dirty="0"/>
+          </a:p>
+        </p:txBody>
       </p:sp>
       <p:sp>
         <p:nvSpPr>
@@ -6883,8 +6267,8 @@
         </p:nvSpPr>
         <p:spPr>
           <a:xfrm>
-            <a:off x="777240" y="1645920"/>
-            <a:ext cx="640080" cy="640080"/>
+            <a:off x="777240" y="1828800"/>
+            <a:ext cx="3337560" cy="502920"/>
           </a:xfrm>
           <a:prstGeom prst="rect">
             <a:avLst/>
@@ -6893,21 +6277,21 @@
           <a:ln/>
         </p:spPr>
         <p:txBody>
-          <a:bodyPr wrap="square" lIns="0" tIns="0" rIns="0" bIns="0" rtlCol="0" anchor="ctr"/>
-          <a:lstStyle/>
-          <a:p>
-            <a:pPr algn="ctr" indent="0" marL="0">
+          <a:bodyPr wrap="square" lIns="0" tIns="0" rIns="0" bIns="0" rtlCol="0" anchor="t"/>
+          <a:lstStyle/>
+          <a:p>
+            <a:pPr indent="0" marL="0">
               <a:buNone/>
             </a:pPr>
             <a:r>
-              <a:rPr lang="en-US" sz="2200" b="1" dirty="0">
-                <a:solidFill>
-                  <a:schemeClr val="bg1"/>
-                </a:solidFill>
-              </a:rPr>
-              <a:t>1</a:t>
-            </a:r>
-            <a:endParaRPr lang="en-US" sz="2200" dirty="0"/>
+              <a:rPr lang="en-US" sz="1200" dirty="0">
+                <a:solidFill>
+                  <a:schemeClr val="tx1"/>
+                </a:solidFill>
+              </a:rPr>
+              <a:t>кластерные ошибки по вузу; порядковый логит для проверки</a:t>
+            </a:r>
+            <a:endParaRPr lang="en-US" sz="1200" dirty="0"/>
           </a:p>
         </p:txBody>
       </p:sp>
@@ -6919,8 +6303,8 @@
         </p:nvSpPr>
         <p:spPr>
           <a:xfrm>
-            <a:off x="777240" y="2468880"/>
-            <a:ext cx="2148840" cy="411480"/>
+            <a:off x="4160520" y="1444752"/>
+            <a:ext cx="1645920" cy="822960"/>
           </a:xfrm>
           <a:prstGeom prst="rect">
             <a:avLst/>
@@ -6932,71 +6316,35 @@
           <a:bodyPr wrap="square" lIns="0" tIns="0" rIns="0" bIns="0" rtlCol="0" anchor="ctr"/>
           <a:lstStyle/>
           <a:p>
-            <a:pPr indent="0" marL="0">
+            <a:pPr algn="r" indent="0" marL="0">
               <a:buNone/>
             </a:pPr>
             <a:r>
-              <a:rPr lang="en-US" sz="1700" b="1" dirty="0">
-                <a:solidFill>
-                  <a:schemeClr val="tx2"/>
-                </a:solidFill>
-              </a:rPr>
-              <a:t>Логит-регрессия</a:t>
-            </a:r>
-            <a:endParaRPr lang="en-US" sz="1700" dirty="0"/>
-          </a:p>
-        </p:txBody>
-      </p:sp>
-      <p:sp>
-        <p:nvSpPr>
-          <p:cNvPr id="7" name="Text 5"/>
-          <p:cNvSpPr txBox="1"/>
-          <p:nvPr/>
-        </p:nvSpPr>
-        <p:spPr>
-          <a:xfrm>
-            <a:off x="777240" y="2926080"/>
-            <a:ext cx="2148840" cy="1463040"/>
-          </a:xfrm>
-          <a:prstGeom prst="rect">
-            <a:avLst/>
-          </a:prstGeom>
-          <a:noFill/>
-          <a:ln/>
-        </p:spPr>
-        <p:txBody>
-          <a:bodyPr wrap="square" lIns="0" tIns="0" rIns="0" bIns="0" rtlCol="0" anchor="t"/>
-          <a:lstStyle/>
-          <a:p>
-            <a:pPr indent="0" marL="0">
-              <a:buNone/>
-            </a:pPr>
-            <a:r>
-              <a:rPr lang="en-US" sz="1400" dirty="0">
-                <a:solidFill>
-                  <a:schemeClr val="tx1"/>
-                </a:solidFill>
-              </a:rPr>
-              <a:t>4 вложенные модели, блоки предикторов, ошибки кластеризованы по вузу. Проверка: порядковый логит</a:t>
-            </a:r>
-            <a:endParaRPr lang="en-US" sz="1400" dirty="0"/>
-          </a:p>
-        </p:txBody>
-      </p:sp>
-      <p:sp>
-        <p:nvSpPr>
-          <p:cNvPr id="8" name="card"/>
+              <a:rPr lang="en-US" sz="1300" b="1" i="1" dirty="0">
+                <a:solidFill>
+                  <a:schemeClr val="accent1"/>
+                </a:solidFill>
+              </a:rPr>
+              <a:t>Что связано?</a:t>
+            </a:r>
+            <a:endParaRPr lang="en-US" sz="1300" dirty="0"/>
+          </a:p>
+        </p:txBody>
+      </p:sp>
+      <p:sp>
+        <p:nvSpPr>
+          <p:cNvPr id="7" name="card"/>
           <p:cNvSpPr/>
           <p:nvPr/>
         </p:nvSpPr>
         <p:spPr>
           <a:xfrm>
-            <a:off x="3337560" y="1417320"/>
-            <a:ext cx="2560320" cy="3108960"/>
+            <a:off x="6172200" y="1325880"/>
+            <a:ext cx="5440680" cy="1069848"/>
           </a:xfrm>
           <a:prstGeom prst="roundRect">
             <a:avLst>
-              <a:gd name="adj" fmla="val 2857"/>
+              <a:gd name="adj" fmla="val 6838"/>
             </a:avLst>
           </a:prstGeom>
           <a:solidFill>
@@ -7012,28 +6360,75 @@
       </p:sp>
       <p:sp>
         <p:nvSpPr>
-          <p:cNvPr id="9" name="Shape 7"/>
-          <p:cNvSpPr/>
-          <p:nvPr/>
-        </p:nvSpPr>
-        <p:spPr>
-          <a:xfrm>
-            <a:off x="3566160" y="1645920"/>
-            <a:ext cx="640080" cy="640080"/>
-          </a:xfrm>
-          <a:prstGeom prst="ellipse">
-            <a:avLst/>
-          </a:prstGeom>
-          <a:solidFill>
-            <a:schemeClr val="accent1"/>
-          </a:solidFill>
-          <a:ln w="12700">
-            <a:solidFill>
-              <a:schemeClr val="accent1"/>
-            </a:solidFill>
-            <a:prstDash val="solid"/>
-          </a:ln>
-        </p:spPr>
+          <p:cNvPr id="8" name="Text 6"/>
+          <p:cNvSpPr txBox="1"/>
+          <p:nvPr/>
+        </p:nvSpPr>
+        <p:spPr>
+          <a:xfrm>
+            <a:off x="6400800" y="1444752"/>
+            <a:ext cx="3108960" cy="365760"/>
+          </a:xfrm>
+          <a:prstGeom prst="rect">
+            <a:avLst/>
+          </a:prstGeom>
+          <a:noFill/>
+          <a:ln/>
+        </p:spPr>
+        <p:txBody>
+          <a:bodyPr wrap="square" lIns="0" tIns="0" rIns="0" bIns="0" rtlCol="0" anchor="ctr"/>
+          <a:lstStyle/>
+          <a:p>
+            <a:pPr indent="0" marL="0">
+              <a:buNone/>
+            </a:pPr>
+            <a:r>
+              <a:rPr lang="en-US" sz="1500" b="1" dirty="0">
+                <a:solidFill>
+                  <a:schemeClr val="tx2"/>
+                </a:solidFill>
+              </a:rPr>
+              <a:t>Декомпозиция Шепли</a:t>
+            </a:r>
+            <a:endParaRPr lang="en-US" sz="1500" dirty="0"/>
+          </a:p>
+        </p:txBody>
+      </p:sp>
+      <p:sp>
+        <p:nvSpPr>
+          <p:cNvPr id="9" name="Text 7"/>
+          <p:cNvSpPr txBox="1"/>
+          <p:nvPr/>
+        </p:nvSpPr>
+        <p:spPr>
+          <a:xfrm>
+            <a:off x="6400800" y="1828800"/>
+            <a:ext cx="3337560" cy="502920"/>
+          </a:xfrm>
+          <a:prstGeom prst="rect">
+            <a:avLst/>
+          </a:prstGeom>
+          <a:noFill/>
+          <a:ln/>
+        </p:spPr>
+        <p:txBody>
+          <a:bodyPr wrap="square" lIns="0" tIns="0" rIns="0" bIns="0" rtlCol="0" anchor="t"/>
+          <a:lstStyle/>
+          <a:p>
+            <a:pPr indent="0" marL="0">
+              <a:buNone/>
+            </a:pPr>
+            <a:r>
+              <a:rPr lang="en-US" sz="1200" dirty="0">
+                <a:solidFill>
+                  <a:schemeClr val="tx1"/>
+                </a:solidFill>
+              </a:rPr>
+              <a:t>вклад 7 блоков в псевдо-R² (128 моделей)</a:t>
+            </a:r>
+            <a:endParaRPr lang="en-US" sz="1200" dirty="0"/>
+          </a:p>
+        </p:txBody>
       </p:sp>
       <p:sp>
         <p:nvSpPr>
@@ -7043,8 +6438,8 @@
         </p:nvSpPr>
         <p:spPr>
           <a:xfrm>
-            <a:off x="3566160" y="1645920"/>
-            <a:ext cx="640080" cy="640080"/>
+            <a:off x="9784080" y="1444752"/>
+            <a:ext cx="1645920" cy="822960"/>
           </a:xfrm>
           <a:prstGeom prst="rect">
             <a:avLst/>
@@ -7056,107 +6451,35 @@
           <a:bodyPr wrap="square" lIns="0" tIns="0" rIns="0" bIns="0" rtlCol="0" anchor="ctr"/>
           <a:lstStyle/>
           <a:p>
-            <a:pPr algn="ctr" indent="0" marL="0">
+            <a:pPr algn="r" indent="0" marL="0">
               <a:buNone/>
             </a:pPr>
             <a:r>
-              <a:rPr lang="en-US" sz="2200" b="1" dirty="0">
-                <a:solidFill>
-                  <a:schemeClr val="bg1"/>
-                </a:solidFill>
-              </a:rPr>
-              <a:t>2</a:t>
-            </a:r>
-            <a:endParaRPr lang="en-US" sz="2200" dirty="0"/>
-          </a:p>
-        </p:txBody>
-      </p:sp>
-      <p:sp>
-        <p:nvSpPr>
-          <p:cNvPr id="11" name="Text 9"/>
-          <p:cNvSpPr txBox="1"/>
-          <p:nvPr/>
-        </p:nvSpPr>
-        <p:spPr>
-          <a:xfrm>
-            <a:off x="3566160" y="2468880"/>
-            <a:ext cx="2148840" cy="411480"/>
-          </a:xfrm>
-          <a:prstGeom prst="rect">
-            <a:avLst/>
-          </a:prstGeom>
-          <a:noFill/>
-          <a:ln/>
-        </p:spPr>
-        <p:txBody>
-          <a:bodyPr wrap="square" lIns="0" tIns="0" rIns="0" bIns="0" rtlCol="0" anchor="ctr"/>
-          <a:lstStyle/>
-          <a:p>
-            <a:pPr indent="0" marL="0">
-              <a:buNone/>
-            </a:pPr>
-            <a:r>
-              <a:rPr lang="en-US" sz="1700" b="1" dirty="0">
-                <a:solidFill>
-                  <a:schemeClr val="tx2"/>
-                </a:solidFill>
-              </a:rPr>
-              <a:t>Важность блоков</a:t>
-            </a:r>
-            <a:endParaRPr lang="en-US" sz="1700" dirty="0"/>
-          </a:p>
-        </p:txBody>
-      </p:sp>
-      <p:sp>
-        <p:nvSpPr>
-          <p:cNvPr id="12" name="Text 10"/>
-          <p:cNvSpPr txBox="1"/>
-          <p:nvPr/>
-        </p:nvSpPr>
-        <p:spPr>
-          <a:xfrm>
-            <a:off x="3566160" y="2926080"/>
-            <a:ext cx="2148840" cy="1463040"/>
-          </a:xfrm>
-          <a:prstGeom prst="rect">
-            <a:avLst/>
-          </a:prstGeom>
-          <a:noFill/>
-          <a:ln/>
-        </p:spPr>
-        <p:txBody>
-          <a:bodyPr wrap="square" lIns="0" tIns="0" rIns="0" bIns="0" rtlCol="0" anchor="t"/>
-          <a:lstStyle/>
-          <a:p>
-            <a:pPr indent="0" marL="0">
-              <a:buNone/>
-            </a:pPr>
-            <a:r>
-              <a:rPr lang="en-US" sz="1400" dirty="0">
-                <a:solidFill>
-                  <a:schemeClr val="tx1"/>
-                </a:solidFill>
-              </a:rPr>
-              <a:t>Декомпозиция Шепли псевдо-R² Макфаддена по 7 блокам (128 моделей)</a:t>
-            </a:r>
-            <a:endParaRPr lang="en-US" sz="1400" dirty="0"/>
-          </a:p>
-        </p:txBody>
-      </p:sp>
-      <p:sp>
-        <p:nvSpPr>
-          <p:cNvPr id="13" name="card"/>
+              <a:rPr lang="en-US" sz="1300" b="1" i="1" dirty="0">
+                <a:solidFill>
+                  <a:schemeClr val="accent1"/>
+                </a:solidFill>
+              </a:rPr>
+              <a:t>Что важнее?</a:t>
+            </a:r>
+            <a:endParaRPr lang="en-US" sz="1300" dirty="0"/>
+          </a:p>
+        </p:txBody>
+      </p:sp>
+      <p:sp>
+        <p:nvSpPr>
+          <p:cNvPr id="11" name="card"/>
           <p:cNvSpPr/>
           <p:nvPr/>
         </p:nvSpPr>
         <p:spPr>
           <a:xfrm>
-            <a:off x="6126480" y="1417320"/>
-            <a:ext cx="2560320" cy="3108960"/>
+            <a:off x="548640" y="2532888"/>
+            <a:ext cx="5440680" cy="1069848"/>
           </a:xfrm>
           <a:prstGeom prst="roundRect">
             <a:avLst>
-              <a:gd name="adj" fmla="val 2857"/>
+              <a:gd name="adj" fmla="val 6838"/>
             </a:avLst>
           </a:prstGeom>
           <a:solidFill>
@@ -7172,39 +6495,14 @@
       </p:sp>
       <p:sp>
         <p:nvSpPr>
-          <p:cNvPr id="14" name="Shape 12"/>
-          <p:cNvSpPr/>
-          <p:nvPr/>
-        </p:nvSpPr>
-        <p:spPr>
-          <a:xfrm>
-            <a:off x="6355080" y="1645920"/>
-            <a:ext cx="640080" cy="640080"/>
-          </a:xfrm>
-          <a:prstGeom prst="ellipse">
-            <a:avLst/>
-          </a:prstGeom>
-          <a:solidFill>
-            <a:schemeClr val="accent1"/>
-          </a:solidFill>
-          <a:ln w="12700">
-            <a:solidFill>
-              <a:schemeClr val="accent1"/>
-            </a:solidFill>
-            <a:prstDash val="solid"/>
-          </a:ln>
-        </p:spPr>
-      </p:sp>
-      <p:sp>
-        <p:nvSpPr>
-          <p:cNvPr id="15" name="Text 13"/>
+          <p:cNvPr id="12" name="Text 10"/>
           <p:cNvSpPr txBox="1"/>
           <p:nvPr/>
         </p:nvSpPr>
         <p:spPr>
           <a:xfrm>
-            <a:off x="6355080" y="1645920"/>
-            <a:ext cx="640080" cy="640080"/>
+            <a:off x="777240" y="2651760"/>
+            <a:ext cx="3108960" cy="365760"/>
           </a:xfrm>
           <a:prstGeom prst="rect">
             <a:avLst/>
@@ -7216,31 +6514,31 @@
           <a:bodyPr wrap="square" lIns="0" tIns="0" rIns="0" bIns="0" rtlCol="0" anchor="ctr"/>
           <a:lstStyle/>
           <a:p>
-            <a:pPr algn="ctr" indent="0" marL="0">
+            <a:pPr indent="0" marL="0">
               <a:buNone/>
             </a:pPr>
             <a:r>
-              <a:rPr lang="en-US" sz="2200" b="1" dirty="0">
-                <a:solidFill>
-                  <a:schemeClr val="bg1"/>
-                </a:solidFill>
-              </a:rPr>
-              <a:t>3</a:t>
-            </a:r>
-            <a:endParaRPr lang="en-US" sz="2200" dirty="0"/>
-          </a:p>
-        </p:txBody>
-      </p:sp>
-      <p:sp>
-        <p:nvSpPr>
-          <p:cNvPr id="16" name="Text 14"/>
+              <a:rPr lang="en-US" sz="1500" b="1" dirty="0">
+                <a:solidFill>
+                  <a:schemeClr val="tx2"/>
+                </a:solidFill>
+              </a:rPr>
+              <a:t>Градиентный бустинг</a:t>
+            </a:r>
+            <a:endParaRPr lang="en-US" sz="1500" dirty="0"/>
+          </a:p>
+        </p:txBody>
+      </p:sp>
+      <p:sp>
+        <p:nvSpPr>
+          <p:cNvPr id="13" name="Text 11"/>
           <p:cNvSpPr txBox="1"/>
           <p:nvPr/>
         </p:nvSpPr>
         <p:spPr>
           <a:xfrm>
-            <a:off x="6355080" y="2468880"/>
-            <a:ext cx="2148840" cy="411480"/>
+            <a:off x="777240" y="3035808"/>
+            <a:ext cx="3337560" cy="502920"/>
           </a:xfrm>
           <a:prstGeom prst="rect">
             <a:avLst/>
@@ -7249,34 +6547,34 @@
           <a:ln/>
         </p:spPr>
         <p:txBody>
-          <a:bodyPr wrap="square" lIns="0" tIns="0" rIns="0" bIns="0" rtlCol="0" anchor="ctr"/>
+          <a:bodyPr wrap="square" lIns="0" tIns="0" rIns="0" bIns="0" rtlCol="0" anchor="t"/>
           <a:lstStyle/>
           <a:p>
             <a:pPr indent="0" marL="0">
               <a:buNone/>
             </a:pPr>
             <a:r>
-              <a:rPr lang="en-US" sz="1700" b="1" dirty="0">
-                <a:solidFill>
-                  <a:schemeClr val="tx2"/>
-                </a:solidFill>
-              </a:rPr>
-              <a:t>Медиация</a:t>
-            </a:r>
-            <a:endParaRPr lang="en-US" sz="1700" dirty="0"/>
-          </a:p>
-        </p:txBody>
-      </p:sp>
-      <p:sp>
-        <p:nvSpPr>
-          <p:cNvPr id="17" name="Text 15"/>
+              <a:rPr lang="en-US" sz="1200" dirty="0">
+                <a:solidFill>
+                  <a:schemeClr val="tx1"/>
+                </a:solidFill>
+              </a:rPr>
+              <a:t>5-fold CV AUC, перестановочная важность, нелинейности</a:t>
+            </a:r>
+            <a:endParaRPr lang="en-US" sz="1200" dirty="0"/>
+          </a:p>
+        </p:txBody>
+      </p:sp>
+      <p:sp>
+        <p:nvSpPr>
+          <p:cNvPr id="14" name="Text 12"/>
           <p:cNvSpPr txBox="1"/>
           <p:nvPr/>
         </p:nvSpPr>
         <p:spPr>
           <a:xfrm>
-            <a:off x="6355080" y="2926080"/>
-            <a:ext cx="2148840" cy="1463040"/>
+            <a:off x="4160520" y="2651760"/>
+            <a:ext cx="1645920" cy="822960"/>
           </a:xfrm>
           <a:prstGeom prst="rect">
             <a:avLst/>
@@ -7285,38 +6583,38 @@
           <a:ln/>
         </p:spPr>
         <p:txBody>
-          <a:bodyPr wrap="square" lIns="0" tIns="0" rIns="0" bIns="0" rtlCol="0" anchor="t"/>
-          <a:lstStyle/>
-          <a:p>
-            <a:pPr indent="0" marL="0">
+          <a:bodyPr wrap="square" lIns="0" tIns="0" rIns="0" bIns="0" rtlCol="0" anchor="ctr"/>
+          <a:lstStyle/>
+          <a:p>
+            <a:pPr algn="r" indent="0" marL="0">
               <a:buNone/>
             </a:pPr>
             <a:r>
-              <a:rPr lang="en-US" sz="1400" dirty="0">
-                <a:solidFill>
-                  <a:schemeClr val="tx1"/>
-                </a:solidFill>
-              </a:rPr>
-              <a:t>Руководитель / среда → PHQ-8 → намерение уйти. Бутстрэп 500 повторов, 95% ДИ</a:t>
-            </a:r>
-            <a:endParaRPr lang="en-US" sz="1400" dirty="0"/>
-          </a:p>
-        </p:txBody>
-      </p:sp>
-      <p:sp>
-        <p:nvSpPr>
-          <p:cNvPr id="18" name="card"/>
+              <a:rPr lang="en-US" sz="1300" b="1" i="1" dirty="0">
+                <a:solidFill>
+                  <a:schemeClr val="accent1"/>
+                </a:solidFill>
+              </a:rPr>
+              <a:t>Предсказуемо ли?</a:t>
+            </a:r>
+            <a:endParaRPr lang="en-US" sz="1300" dirty="0"/>
+          </a:p>
+        </p:txBody>
+      </p:sp>
+      <p:sp>
+        <p:nvSpPr>
+          <p:cNvPr id="15" name="card"/>
           <p:cNvSpPr/>
           <p:nvPr/>
         </p:nvSpPr>
         <p:spPr>
           <a:xfrm>
-            <a:off x="8915400" y="1417320"/>
-            <a:ext cx="2560320" cy="3108960"/>
+            <a:off x="6172200" y="2532888"/>
+            <a:ext cx="5440680" cy="1069848"/>
           </a:xfrm>
           <a:prstGeom prst="roundRect">
             <a:avLst>
-              <a:gd name="adj" fmla="val 2857"/>
+              <a:gd name="adj" fmla="val 6838"/>
             </a:avLst>
           </a:prstGeom>
           <a:solidFill>
@@ -7332,24 +6630,134 @@
       </p:sp>
       <p:sp>
         <p:nvSpPr>
-          <p:cNvPr id="19" name="Shape 17"/>
+          <p:cNvPr id="16" name="Text 14"/>
+          <p:cNvSpPr txBox="1"/>
+          <p:nvPr/>
+        </p:nvSpPr>
+        <p:spPr>
+          <a:xfrm>
+            <a:off x="6400800" y="2651760"/>
+            <a:ext cx="3108960" cy="365760"/>
+          </a:xfrm>
+          <a:prstGeom prst="rect">
+            <a:avLst/>
+          </a:prstGeom>
+          <a:noFill/>
+          <a:ln/>
+        </p:spPr>
+        <p:txBody>
+          <a:bodyPr wrap="square" lIns="0" tIns="0" rIns="0" bIns="0" rtlCol="0" anchor="ctr"/>
+          <a:lstStyle/>
+          <a:p>
+            <a:pPr indent="0" marL="0">
+              <a:buNone/>
+            </a:pPr>
+            <a:r>
+              <a:rPr lang="en-US" sz="1500" b="1" dirty="0">
+                <a:solidFill>
+                  <a:schemeClr val="tx2"/>
+                </a:solidFill>
+              </a:rPr>
+              <a:t>Кластеризация k-means</a:t>
+            </a:r>
+            <a:endParaRPr lang="en-US" sz="1500" dirty="0"/>
+          </a:p>
+        </p:txBody>
+      </p:sp>
+      <p:sp>
+        <p:nvSpPr>
+          <p:cNvPr id="17" name="Text 15"/>
+          <p:cNvSpPr txBox="1"/>
+          <p:nvPr/>
+        </p:nvSpPr>
+        <p:spPr>
+          <a:xfrm>
+            <a:off x="6400800" y="3035808"/>
+            <a:ext cx="3337560" cy="502920"/>
+          </a:xfrm>
+          <a:prstGeom prst="rect">
+            <a:avLst/>
+          </a:prstGeom>
+          <a:noFill/>
+          <a:ln/>
+        </p:spPr>
+        <p:txBody>
+          <a:bodyPr wrap="square" lIns="0" tIns="0" rIns="0" bIns="0" rtlCol="0" anchor="t"/>
+          <a:lstStyle/>
+          <a:p>
+            <a:pPr indent="0" marL="0">
+              <a:buNone/>
+            </a:pPr>
+            <a:r>
+              <a:rPr lang="en-US" sz="1200" dirty="0">
+                <a:solidFill>
+                  <a:schemeClr val="tx1"/>
+                </a:solidFill>
+              </a:rPr>
+              <a:t>типы аспирантов по руководителю, среде, PHQ-8, интересу</a:t>
+            </a:r>
+            <a:endParaRPr lang="en-US" sz="1200" dirty="0"/>
+          </a:p>
+        </p:txBody>
+      </p:sp>
+      <p:sp>
+        <p:nvSpPr>
+          <p:cNvPr id="18" name="Text 16"/>
+          <p:cNvSpPr txBox="1"/>
+          <p:nvPr/>
+        </p:nvSpPr>
+        <p:spPr>
+          <a:xfrm>
+            <a:off x="9784080" y="2651760"/>
+            <a:ext cx="1645920" cy="822960"/>
+          </a:xfrm>
+          <a:prstGeom prst="rect">
+            <a:avLst/>
+          </a:prstGeom>
+          <a:noFill/>
+          <a:ln/>
+        </p:spPr>
+        <p:txBody>
+          <a:bodyPr wrap="square" lIns="0" tIns="0" rIns="0" bIns="0" rtlCol="0" anchor="ctr"/>
+          <a:lstStyle/>
+          <a:p>
+            <a:pPr algn="r" indent="0" marL="0">
+              <a:buNone/>
+            </a:pPr>
+            <a:r>
+              <a:rPr lang="en-US" sz="1300" b="1" i="1" dirty="0">
+                <a:solidFill>
+                  <a:schemeClr val="accent1"/>
+                </a:solidFill>
+              </a:rPr>
+              <a:t>Кто в группе риска?</a:t>
+            </a:r>
+            <a:endParaRPr lang="en-US" sz="1300" dirty="0"/>
+          </a:p>
+        </p:txBody>
+      </p:sp>
+      <p:sp>
+        <p:nvSpPr>
+          <p:cNvPr id="19" name="card"/>
           <p:cNvSpPr/>
           <p:nvPr/>
         </p:nvSpPr>
         <p:spPr>
           <a:xfrm>
-            <a:off x="9144000" y="1645920"/>
-            <a:ext cx="640080" cy="640080"/>
-          </a:xfrm>
-          <a:prstGeom prst="ellipse">
-            <a:avLst/>
+            <a:off x="548640" y="3739896"/>
+            <a:ext cx="5440680" cy="1069848"/>
+          </a:xfrm>
+          <a:prstGeom prst="roundRect">
+            <a:avLst>
+              <a:gd name="adj" fmla="val 6838"/>
+            </a:avLst>
           </a:prstGeom>
           <a:solidFill>
-            <a:schemeClr val="accent1"/>
+            <a:schemeClr val="bg2"/>
           </a:solidFill>
           <a:ln w="12700">
             <a:solidFill>
-              <a:schemeClr val="accent1"/>
+              <a:schemeClr val="bg2"/>
             </a:solidFill>
             <a:prstDash val="solid"/>
           </a:ln>
@@ -7363,8 +6771,8 @@
         </p:nvSpPr>
         <p:spPr>
           <a:xfrm>
-            <a:off x="9144000" y="1645920"/>
-            <a:ext cx="640080" cy="640080"/>
+            <a:off x="777240" y="3858768"/>
+            <a:ext cx="3108960" cy="365760"/>
           </a:xfrm>
           <a:prstGeom prst="rect">
             <a:avLst/>
@@ -7376,18 +6784,18 @@
           <a:bodyPr wrap="square" lIns="0" tIns="0" rIns="0" bIns="0" rtlCol="0" anchor="ctr"/>
           <a:lstStyle/>
           <a:p>
-            <a:pPr algn="ctr" indent="0" marL="0">
+            <a:pPr indent="0" marL="0">
               <a:buNone/>
             </a:pPr>
             <a:r>
-              <a:rPr lang="en-US" sz="2200" b="1" dirty="0">
-                <a:solidFill>
-                  <a:schemeClr val="bg1"/>
-                </a:solidFill>
-              </a:rPr>
-              <a:t>4</a:t>
-            </a:r>
-            <a:endParaRPr lang="en-US" sz="2200" dirty="0"/>
+              <a:rPr lang="en-US" sz="1500" b="1" dirty="0">
+                <a:solidFill>
+                  <a:schemeClr val="tx2"/>
+                </a:solidFill>
+              </a:rPr>
+              <a:t>Медиация и модерация</a:t>
+            </a:r>
+            <a:endParaRPr lang="en-US" sz="1500" dirty="0"/>
           </a:p>
         </p:txBody>
       </p:sp>
@@ -7399,8 +6807,8 @@
         </p:nvSpPr>
         <p:spPr>
           <a:xfrm>
-            <a:off x="9144000" y="2468880"/>
-            <a:ext cx="2148840" cy="411480"/>
+            <a:off x="777240" y="4242816"/>
+            <a:ext cx="3337560" cy="502920"/>
           </a:xfrm>
           <a:prstGeom prst="rect">
             <a:avLst/>
@@ -7409,21 +6817,21 @@
           <a:ln/>
         </p:spPr>
         <p:txBody>
-          <a:bodyPr wrap="square" lIns="0" tIns="0" rIns="0" bIns="0" rtlCol="0" anchor="ctr"/>
+          <a:bodyPr wrap="square" lIns="0" tIns="0" rIns="0" bIns="0" rtlCol="0" anchor="t"/>
           <a:lstStyle/>
           <a:p>
             <a:pPr indent="0" marL="0">
               <a:buNone/>
             </a:pPr>
             <a:r>
-              <a:rPr lang="en-US" sz="1700" b="1" dirty="0">
-                <a:solidFill>
-                  <a:schemeClr val="tx2"/>
-                </a:solidFill>
-              </a:rPr>
-              <a:t>Модерация</a:t>
-            </a:r>
-            <a:endParaRPr lang="en-US" sz="1700" dirty="0"/>
+              <a:rPr lang="en-US" sz="1200" dirty="0">
+                <a:solidFill>
+                  <a:schemeClr val="tx1"/>
+                </a:solidFill>
+              </a:rPr>
+              <a:t>бутстрэп косвенного эффекта; принадлежность × работа</a:t>
+            </a:r>
+            <a:endParaRPr lang="en-US" sz="1200" dirty="0"/>
           </a:p>
         </p:txBody>
       </p:sp>
@@ -7435,8 +6843,8 @@
         </p:nvSpPr>
         <p:spPr>
           <a:xfrm>
-            <a:off x="9144000" y="2926080"/>
-            <a:ext cx="2148840" cy="1463040"/>
+            <a:off x="4160520" y="3858768"/>
+            <a:ext cx="1645920" cy="822960"/>
           </a:xfrm>
           <a:prstGeom prst="rect">
             <a:avLst/>
@@ -7445,21 +6853,21 @@
           <a:ln/>
         </p:spPr>
         <p:txBody>
-          <a:bodyPr wrap="square" lIns="0" tIns="0" rIns="0" bIns="0" rtlCol="0" anchor="t"/>
-          <a:lstStyle/>
-          <a:p>
-            <a:pPr indent="0" marL="0">
+          <a:bodyPr wrap="square" lIns="0" tIns="0" rIns="0" bIns="0" rtlCol="0" anchor="ctr"/>
+          <a:lstStyle/>
+          <a:p>
+            <a:pPr algn="r" indent="0" marL="0">
               <a:buNone/>
             </a:pPr>
             <a:r>
-              <a:rPr lang="en-US" sz="1400" dirty="0">
-                <a:solidFill>
-                  <a:schemeClr val="tx1"/>
-                </a:solidFill>
-              </a:rPr>
-              <a:t>Принадлежность × полная занятость вне вуза</a:t>
-            </a:r>
-            <a:endParaRPr lang="en-US" sz="1400" dirty="0"/>
+              <a:rPr lang="en-US" sz="1300" b="1" i="1" dirty="0">
+                <a:solidFill>
+                  <a:schemeClr val="accent1"/>
+                </a:solidFill>
+              </a:rPr>
+              <a:t>Как действует?</a:t>
+            </a:r>
+            <a:endParaRPr lang="en-US" sz="1300" dirty="0"/>
           </a:p>
         </p:txBody>
       </p:sp>
@@ -7471,20 +6879,20 @@
         </p:nvSpPr>
         <p:spPr>
           <a:xfrm>
-            <a:off x="548640" y="4800600"/>
-            <a:ext cx="11094415" cy="1325880"/>
+            <a:off x="6172200" y="3739896"/>
+            <a:ext cx="5440680" cy="1069848"/>
           </a:xfrm>
           <a:prstGeom prst="roundRect">
             <a:avLst>
-              <a:gd name="adj" fmla="val 5517"/>
+              <a:gd name="adj" fmla="val 6838"/>
             </a:avLst>
           </a:prstGeom>
           <a:solidFill>
-            <a:schemeClr val="bg1"/>
+            <a:schemeClr val="bg2"/>
           </a:solidFill>
           <a:ln w="12700">
             <a:solidFill>
-              <a:schemeClr val="bg1"/>
+              <a:schemeClr val="bg2"/>
             </a:solidFill>
             <a:prstDash val="solid"/>
           </a:ln>
@@ -7498,8 +6906,8 @@
         </p:nvSpPr>
         <p:spPr>
           <a:xfrm>
-            <a:off x="640080" y="4846320"/>
-            <a:ext cx="10911535" cy="1188720"/>
+            <a:off x="6400800" y="3858768"/>
+            <a:ext cx="3108960" cy="365760"/>
           </a:xfrm>
           <a:prstGeom prst="rect">
             <a:avLst/>
@@ -7515,47 +6923,221 @@
               <a:buNone/>
             </a:pPr>
             <a:r>
-              <a:rPr lang="en-US" sz="1400" b="1" dirty="0">
-                <a:solidFill>
-                  <a:schemeClr val="tx1"/>
-                </a:solidFill>
-              </a:rPr>
-              <a:t>Выборка для моделей: </a:t>
-            </a:r>
+              <a:rPr lang="en-US" sz="1500" b="1" dirty="0">
+                <a:solidFill>
+                  <a:schemeClr val="tx2"/>
+                </a:solidFill>
+              </a:rPr>
+              <a:t>Многоуровневая модель</a:t>
+            </a:r>
+            <a:endParaRPr lang="en-US" sz="1500" dirty="0"/>
+          </a:p>
+        </p:txBody>
+      </p:sp>
+      <p:sp>
+        <p:nvSpPr>
+          <p:cNvPr id="25" name="Text 23"/>
+          <p:cNvSpPr txBox="1"/>
+          <p:nvPr/>
+        </p:nvSpPr>
+        <p:spPr>
+          <a:xfrm>
+            <a:off x="6400800" y="4242816"/>
+            <a:ext cx="3337560" cy="502920"/>
+          </a:xfrm>
+          <a:prstGeom prst="rect">
+            <a:avLst/>
+          </a:prstGeom>
+          <a:noFill/>
+          <a:ln/>
+        </p:spPr>
+        <p:txBody>
+          <a:bodyPr wrap="square" lIns="0" tIns="0" rIns="0" bIns="0" rtlCol="0" anchor="t"/>
+          <a:lstStyle/>
+          <a:p>
             <a:pPr indent="0" marL="0">
               <a:buNone/>
             </a:pPr>
             <a:r>
-              <a:rPr lang="en-US" sz="1400" dirty="0">
+              <a:rPr lang="en-US" sz="1200" dirty="0">
                 <a:solidFill>
                   <a:schemeClr val="tx1"/>
                 </a:solidFill>
               </a:rPr>
-              <a:t>4 344 аспирантов с полными ответами (87% от массива). </a:t>
-            </a:r>
+              <a:t>вузы как уровень 2 + показатели МЭВ</a:t>
+            </a:r>
+            <a:endParaRPr lang="en-US" sz="1200" dirty="0"/>
+          </a:p>
+        </p:txBody>
+      </p:sp>
+      <p:sp>
+        <p:nvSpPr>
+          <p:cNvPr id="26" name="Text 24"/>
+          <p:cNvSpPr txBox="1"/>
+          <p:nvPr/>
+        </p:nvSpPr>
+        <p:spPr>
+          <a:xfrm>
+            <a:off x="9784080" y="3858768"/>
+            <a:ext cx="1645920" cy="822960"/>
+          </a:xfrm>
+          <a:prstGeom prst="rect">
+            <a:avLst/>
+          </a:prstGeom>
+          <a:noFill/>
+          <a:ln/>
+        </p:spPr>
+        <p:txBody>
+          <a:bodyPr wrap="square" lIns="0" tIns="0" rIns="0" bIns="0" rtlCol="0" anchor="ctr"/>
+          <a:lstStyle/>
+          <a:p>
+            <a:pPr algn="r" indent="0" marL="0">
+              <a:buNone/>
+            </a:pPr>
+            <a:r>
+              <a:rPr lang="en-US" sz="1300" b="1" i="1" dirty="0">
+                <a:solidFill>
+                  <a:schemeClr val="accent1"/>
+                </a:solidFill>
+              </a:rPr>
+              <a:t>Важен ли вуз?</a:t>
+            </a:r>
+            <a:endParaRPr lang="en-US" sz="1300" dirty="0"/>
+          </a:p>
+        </p:txBody>
+      </p:sp>
+      <p:sp>
+        <p:nvSpPr>
+          <p:cNvPr id="27" name="card"/>
+          <p:cNvSpPr/>
+          <p:nvPr/>
+        </p:nvSpPr>
+        <p:spPr>
+          <a:xfrm>
+            <a:off x="548640" y="4946904"/>
+            <a:ext cx="11094415" cy="1069848"/>
+          </a:xfrm>
+          <a:prstGeom prst="roundRect">
+            <a:avLst>
+              <a:gd name="adj" fmla="val 6838"/>
+            </a:avLst>
+          </a:prstGeom>
+          <a:solidFill>
+            <a:schemeClr val="bg2"/>
+          </a:solidFill>
+          <a:ln w="12700">
+            <a:solidFill>
+              <a:schemeClr val="bg2"/>
+            </a:solidFill>
+            <a:prstDash val="solid"/>
+          </a:ln>
+        </p:spPr>
+      </p:sp>
+      <p:sp>
+        <p:nvSpPr>
+          <p:cNvPr id="28" name="Text 26"/>
+          <p:cNvSpPr txBox="1"/>
+          <p:nvPr/>
+        </p:nvSpPr>
+        <p:spPr>
+          <a:xfrm>
+            <a:off x="777240" y="5065776"/>
+            <a:ext cx="3108960" cy="365760"/>
+          </a:xfrm>
+          <a:prstGeom prst="rect">
+            <a:avLst/>
+          </a:prstGeom>
+          <a:noFill/>
+          <a:ln/>
+        </p:spPr>
+        <p:txBody>
+          <a:bodyPr wrap="square" lIns="0" tIns="0" rIns="0" bIns="0" rtlCol="0" anchor="ctr"/>
+          <a:lstStyle/>
+          <a:p>
             <a:pPr indent="0" marL="0">
               <a:buNone/>
             </a:pPr>
             <a:r>
-              <a:rPr lang="en-US" sz="1400" b="1" dirty="0">
-                <a:solidFill>
-                  <a:schemeClr val="tx1"/>
-                </a:solidFill>
-              </a:rPr>
-              <a:t>Предсказательная проверка: </a:t>
-            </a:r>
+              <a:rPr lang="en-US" sz="1500" b="1" dirty="0">
+                <a:solidFill>
+                  <a:schemeClr val="tx2"/>
+                </a:solidFill>
+              </a:rPr>
+              <a:t>G-computation</a:t>
+            </a:r>
+            <a:endParaRPr lang="en-US" sz="1500" dirty="0"/>
+          </a:p>
+        </p:txBody>
+      </p:sp>
+      <p:sp>
+        <p:nvSpPr>
+          <p:cNvPr id="29" name="Text 27"/>
+          <p:cNvSpPr txBox="1"/>
+          <p:nvPr/>
+        </p:nvSpPr>
+        <p:spPr>
+          <a:xfrm>
+            <a:off x="777240" y="5449824"/>
+            <a:ext cx="8991295" cy="502920"/>
+          </a:xfrm>
+          <a:prstGeom prst="rect">
+            <a:avLst/>
+          </a:prstGeom>
+          <a:noFill/>
+          <a:ln/>
+        </p:spPr>
+        <p:txBody>
+          <a:bodyPr wrap="square" lIns="0" tIns="0" rIns="0" bIns="0" rtlCol="0" anchor="t"/>
+          <a:lstStyle/>
+          <a:p>
             <a:pPr indent="0" marL="0">
               <a:buNone/>
             </a:pPr>
             <a:r>
-              <a:rPr lang="en-US" sz="1400" dirty="0">
+              <a:rPr lang="en-US" sz="1200" dirty="0">
                 <a:solidFill>
                   <a:schemeClr val="tx1"/>
                 </a:solidFill>
               </a:rPr>
-              <a:t>5-кратная кросс-валидация, ROC AUC. Непрерывные предикторы стандартизованы (эффект на 1 SD). Python: statsmodels, scikit-learn; код воспроизводим.</a:t>
-            </a:r>
-            <a:endParaRPr lang="en-US" sz="1400" dirty="0"/>
+              <a:t>контрфактические сценарии мер с бутстрэп-ДИ</a:t>
+            </a:r>
+            <a:endParaRPr lang="en-US" sz="1200" dirty="0"/>
+          </a:p>
+        </p:txBody>
+      </p:sp>
+      <p:sp>
+        <p:nvSpPr>
+          <p:cNvPr id="30" name="Text 28"/>
+          <p:cNvSpPr txBox="1"/>
+          <p:nvPr/>
+        </p:nvSpPr>
+        <p:spPr>
+          <a:xfrm>
+            <a:off x="9814255" y="5065776"/>
+            <a:ext cx="1645920" cy="822960"/>
+          </a:xfrm>
+          <a:prstGeom prst="rect">
+            <a:avLst/>
+          </a:prstGeom>
+          <a:noFill/>
+          <a:ln/>
+        </p:spPr>
+        <p:txBody>
+          <a:bodyPr wrap="square" lIns="0" tIns="0" rIns="0" bIns="0" rtlCol="0" anchor="ctr"/>
+          <a:lstStyle/>
+          <a:p>
+            <a:pPr algn="r" indent="0" marL="0">
+              <a:buNone/>
+            </a:pPr>
+            <a:r>
+              <a:rPr lang="en-US" sz="1300" b="1" i="1" dirty="0">
+                <a:solidFill>
+                  <a:schemeClr val="accent1"/>
+                </a:solidFill>
+              </a:rPr>
+              <a:t>Что даст политика?</a:t>
+            </a:r>
+            <a:endParaRPr lang="en-US" sz="1300" dirty="0"/>
           </a:p>
         </p:txBody>
       </p:sp>
@@ -7697,7 +7279,7 @@
                   <a:schemeClr val="tx1"/>
                 </a:solidFill>
               </a:rPr>
-              <a:t>Доля согласных с «Я часто хочу бросить аспирантуру», среднее по выборке 22%. ПД = полный день</a:t>
+              <a:t>Доля согласных с «Я часто хочу бросить аспирантуру» (в среднем 22%). ПД = полный день</a:t>
             </a:r>
             <a:endParaRPr lang="en-US" sz="1600" dirty="0"/>
           </a:p>
@@ -7711,7 +7293,7 @@
         </p:nvGraphicFramePr>
         <p:xfrm>
           <a:off x="548640" y="1783080"/>
-          <a:ext cx="2697480" cy="3749040"/>
+          <a:ext cx="2697480" cy="3520440"/>
         </p:xfrm>
         <a:graphic xmlns:a="http://schemas.openxmlformats.org/drawingml/2006/main">
           <a:graphicData uri="http://schemas.openxmlformats.org/drawingml/2006/chart">
@@ -7727,7 +7309,7 @@
         </p:nvGraphicFramePr>
         <p:xfrm>
           <a:off x="3337560" y="1783080"/>
-          <a:ext cx="2697480" cy="3749040"/>
+          <a:ext cx="2697480" cy="3520440"/>
         </p:xfrm>
         <a:graphic xmlns:a="http://schemas.openxmlformats.org/drawingml/2006/main">
           <a:graphicData uri="http://schemas.openxmlformats.org/drawingml/2006/chart">
@@ -7743,7 +7325,7 @@
         </p:nvGraphicFramePr>
         <p:xfrm>
           <a:off x="6126480" y="1783080"/>
-          <a:ext cx="2697480" cy="3749040"/>
+          <a:ext cx="2697480" cy="3520440"/>
         </p:xfrm>
         <a:graphic xmlns:a="http://schemas.openxmlformats.org/drawingml/2006/main">
           <a:graphicData uri="http://schemas.openxmlformats.org/drawingml/2006/chart">
@@ -7759,7 +7341,7 @@
         </p:nvGraphicFramePr>
         <p:xfrm>
           <a:off x="8915400" y="1783080"/>
-          <a:ext cx="2697480" cy="3749040"/>
+          <a:ext cx="2697480" cy="3520440"/>
         </p:xfrm>
         <a:graphic xmlns:a="http://schemas.openxmlformats.org/drawingml/2006/main">
           <a:graphicData uri="http://schemas.openxmlformats.org/drawingml/2006/chart">
@@ -7769,14 +7351,41 @@
       </p:graphicFrame>
       <p:sp>
         <p:nvSpPr>
-          <p:cNvPr id="8" name="Text 2"/>
+          <p:cNvPr id="8" name="card"/>
+          <p:cNvSpPr/>
+          <p:nvPr/>
+        </p:nvSpPr>
+        <p:spPr>
+          <a:xfrm>
+            <a:off x="548640" y="5440680"/>
+            <a:ext cx="11094415" cy="777240"/>
+          </a:xfrm>
+          <a:prstGeom prst="roundRect">
+            <a:avLst>
+              <a:gd name="adj" fmla="val 9412"/>
+            </a:avLst>
+          </a:prstGeom>
+          <a:solidFill>
+            <a:schemeClr val="bg2"/>
+          </a:solidFill>
+          <a:ln w="12700">
+            <a:solidFill>
+              <a:schemeClr val="bg2"/>
+            </a:solidFill>
+            <a:prstDash val="solid"/>
+          </a:ln>
+        </p:spPr>
+      </p:sp>
+      <p:sp>
+        <p:nvSpPr>
+          <p:cNvPr id="9" name="Text 3"/>
           <p:cNvSpPr txBox="1"/>
           <p:nvPr/>
         </p:nvSpPr>
         <p:spPr>
           <a:xfrm>
-            <a:off x="548640" y="5669280"/>
-            <a:ext cx="11094415" cy="457200"/>
+            <a:off x="777240" y="5532120"/>
+            <a:ext cx="10637215" cy="640080"/>
           </a:xfrm>
           <a:prstGeom prst="rect">
             <a:avLst/>
@@ -7785,32 +7394,38 @@
           <a:ln/>
         </p:spPr>
         <p:txBody>
-          <a:bodyPr wrap="square" lIns="0" tIns="0" rIns="0" bIns="0" rtlCol="0" anchor="ctr"/>
+          <a:bodyPr wrap="square" lIns="0" tIns="0" rIns="0" bIns="0" rtlCol="0" anchor="t"/>
           <a:lstStyle/>
           <a:p>
             <a:pPr indent="0" marL="0">
+              <a:spcAft>
+                <a:spcPts val="600"/>
+              </a:spcAft>
               <a:buNone/>
             </a:pPr>
             <a:r>
-              <a:rPr lang="en-US" sz="1500" b="1" dirty="0">
+              <a:rPr lang="en-US" sz="1400" b="1" dirty="0">
                 <a:solidFill>
                   <a:schemeClr val="tx1"/>
                 </a:solidFill>
               </a:rPr>
-              <a:t>Разброс по типу занятости: </a:t>
+              <a:t>Парадокс: </a:t>
             </a:r>
             <a:pPr indent="0" marL="0">
+              <a:spcAft>
+                <a:spcPts val="600"/>
+              </a:spcAft>
               <a:buNone/>
             </a:pPr>
             <a:r>
-              <a:rPr lang="en-US" sz="1500" dirty="0">
+              <a:rPr lang="en-US" sz="1400" dirty="0">
                 <a:solidFill>
                   <a:schemeClr val="tx1"/>
                 </a:solidFill>
               </a:rPr>
-              <a:t>20–24%. По руководителю: 13–61%, по принадлежности: 10–55%, по PHQ-8: 9–52%.</a:t>
-            </a:r>
-            <a:endParaRPr lang="en-US" sz="1500" dirty="0"/>
+              <a:t>45% называют совмещение с работой серьёзной трудностью, но сам факт работы риск не меняет. Сопоставление по склонности (PSM, 1 971 пар): эффект полного дня вне вуза +0.6 п.п. [-1.7; 3.0]. H1 отвергнута.</a:t>
+            </a:r>
+            <a:endParaRPr lang="en-US" sz="1400" dirty="0"/>
           </a:p>
         </p:txBody>
       </p:sp>
@@ -7916,7 +7531,7 @@
                   <a:schemeClr val="tx2"/>
                 </a:solidFill>
               </a:rPr>
-              <a:t>Работу чаще всего называют трудностью, но сильнее «сигналят» тема и руководитель</a:t>
+              <a:t>Три фактора среды дают две трети объяснённого, занятость менее 2%</a:t>
             </a:r>
             <a:endParaRPr lang="en-US" sz="2600" dirty="0"/>
           </a:p>
@@ -7929,8 +7544,8 @@
           <p:nvPr/>
         </p:nvGraphicFramePr>
         <p:xfrm>
-          <a:off x="548640" y="1325880"/>
-          <a:ext cx="5669280" cy="4206240"/>
+          <a:off x="548640" y="1280160"/>
+          <a:ext cx="5760720" cy="3931920"/>
         </p:xfrm>
         <a:graphic xmlns:a="http://schemas.openxmlformats.org/drawingml/2006/main">
           <a:graphicData uri="http://schemas.openxmlformats.org/drawingml/2006/chart">
@@ -7938,32 +7553,43 @@
           </a:graphicData>
         </a:graphic>
       </p:graphicFrame>
-      <p:graphicFrame>
-        <p:nvGraphicFramePr>
-          <p:cNvPr id="4" name="Chart 1" descr=""/>
-          <p:cNvGraphicFramePr/>
-          <p:nvPr/>
-        </p:nvGraphicFramePr>
-        <p:xfrm>
-          <a:off x="6355080" y="1325880"/>
-          <a:ext cx="5303520" cy="4206240"/>
-        </p:xfrm>
-        <a:graphic xmlns:a="http://schemas.openxmlformats.org/drawingml/2006/main">
-          <a:graphicData uri="http://schemas.openxmlformats.org/drawingml/2006/chart">
-            <c:chart xmlns:c="http://schemas.openxmlformats.org/drawingml/2006/chart" r:id="rId2"/>
-          </a:graphicData>
-        </a:graphic>
-      </p:graphicFrame>
-      <p:sp>
-        <p:nvSpPr>
-          <p:cNvPr id="5" name="Text 1"/>
+      <p:sp>
+        <p:nvSpPr>
+          <p:cNvPr id="4" name="card"/>
+          <p:cNvSpPr/>
+          <p:nvPr/>
+        </p:nvSpPr>
+        <p:spPr>
+          <a:xfrm>
+            <a:off x="6583680" y="1325880"/>
+            <a:ext cx="2377440" cy="1645920"/>
+          </a:xfrm>
+          <a:prstGeom prst="roundRect">
+            <a:avLst>
+              <a:gd name="adj" fmla="val 4444"/>
+            </a:avLst>
+          </a:prstGeom>
+          <a:solidFill>
+            <a:schemeClr val="bg2"/>
+          </a:solidFill>
+          <a:ln w="12700">
+            <a:solidFill>
+              <a:schemeClr val="bg2"/>
+            </a:solidFill>
+            <a:prstDash val="solid"/>
+          </a:ln>
+        </p:spPr>
+      </p:sp>
+      <p:sp>
+        <p:nvSpPr>
+          <p:cNvPr id="5" name="Text 2"/>
           <p:cNvSpPr txBox="1"/>
           <p:nvPr/>
         </p:nvSpPr>
         <p:spPr>
           <a:xfrm>
-            <a:off x="548640" y="5623560"/>
-            <a:ext cx="11094415" cy="685800"/>
+            <a:off x="6766560" y="1463040"/>
+            <a:ext cx="2011680" cy="640080"/>
           </a:xfrm>
           <a:prstGeom prst="rect">
             <a:avLst/>
@@ -7972,32 +7598,463 @@
           <a:ln/>
         </p:spPr>
         <p:txBody>
-          <a:bodyPr wrap="square" lIns="0" tIns="0" rIns="0" bIns="0" rtlCol="0" anchor="t"/>
+          <a:bodyPr wrap="square" lIns="0" tIns="0" rIns="0" bIns="0" rtlCol="0" anchor="ctr"/>
           <a:lstStyle/>
           <a:p>
             <a:pPr indent="0" marL="0">
               <a:buNone/>
             </a:pPr>
             <a:r>
-              <a:rPr lang="en-US" sz="1400" b="1" dirty="0">
-                <a:solidFill>
-                  <a:schemeClr val="tx1"/>
-                </a:solidFill>
-              </a:rPr>
-              <a:t>Вывод: </a:t>
-            </a:r>
+              <a:rPr lang="en-US" sz="3000" b="1" dirty="0">
+                <a:solidFill>
+                  <a:schemeClr val="accent2"/>
+                </a:solidFill>
+              </a:rPr>
+              <a:t>×1.82</a:t>
+            </a:r>
+            <a:endParaRPr lang="en-US" sz="3000" dirty="0"/>
+          </a:p>
+        </p:txBody>
+      </p:sp>
+      <p:sp>
+        <p:nvSpPr>
+          <p:cNvPr id="6" name="Text 3"/>
+          <p:cNvSpPr txBox="1"/>
+          <p:nvPr/>
+        </p:nvSpPr>
+        <p:spPr>
+          <a:xfrm>
+            <a:off x="6766560" y="2148840"/>
+            <a:ext cx="2057400" cy="731520"/>
+          </a:xfrm>
+          <a:prstGeom prst="rect">
+            <a:avLst/>
+          </a:prstGeom>
+          <a:noFill/>
+          <a:ln/>
+        </p:spPr>
+        <p:txBody>
+          <a:bodyPr wrap="square" lIns="0" tIns="0" rIns="0" bIns="0" rtlCol="0" anchor="t"/>
+          <a:lstStyle/>
+          <a:p>
             <a:pPr indent="0" marL="0">
               <a:buNone/>
             </a:pPr>
             <a:r>
-              <a:rPr lang="en-US" sz="1400" dirty="0">
+              <a:rPr lang="en-US" sz="1200" dirty="0">
                 <a:solidFill>
                   <a:schemeClr val="tx1"/>
                 </a:solidFill>
               </a:rPr>
-              <a:t>совмещение с работой отмечают 45%, но сам факт работы риск не повышает (слайд 5). Опасна не работа, а её восприятие как конфликта. Потеря интереса к теме встречается у 12%, но среди них хотят уйти 71%.</a:t>
-            </a:r>
-            <a:endParaRPr lang="en-US" sz="1400" dirty="0"/>
+              <a:t>шансы на +1 SD депрессивных симптомов</a:t>
+            </a:r>
+            <a:endParaRPr lang="en-US" sz="1200" dirty="0"/>
+          </a:p>
+        </p:txBody>
+      </p:sp>
+      <p:sp>
+        <p:nvSpPr>
+          <p:cNvPr id="7" name="card"/>
+          <p:cNvSpPr/>
+          <p:nvPr/>
+        </p:nvSpPr>
+        <p:spPr>
+          <a:xfrm>
+            <a:off x="9144000" y="1325880"/>
+            <a:ext cx="2377440" cy="1645920"/>
+          </a:xfrm>
+          <a:prstGeom prst="roundRect">
+            <a:avLst>
+              <a:gd name="adj" fmla="val 4444"/>
+            </a:avLst>
+          </a:prstGeom>
+          <a:solidFill>
+            <a:schemeClr val="bg2"/>
+          </a:solidFill>
+          <a:ln w="12700">
+            <a:solidFill>
+              <a:schemeClr val="bg2"/>
+            </a:solidFill>
+            <a:prstDash val="solid"/>
+          </a:ln>
+        </p:spPr>
+      </p:sp>
+      <p:sp>
+        <p:nvSpPr>
+          <p:cNvPr id="8" name="Text 5"/>
+          <p:cNvSpPr txBox="1"/>
+          <p:nvPr/>
+        </p:nvSpPr>
+        <p:spPr>
+          <a:xfrm>
+            <a:off x="9326880" y="1463040"/>
+            <a:ext cx="2011680" cy="640080"/>
+          </a:xfrm>
+          <a:prstGeom prst="rect">
+            <a:avLst/>
+          </a:prstGeom>
+          <a:noFill/>
+          <a:ln/>
+        </p:spPr>
+        <p:txBody>
+          <a:bodyPr wrap="square" lIns="0" tIns="0" rIns="0" bIns="0" rtlCol="0" anchor="ctr"/>
+          <a:lstStyle/>
+          <a:p>
+            <a:pPr indent="0" marL="0">
+              <a:buNone/>
+            </a:pPr>
+            <a:r>
+              <a:rPr lang="en-US" sz="3000" b="1" dirty="0">
+                <a:solidFill>
+                  <a:schemeClr val="accent1"/>
+                </a:solidFill>
+              </a:rPr>
+              <a:t>×0.60</a:t>
+            </a:r>
+            <a:endParaRPr lang="en-US" sz="3000" dirty="0"/>
+          </a:p>
+        </p:txBody>
+      </p:sp>
+      <p:sp>
+        <p:nvSpPr>
+          <p:cNvPr id="9" name="Text 6"/>
+          <p:cNvSpPr txBox="1"/>
+          <p:nvPr/>
+        </p:nvSpPr>
+        <p:spPr>
+          <a:xfrm>
+            <a:off x="9326880" y="2148840"/>
+            <a:ext cx="2057400" cy="731520"/>
+          </a:xfrm>
+          <a:prstGeom prst="rect">
+            <a:avLst/>
+          </a:prstGeom>
+          <a:noFill/>
+          <a:ln/>
+        </p:spPr>
+        <p:txBody>
+          <a:bodyPr wrap="square" lIns="0" tIns="0" rIns="0" bIns="0" rtlCol="0" anchor="t"/>
+          <a:lstStyle/>
+          <a:p>
+            <a:pPr indent="0" marL="0">
+              <a:buNone/>
+            </a:pPr>
+            <a:r>
+              <a:rPr lang="en-US" sz="1200" dirty="0">
+                <a:solidFill>
+                  <a:schemeClr val="tx1"/>
+                </a:solidFill>
+              </a:rPr>
+              <a:t>на +1 SD принадлежности к кафедре</a:t>
+            </a:r>
+            <a:endParaRPr lang="en-US" sz="1200" dirty="0"/>
+          </a:p>
+        </p:txBody>
+      </p:sp>
+      <p:sp>
+        <p:nvSpPr>
+          <p:cNvPr id="10" name="card"/>
+          <p:cNvSpPr/>
+          <p:nvPr/>
+        </p:nvSpPr>
+        <p:spPr>
+          <a:xfrm>
+            <a:off x="6583680" y="3154680"/>
+            <a:ext cx="2377440" cy="1645920"/>
+          </a:xfrm>
+          <a:prstGeom prst="roundRect">
+            <a:avLst>
+              <a:gd name="adj" fmla="val 4444"/>
+            </a:avLst>
+          </a:prstGeom>
+          <a:solidFill>
+            <a:schemeClr val="bg2"/>
+          </a:solidFill>
+          <a:ln w="12700">
+            <a:solidFill>
+              <a:schemeClr val="bg2"/>
+            </a:solidFill>
+            <a:prstDash val="solid"/>
+          </a:ln>
+        </p:spPr>
+      </p:sp>
+      <p:sp>
+        <p:nvSpPr>
+          <p:cNvPr id="11" name="Text 8"/>
+          <p:cNvSpPr txBox="1"/>
+          <p:nvPr/>
+        </p:nvSpPr>
+        <p:spPr>
+          <a:xfrm>
+            <a:off x="6766560" y="3291840"/>
+            <a:ext cx="2011680" cy="640080"/>
+          </a:xfrm>
+          <a:prstGeom prst="rect">
+            <a:avLst/>
+          </a:prstGeom>
+          <a:noFill/>
+          <a:ln/>
+        </p:spPr>
+        <p:txBody>
+          <a:bodyPr wrap="square" lIns="0" tIns="0" rIns="0" bIns="0" rtlCol="0" anchor="ctr"/>
+          <a:lstStyle/>
+          <a:p>
+            <a:pPr indent="0" marL="0">
+              <a:buNone/>
+            </a:pPr>
+            <a:r>
+              <a:rPr lang="en-US" sz="3000" b="1" dirty="0">
+                <a:solidFill>
+                  <a:schemeClr val="accent1"/>
+                </a:solidFill>
+              </a:rPr>
+              <a:t>×0.75</a:t>
+            </a:r>
+            <a:endParaRPr lang="en-US" sz="3000" dirty="0"/>
+          </a:p>
+        </p:txBody>
+      </p:sp>
+      <p:sp>
+        <p:nvSpPr>
+          <p:cNvPr id="12" name="Text 9"/>
+          <p:cNvSpPr txBox="1"/>
+          <p:nvPr/>
+        </p:nvSpPr>
+        <p:spPr>
+          <a:xfrm>
+            <a:off x="6766560" y="3977640"/>
+            <a:ext cx="2057400" cy="731520"/>
+          </a:xfrm>
+          <a:prstGeom prst="rect">
+            <a:avLst/>
+          </a:prstGeom>
+          <a:noFill/>
+          <a:ln/>
+        </p:spPr>
+        <p:txBody>
+          <a:bodyPr wrap="square" lIns="0" tIns="0" rIns="0" bIns="0" rtlCol="0" anchor="t"/>
+          <a:lstStyle/>
+          <a:p>
+            <a:pPr indent="0" marL="0">
+              <a:buNone/>
+            </a:pPr>
+            <a:r>
+              <a:rPr lang="en-US" sz="1200" dirty="0">
+                <a:solidFill>
+                  <a:schemeClr val="tx1"/>
+                </a:solidFill>
+              </a:rPr>
+              <a:t>на +1 SD удовлетворённости руководителем</a:t>
+            </a:r>
+            <a:endParaRPr lang="en-US" sz="1200" dirty="0"/>
+          </a:p>
+        </p:txBody>
+      </p:sp>
+      <p:sp>
+        <p:nvSpPr>
+          <p:cNvPr id="13" name="card"/>
+          <p:cNvSpPr/>
+          <p:nvPr/>
+        </p:nvSpPr>
+        <p:spPr>
+          <a:xfrm>
+            <a:off x="9144000" y="3154680"/>
+            <a:ext cx="2377440" cy="1645920"/>
+          </a:xfrm>
+          <a:prstGeom prst="roundRect">
+            <a:avLst>
+              <a:gd name="adj" fmla="val 4444"/>
+            </a:avLst>
+          </a:prstGeom>
+          <a:solidFill>
+            <a:schemeClr val="bg2"/>
+          </a:solidFill>
+          <a:ln w="12700">
+            <a:solidFill>
+              <a:schemeClr val="bg2"/>
+            </a:solidFill>
+            <a:prstDash val="solid"/>
+          </a:ln>
+        </p:spPr>
+      </p:sp>
+      <p:sp>
+        <p:nvSpPr>
+          <p:cNvPr id="14" name="Text 11"/>
+          <p:cNvSpPr txBox="1"/>
+          <p:nvPr/>
+        </p:nvSpPr>
+        <p:spPr>
+          <a:xfrm>
+            <a:off x="9326880" y="3291840"/>
+            <a:ext cx="2011680" cy="640080"/>
+          </a:xfrm>
+          <a:prstGeom prst="rect">
+            <a:avLst/>
+          </a:prstGeom>
+          <a:noFill/>
+          <a:ln/>
+        </p:spPr>
+        <p:txBody>
+          <a:bodyPr wrap="square" lIns="0" tIns="0" rIns="0" bIns="0" rtlCol="0" anchor="ctr"/>
+          <a:lstStyle/>
+          <a:p>
+            <a:pPr indent="0" marL="0">
+              <a:buNone/>
+            </a:pPr>
+            <a:r>
+              <a:rPr lang="en-US" sz="3000" b="1" dirty="0">
+                <a:solidFill>
+                  <a:schemeClr val="tx2"/>
+                </a:solidFill>
+              </a:rPr>
+              <a:t>×0.96</a:t>
+            </a:r>
+            <a:endParaRPr lang="en-US" sz="3000" dirty="0"/>
+          </a:p>
+        </p:txBody>
+      </p:sp>
+      <p:sp>
+        <p:nvSpPr>
+          <p:cNvPr id="15" name="Text 12"/>
+          <p:cNvSpPr txBox="1"/>
+          <p:nvPr/>
+        </p:nvSpPr>
+        <p:spPr>
+          <a:xfrm>
+            <a:off x="9326880" y="3977640"/>
+            <a:ext cx="2057400" cy="731520"/>
+          </a:xfrm>
+          <a:prstGeom prst="rect">
+            <a:avLst/>
+          </a:prstGeom>
+          <a:noFill/>
+          <a:ln/>
+        </p:spPr>
+        <p:txBody>
+          <a:bodyPr wrap="square" lIns="0" tIns="0" rIns="0" bIns="0" rtlCol="0" anchor="t"/>
+          <a:lstStyle/>
+          <a:p>
+            <a:pPr indent="0" marL="0">
+              <a:buNone/>
+            </a:pPr>
+            <a:r>
+              <a:rPr lang="en-US" sz="1200" dirty="0">
+                <a:solidFill>
+                  <a:schemeClr val="tx1"/>
+                </a:solidFill>
+              </a:rPr>
+              <a:t>полный день вне вуза, p = 0.79</a:t>
+            </a:r>
+            <a:endParaRPr lang="en-US" sz="1200" dirty="0"/>
+          </a:p>
+        </p:txBody>
+      </p:sp>
+      <p:sp>
+        <p:nvSpPr>
+          <p:cNvPr id="16" name="Text 13"/>
+          <p:cNvSpPr txBox="1"/>
+          <p:nvPr/>
+        </p:nvSpPr>
+        <p:spPr>
+          <a:xfrm>
+            <a:off x="548640" y="5349240"/>
+            <a:ext cx="11094415" cy="914400"/>
+          </a:xfrm>
+          <a:prstGeom prst="rect">
+            <a:avLst/>
+          </a:prstGeom>
+          <a:noFill/>
+          <a:ln/>
+        </p:spPr>
+        <p:txBody>
+          <a:bodyPr wrap="square" lIns="0" tIns="0" rIns="0" bIns="0" rtlCol="0" anchor="t"/>
+          <a:lstStyle/>
+          <a:p>
+            <a:pPr indent="0" marL="0">
+              <a:spcAft>
+                <a:spcPts val="600"/>
+              </a:spcAft>
+              <a:buNone/>
+            </a:pPr>
+            <a:r>
+              <a:rPr lang="en-US" sz="1300" b="1" dirty="0">
+                <a:solidFill>
+                  <a:schemeClr val="tx1"/>
+                </a:solidFill>
+              </a:rPr>
+              <a:t>Предсказательная сила: </a:t>
+            </a:r>
+            <a:pPr indent="0" marL="0">
+              <a:spcAft>
+                <a:spcPts val="600"/>
+              </a:spcAft>
+              <a:buNone/>
+            </a:pPr>
+            <a:r>
+              <a:rPr lang="en-US" sz="1300" dirty="0">
+                <a:solidFill>
+                  <a:schemeClr val="tx1"/>
+                </a:solidFill>
+              </a:rPr>
+              <a:t>логит AUC 0.83, бустинг 0.82 (5-fold CV) против 0.61 только на внешних факторах. </a:t>
+            </a:r>
+            <a:pPr indent="0" marL="0">
+              <a:spcAft>
+                <a:spcPts val="600"/>
+              </a:spcAft>
+              <a:buNone/>
+            </a:pPr>
+            <a:r>
+              <a:rPr lang="en-US" sz="1300" b="1" dirty="0">
+                <a:solidFill>
+                  <a:schemeClr val="tx1"/>
+                </a:solidFill>
+              </a:rPr>
+              <a:t>Скрининг: </a:t>
+            </a:r>
+            <a:pPr indent="0" marL="0">
+              <a:spcAft>
+                <a:spcPts val="600"/>
+              </a:spcAft>
+              <a:buNone/>
+            </a:pPr>
+            <a:r>
+              <a:rPr lang="en-US" sz="1300" dirty="0">
+                <a:solidFill>
+                  <a:schemeClr val="tx1"/>
+                </a:solidFill>
+              </a:rPr>
+              <a:t>20% аспирантов с наибольшим риском покрывают 55% всех, кто хочет уйти. </a:t>
+            </a:r>
+            <a:pPr indent="0" marL="0">
+              <a:spcAft>
+                <a:spcPts val="600"/>
+              </a:spcAft>
+              <a:buNone/>
+            </a:pPr>
+            <a:r>
+              <a:rPr lang="en-US" sz="1300" b="1" dirty="0">
+                <a:solidFill>
+                  <a:schemeClr val="tx1"/>
+                </a:solidFill>
+              </a:rPr>
+              <a:t>Устойчивость: </a:t>
+            </a:r>
+            <a:pPr indent="0" marL="0">
+              <a:spcAft>
+                <a:spcPts val="600"/>
+              </a:spcAft>
+              <a:buNone/>
+            </a:pPr>
+            <a:r>
+              <a:rPr lang="en-US" sz="1300" dirty="0">
+                <a:solidFill>
+                  <a:schemeClr val="tx1"/>
+                </a:solidFill>
+              </a:rPr>
+              <a:t>E-value для PHQ-8 2.0, для принадлежности 1.9: скрытый конфаундер должен быть сильным, чтобы обнулить связь.</a:t>
+            </a:r>
+            <a:endParaRPr lang="en-US" sz="1300" dirty="0"/>
           </a:p>
         </p:txBody>
       </p:sp>
@@ -8103,7 +8160,7 @@
                   <a:schemeClr val="tx2"/>
                 </a:solidFill>
               </a:rPr>
-              <a:t>При прочих равных: руководитель, среда и здоровье значимы, тип работы нет</a:t>
+              <a:t>Четыре типа аспирантов: риск различается в 11 раз, а доля работающих почти одинакова</a:t>
             </a:r>
             <a:endParaRPr lang="en-US" sz="2600" dirty="0"/>
           </a:p>
@@ -8111,7 +8168,7 @@
       </p:sp>
       <p:pic>
         <p:nvPicPr>
-          <p:cNvPr id="3" name="Image 0" descr="/home/user/khakatonIVO/output/figures/03_forest.png">    </p:cNvPr>
+          <p:cNvPr id="3" name="Image 0" descr="/home/user/khakatonIVO/output/figures/08_profiles.png">    </p:cNvPr>
           <p:cNvPicPr>
             <a:picLocks noChangeAspect="1"/>
           </p:cNvPicPr>
@@ -8126,7 +8183,7 @@
         <p:spPr>
           <a:xfrm>
             <a:off x="548640" y="1280160"/>
-            <a:ext cx="6949440" cy="3359903"/>
+            <a:ext cx="6583680" cy="3950208"/>
           </a:xfrm>
           <a:prstGeom prst="rect">
             <a:avLst/>
@@ -8141,12 +8198,12 @@
         </p:nvSpPr>
         <p:spPr>
           <a:xfrm>
-            <a:off x="7818120" y="1325880"/>
-            <a:ext cx="3840480" cy="4800600"/>
+            <a:off x="7406640" y="1325880"/>
+            <a:ext cx="4251960" cy="1069848"/>
           </a:xfrm>
           <a:prstGeom prst="roundRect">
             <a:avLst>
-              <a:gd name="adj" fmla="val 1905"/>
+              <a:gd name="adj" fmla="val 6838"/>
             </a:avLst>
           </a:prstGeom>
           <a:solidFill>
@@ -8162,14 +8219,39 @@
       </p:sp>
       <p:sp>
         <p:nvSpPr>
-          <p:cNvPr id="5" name="Text 2"/>
+          <p:cNvPr id="5" name="Shape 2"/>
+          <p:cNvSpPr/>
+          <p:nvPr/>
+        </p:nvSpPr>
+        <p:spPr>
+          <a:xfrm>
+            <a:off x="7589520" y="1600200"/>
+            <a:ext cx="502920" cy="502920"/>
+          </a:xfrm>
+          <a:prstGeom prst="ellipse">
+            <a:avLst/>
+          </a:prstGeom>
+          <a:solidFill>
+            <a:srgbClr val="1BAF7A"/>
+          </a:solidFill>
+          <a:ln w="12700">
+            <a:solidFill>
+              <a:srgbClr val="1BAF7A"/>
+            </a:solidFill>
+            <a:prstDash val="solid"/>
+          </a:ln>
+        </p:spPr>
+      </p:sp>
+      <p:sp>
+        <p:nvSpPr>
+          <p:cNvPr id="6" name="Text 3"/>
           <p:cNvSpPr txBox="1"/>
           <p:nvPr/>
         </p:nvSpPr>
         <p:spPr>
           <a:xfrm>
-            <a:off x="8046720" y="1463040"/>
-            <a:ext cx="1371600" cy="548640"/>
+            <a:off x="8275320" y="1417320"/>
+            <a:ext cx="3291840" cy="320040"/>
           </a:xfrm>
           <a:prstGeom prst="rect">
             <a:avLst/>
@@ -8185,27 +8267,27 @@
               <a:buNone/>
             </a:pPr>
             <a:r>
-              <a:rPr lang="en-US" sz="2600" b="1" dirty="0">
-                <a:solidFill>
-                  <a:schemeClr val="accent2"/>
-                </a:solidFill>
-              </a:rPr>
-              <a:t>×1.82</a:t>
-            </a:r>
-            <a:endParaRPr lang="en-US" sz="2600" dirty="0"/>
-          </a:p>
-        </p:txBody>
-      </p:sp>
-      <p:sp>
-        <p:nvSpPr>
-          <p:cNvPr id="6" name="Text 3"/>
+              <a:rPr lang="en-US" sz="1400" b="1" dirty="0">
+                <a:solidFill>
+                  <a:schemeClr val="tx2"/>
+                </a:solidFill>
+              </a:rPr>
+              <a:t>Вовлечённые · 47%</a:t>
+            </a:r>
+            <a:endParaRPr lang="en-US" sz="1400" dirty="0"/>
+          </a:p>
+        </p:txBody>
+      </p:sp>
+      <p:sp>
+        <p:nvSpPr>
+          <p:cNvPr id="7" name="Text 4"/>
           <p:cNvSpPr txBox="1"/>
           <p:nvPr/>
         </p:nvSpPr>
         <p:spPr>
           <a:xfrm>
-            <a:off x="9418320" y="1463040"/>
-            <a:ext cx="2103120" cy="822960"/>
+            <a:off x="8275320" y="1737360"/>
+            <a:ext cx="3291840" cy="640080"/>
           </a:xfrm>
           <a:prstGeom prst="rect">
             <a:avLst/>
@@ -8221,27 +8303,79 @@
               <a:buNone/>
             </a:pPr>
             <a:r>
-              <a:rPr lang="en-US" sz="1300" dirty="0">
+              <a:rPr lang="en-US" sz="1100" dirty="0">
                 <a:solidFill>
                   <a:schemeClr val="tx1"/>
                 </a:solidFill>
               </a:rPr>
-              <a:t>шансы на +1 SD депрессивных симптомов</a:t>
-            </a:r>
-            <a:endParaRPr lang="en-US" sz="1300" dirty="0"/>
-          </a:p>
-        </p:txBody>
-      </p:sp>
-      <p:sp>
-        <p:nvSpPr>
-          <p:cNvPr id="7" name="Text 4"/>
+              <a:t>довольны руководителем, свои на кафедре, симптомов почти нет. Хотят уйти 5%, работают ПД вне вуза 45%</a:t>
+            </a:r>
+            <a:endParaRPr lang="en-US" sz="1100" dirty="0"/>
+          </a:p>
+        </p:txBody>
+      </p:sp>
+      <p:sp>
+        <p:nvSpPr>
+          <p:cNvPr id="8" name="card"/>
+          <p:cNvSpPr/>
+          <p:nvPr/>
+        </p:nvSpPr>
+        <p:spPr>
+          <a:xfrm>
+            <a:off x="7406640" y="2532888"/>
+            <a:ext cx="4251960" cy="1069848"/>
+          </a:xfrm>
+          <a:prstGeom prst="roundRect">
+            <a:avLst>
+              <a:gd name="adj" fmla="val 6838"/>
+            </a:avLst>
+          </a:prstGeom>
+          <a:solidFill>
+            <a:schemeClr val="bg2"/>
+          </a:solidFill>
+          <a:ln w="12700">
+            <a:solidFill>
+              <a:schemeClr val="bg2"/>
+            </a:solidFill>
+            <a:prstDash val="solid"/>
+          </a:ln>
+        </p:spPr>
+      </p:sp>
+      <p:sp>
+        <p:nvSpPr>
+          <p:cNvPr id="9" name="Shape 6"/>
+          <p:cNvSpPr/>
+          <p:nvPr/>
+        </p:nvSpPr>
+        <p:spPr>
+          <a:xfrm>
+            <a:off x="7589520" y="2807208"/>
+            <a:ext cx="502920" cy="502920"/>
+          </a:xfrm>
+          <a:prstGeom prst="ellipse">
+            <a:avLst/>
+          </a:prstGeom>
+          <a:solidFill>
+            <a:srgbClr val="2A78D6"/>
+          </a:solidFill>
+          <a:ln w="12700">
+            <a:solidFill>
+              <a:srgbClr val="2A78D6"/>
+            </a:solidFill>
+            <a:prstDash val="solid"/>
+          </a:ln>
+        </p:spPr>
+      </p:sp>
+      <p:sp>
+        <p:nvSpPr>
+          <p:cNvPr id="10" name="Text 7"/>
           <p:cNvSpPr txBox="1"/>
           <p:nvPr/>
         </p:nvSpPr>
         <p:spPr>
           <a:xfrm>
-            <a:off x="8046720" y="2606040"/>
-            <a:ext cx="1371600" cy="548640"/>
+            <a:off x="8275320" y="2624328"/>
+            <a:ext cx="3291840" cy="320040"/>
           </a:xfrm>
           <a:prstGeom prst="rect">
             <a:avLst/>
@@ -8257,27 +8391,27 @@
               <a:buNone/>
             </a:pPr>
             <a:r>
-              <a:rPr lang="en-US" sz="2600" b="1" dirty="0">
-                <a:solidFill>
-                  <a:schemeClr val="accent1"/>
-                </a:solidFill>
-              </a:rPr>
-              <a:t>×0.60</a:t>
-            </a:r>
-            <a:endParaRPr lang="en-US" sz="2600" dirty="0"/>
-          </a:p>
-        </p:txBody>
-      </p:sp>
-      <p:sp>
-        <p:nvSpPr>
-          <p:cNvPr id="8" name="Text 5"/>
+              <a:rPr lang="en-US" sz="1400" b="1" dirty="0">
+                <a:solidFill>
+                  <a:schemeClr val="tx2"/>
+                </a:solidFill>
+              </a:rPr>
+              <a:t>Отстранённые · 27%</a:t>
+            </a:r>
+            <a:endParaRPr lang="en-US" sz="1400" dirty="0"/>
+          </a:p>
+        </p:txBody>
+      </p:sp>
+      <p:sp>
+        <p:nvSpPr>
+          <p:cNvPr id="11" name="Text 8"/>
           <p:cNvSpPr txBox="1"/>
           <p:nvPr/>
         </p:nvSpPr>
         <p:spPr>
           <a:xfrm>
-            <a:off x="9418320" y="2606040"/>
-            <a:ext cx="2103120" cy="822960"/>
+            <a:off x="8275320" y="2944368"/>
+            <a:ext cx="3291840" cy="640080"/>
           </a:xfrm>
           <a:prstGeom prst="rect">
             <a:avLst/>
@@ -8293,27 +8427,79 @@
               <a:buNone/>
             </a:pPr>
             <a:r>
-              <a:rPr lang="en-US" sz="1300" dirty="0">
+              <a:rPr lang="en-US" sz="1100" dirty="0">
                 <a:solidFill>
                   <a:schemeClr val="tx1"/>
                 </a:solidFill>
               </a:rPr>
-              <a:t>шансы на +1 SD принадлежности к кафедре</a:t>
-            </a:r>
-            <a:endParaRPr lang="en-US" sz="1300" dirty="0"/>
-          </a:p>
-        </p:txBody>
-      </p:sp>
-      <p:sp>
-        <p:nvSpPr>
-          <p:cNvPr id="9" name="Text 6"/>
+              <a:t>руководитель в порядке, но нет чувства принадлежности. Хотят уйти 23%, работают ПД вне вуза 50%</a:t>
+            </a:r>
+            <a:endParaRPr lang="en-US" sz="1100" dirty="0"/>
+          </a:p>
+        </p:txBody>
+      </p:sp>
+      <p:sp>
+        <p:nvSpPr>
+          <p:cNvPr id="12" name="card"/>
+          <p:cNvSpPr/>
+          <p:nvPr/>
+        </p:nvSpPr>
+        <p:spPr>
+          <a:xfrm>
+            <a:off x="7406640" y="3739896"/>
+            <a:ext cx="4251960" cy="1069848"/>
+          </a:xfrm>
+          <a:prstGeom prst="roundRect">
+            <a:avLst>
+              <a:gd name="adj" fmla="val 6838"/>
+            </a:avLst>
+          </a:prstGeom>
+          <a:solidFill>
+            <a:schemeClr val="bg2"/>
+          </a:solidFill>
+          <a:ln w="12700">
+            <a:solidFill>
+              <a:schemeClr val="bg2"/>
+            </a:solidFill>
+            <a:prstDash val="solid"/>
+          </a:ln>
+        </p:spPr>
+      </p:sp>
+      <p:sp>
+        <p:nvSpPr>
+          <p:cNvPr id="13" name="Shape 10"/>
+          <p:cNvSpPr/>
+          <p:nvPr/>
+        </p:nvSpPr>
+        <p:spPr>
+          <a:xfrm>
+            <a:off x="7589520" y="4014216"/>
+            <a:ext cx="502920" cy="502920"/>
+          </a:xfrm>
+          <a:prstGeom prst="ellipse">
+            <a:avLst/>
+          </a:prstGeom>
+          <a:solidFill>
+            <a:srgbClr val="4A3AA7"/>
+          </a:solidFill>
+          <a:ln w="12700">
+            <a:solidFill>
+              <a:srgbClr val="4A3AA7"/>
+            </a:solidFill>
+            <a:prstDash val="solid"/>
+          </a:ln>
+        </p:spPr>
+      </p:sp>
+      <p:sp>
+        <p:nvSpPr>
+          <p:cNvPr id="14" name="Text 11"/>
           <p:cNvSpPr txBox="1"/>
           <p:nvPr/>
         </p:nvSpPr>
         <p:spPr>
           <a:xfrm>
-            <a:off x="8046720" y="3749040"/>
-            <a:ext cx="1371600" cy="548640"/>
+            <a:off x="8275320" y="3831336"/>
+            <a:ext cx="3291840" cy="320040"/>
           </a:xfrm>
           <a:prstGeom prst="rect">
             <a:avLst/>
@@ -8329,27 +8515,27 @@
               <a:buNone/>
             </a:pPr>
             <a:r>
-              <a:rPr lang="en-US" sz="2600" b="1" dirty="0">
-                <a:solidFill>
-                  <a:schemeClr val="accent1"/>
-                </a:solidFill>
-              </a:rPr>
-              <a:t>×0.75</a:t>
-            </a:r>
-            <a:endParaRPr lang="en-US" sz="2600" dirty="0"/>
-          </a:p>
-        </p:txBody>
-      </p:sp>
-      <p:sp>
-        <p:nvSpPr>
-          <p:cNvPr id="10" name="Text 7"/>
+              <a:rPr lang="en-US" sz="1400" b="1" dirty="0">
+                <a:solidFill>
+                  <a:schemeClr val="tx2"/>
+                </a:solidFill>
+              </a:rPr>
+              <a:t>Выгорающие · 16%</a:t>
+            </a:r>
+            <a:endParaRPr lang="en-US" sz="1400" dirty="0"/>
+          </a:p>
+        </p:txBody>
+      </p:sp>
+      <p:sp>
+        <p:nvSpPr>
+          <p:cNvPr id="15" name="Text 12"/>
           <p:cNvSpPr txBox="1"/>
           <p:nvPr/>
         </p:nvSpPr>
         <p:spPr>
           <a:xfrm>
-            <a:off x="9418320" y="3749040"/>
-            <a:ext cx="2103120" cy="822960"/>
+            <a:off x="8275320" y="4151376"/>
+            <a:ext cx="3291840" cy="640080"/>
           </a:xfrm>
           <a:prstGeom prst="rect">
             <a:avLst/>
@@ -8365,27 +8551,79 @@
               <a:buNone/>
             </a:pPr>
             <a:r>
-              <a:rPr lang="en-US" sz="1300" dirty="0">
+              <a:rPr lang="en-US" sz="1100" dirty="0">
                 <a:solidFill>
                   <a:schemeClr val="tx1"/>
                 </a:solidFill>
               </a:rPr>
-              <a:t>шансы на +1 SD удовлетворённости руководителем</a:t>
-            </a:r>
-            <a:endParaRPr lang="en-US" sz="1300" dirty="0"/>
-          </a:p>
-        </p:txBody>
-      </p:sp>
-      <p:sp>
-        <p:nvSpPr>
-          <p:cNvPr id="11" name="Text 8"/>
+              <a:t>хорошая среда, но выраженные депрессивные симптомы. Хотят уйти 33%, работают ПД вне вуза 42%</a:t>
+            </a:r>
+            <a:endParaRPr lang="en-US" sz="1100" dirty="0"/>
+          </a:p>
+        </p:txBody>
+      </p:sp>
+      <p:sp>
+        <p:nvSpPr>
+          <p:cNvPr id="16" name="card"/>
+          <p:cNvSpPr/>
+          <p:nvPr/>
+        </p:nvSpPr>
+        <p:spPr>
+          <a:xfrm>
+            <a:off x="7406640" y="4946904"/>
+            <a:ext cx="4251960" cy="1069848"/>
+          </a:xfrm>
+          <a:prstGeom prst="roundRect">
+            <a:avLst>
+              <a:gd name="adj" fmla="val 6838"/>
+            </a:avLst>
+          </a:prstGeom>
+          <a:solidFill>
+            <a:schemeClr val="bg2"/>
+          </a:solidFill>
+          <a:ln w="12700">
+            <a:solidFill>
+              <a:schemeClr val="bg2"/>
+            </a:solidFill>
+            <a:prstDash val="solid"/>
+          </a:ln>
+        </p:spPr>
+      </p:sp>
+      <p:sp>
+        <p:nvSpPr>
+          <p:cNvPr id="17" name="Shape 14"/>
+          <p:cNvSpPr/>
+          <p:nvPr/>
+        </p:nvSpPr>
+        <p:spPr>
+          <a:xfrm>
+            <a:off x="7589520" y="5221224"/>
+            <a:ext cx="502920" cy="502920"/>
+          </a:xfrm>
+          <a:prstGeom prst="ellipse">
+            <a:avLst/>
+          </a:prstGeom>
+          <a:solidFill>
+            <a:srgbClr val="EB6834"/>
+          </a:solidFill>
+          <a:ln w="12700">
+            <a:solidFill>
+              <a:srgbClr val="EB6834"/>
+            </a:solidFill>
+            <a:prstDash val="solid"/>
+          </a:ln>
+        </p:spPr>
+      </p:sp>
+      <p:sp>
+        <p:nvSpPr>
+          <p:cNvPr id="18" name="Text 15"/>
           <p:cNvSpPr txBox="1"/>
           <p:nvPr/>
         </p:nvSpPr>
         <p:spPr>
           <a:xfrm>
-            <a:off x="8046720" y="4892040"/>
-            <a:ext cx="1371600" cy="548640"/>
+            <a:off x="8275320" y="5038344"/>
+            <a:ext cx="3291840" cy="320040"/>
           </a:xfrm>
           <a:prstGeom prst="rect">
             <a:avLst/>
@@ -8401,27 +8639,27 @@
               <a:buNone/>
             </a:pPr>
             <a:r>
-              <a:rPr lang="en-US" sz="2600" b="1" dirty="0">
+              <a:rPr lang="en-US" sz="1400" b="1" dirty="0">
                 <a:solidFill>
                   <a:schemeClr val="tx2"/>
                 </a:solidFill>
               </a:rPr>
-              <a:t>×0.96</a:t>
-            </a:r>
-            <a:endParaRPr lang="en-US" sz="2600" dirty="0"/>
-          </a:p>
-        </p:txBody>
-      </p:sp>
-      <p:sp>
-        <p:nvSpPr>
-          <p:cNvPr id="12" name="Text 9"/>
+              <a:t>Без опоры на руководителя · 10%</a:t>
+            </a:r>
+            <a:endParaRPr lang="en-US" sz="1400" dirty="0"/>
+          </a:p>
+        </p:txBody>
+      </p:sp>
+      <p:sp>
+        <p:nvSpPr>
+          <p:cNvPr id="19" name="Text 16"/>
           <p:cNvSpPr txBox="1"/>
           <p:nvPr/>
         </p:nvSpPr>
         <p:spPr>
           <a:xfrm>
-            <a:off x="9418320" y="4892040"/>
-            <a:ext cx="2103120" cy="822960"/>
+            <a:off x="8275320" y="5358384"/>
+            <a:ext cx="3291840" cy="640080"/>
           </a:xfrm>
           <a:prstGeom prst="rect">
             <a:avLst/>
@@ -8437,27 +8675,27 @@
               <a:buNone/>
             </a:pPr>
             <a:r>
-              <a:rPr lang="en-US" sz="1300" dirty="0">
+              <a:rPr lang="en-US" sz="1100" dirty="0">
                 <a:solidFill>
                   <a:schemeClr val="tx1"/>
                 </a:solidFill>
               </a:rPr>
-              <a:t>полный день вне вуза, p = 0.79 (H1 не подтверждена)</a:t>
-            </a:r>
-            <a:endParaRPr lang="en-US" sz="1300" dirty="0"/>
-          </a:p>
-        </p:txBody>
-      </p:sp>
-      <p:sp>
-        <p:nvSpPr>
-          <p:cNvPr id="13" name="Text 10"/>
+              <a:t>конфликт или отсутствие поддержки руководителя, слабая среда. Хотят уйти 59%, работают ПД вне вуза 48%</a:t>
+            </a:r>
+            <a:endParaRPr lang="en-US" sz="1100" dirty="0"/>
+          </a:p>
+        </p:txBody>
+      </p:sp>
+      <p:sp>
+        <p:nvSpPr>
+          <p:cNvPr id="20" name="Text 17"/>
           <p:cNvSpPr txBox="1"/>
           <p:nvPr/>
         </p:nvSpPr>
         <p:spPr>
           <a:xfrm>
-            <a:off x="548640" y="5806440"/>
-            <a:ext cx="6949440" cy="365760"/>
+            <a:off x="548640" y="5440680"/>
+            <a:ext cx="6583680" cy="548640"/>
           </a:xfrm>
           <a:prstGeom prst="rect">
             <a:avLst/>
@@ -8466,10 +8704,13 @@
           <a:ln/>
         </p:spPr>
         <p:txBody>
-          <a:bodyPr wrap="square" lIns="0" tIns="0" rIns="0" bIns="0" rtlCol="0" anchor="ctr"/>
+          <a:bodyPr wrap="square" lIns="0" tIns="0" rIns="0" bIns="0" rtlCol="0" anchor="t"/>
           <a:lstStyle/>
           <a:p>
             <a:pPr indent="0" marL="0">
+              <a:spcAft>
+                <a:spcPts val="600"/>
+              </a:spcAft>
               <a:buNone/>
             </a:pPr>
             <a:r>
@@ -8478,7 +8719,7 @@
                   <a:schemeClr val="tx2"/>
                 </a:solidFill>
               </a:rPr>
-              <a:t>Логит, N = 4344, псевдо-R² = 0.26. Порядковый логит даёт те же знаки и значимость.</a:t>
+              <a:t>Кластеризация k-means по 4 стандартизованным признакам. Размер пузыря = доля аспирантов, число внутри = доля желающих уйти.</a:t>
             </a:r>
             <a:endParaRPr lang="en-US" sz="1200" dirty="0"/>
           </a:p>
@@ -8586,65 +8827,22 @@
                   <a:schemeClr val="tx2"/>
                 </a:solidFill>
               </a:rPr>
-              <a:t>Три фактора среды объясняют две трети объяснённого, занятость менее 2%</a:t>
+              <a:t>Механизмы: часть эффекта идёт через здоровье, а принадлежность защищает работающих</a:t>
             </a:r>
             <a:endParaRPr lang="en-US" sz="2600" dirty="0"/>
           </a:p>
         </p:txBody>
       </p:sp>
-      <p:graphicFrame>
-        <p:nvGraphicFramePr>
-          <p:cNvPr id="3" name="Chart 0" descr=""/>
-          <p:cNvGraphicFramePr/>
-          <p:nvPr/>
-        </p:nvGraphicFramePr>
-        <p:xfrm>
-          <a:off x="548640" y="1325880"/>
-          <a:ext cx="6766560" cy="4754880"/>
-        </p:xfrm>
-        <a:graphic xmlns:a="http://schemas.openxmlformats.org/drawingml/2006/main">
-          <a:graphicData uri="http://schemas.openxmlformats.org/drawingml/2006/chart">
-            <c:chart xmlns:c="http://schemas.openxmlformats.org/drawingml/2006/chart" r:id="rId1"/>
-          </a:graphicData>
-        </a:graphic>
-      </p:graphicFrame>
-      <p:sp>
-        <p:nvSpPr>
-          <p:cNvPr id="4" name="card"/>
-          <p:cNvSpPr/>
-          <p:nvPr/>
-        </p:nvSpPr>
-        <p:spPr>
-          <a:xfrm>
-            <a:off x="7680960" y="1325880"/>
-            <a:ext cx="3977640" cy="2240280"/>
-          </a:xfrm>
-          <a:prstGeom prst="roundRect">
-            <a:avLst>
-              <a:gd name="adj" fmla="val 3265"/>
-            </a:avLst>
-          </a:prstGeom>
-          <a:solidFill>
-            <a:schemeClr val="bg2"/>
-          </a:solidFill>
-          <a:ln w="12700">
-            <a:solidFill>
-              <a:schemeClr val="bg2"/>
-            </a:solidFill>
-            <a:prstDash val="solid"/>
-          </a:ln>
-        </p:spPr>
-      </p:sp>
-      <p:sp>
-        <p:nvSpPr>
-          <p:cNvPr id="5" name="Text 2"/>
+      <p:sp>
+        <p:nvSpPr>
+          <p:cNvPr id="3" name="Text 1"/>
           <p:cNvSpPr txBox="1"/>
           <p:nvPr/>
         </p:nvSpPr>
         <p:spPr>
           <a:xfrm>
-            <a:off x="7909560" y="1417320"/>
-            <a:ext cx="3566160" cy="822960"/>
+            <a:off x="548640" y="1325880"/>
+            <a:ext cx="5669280" cy="365760"/>
           </a:xfrm>
           <a:prstGeom prst="rect">
             <a:avLst/>
@@ -8653,300 +8851,21 @@
           <a:ln/>
         </p:spPr>
         <p:txBody>
-          <a:bodyPr wrap="square" lIns="0" tIns="0" rIns="0" bIns="0" rtlCol="0" anchor="b"/>
+          <a:bodyPr wrap="square" lIns="0" tIns="0" rIns="0" bIns="0" rtlCol="0" anchor="ctr"/>
           <a:lstStyle/>
           <a:p>
             <a:pPr indent="0" marL="0">
               <a:buNone/>
             </a:pPr>
             <a:r>
-              <a:rPr lang="en-US" sz="4400" b="1" dirty="0">
-                <a:solidFill>
-                  <a:schemeClr val="accent1"/>
-                </a:solidFill>
-              </a:rPr>
-              <a:t>0.83</a:t>
-            </a:r>
-            <a:endParaRPr lang="en-US" sz="4400" dirty="0"/>
-          </a:p>
-        </p:txBody>
-      </p:sp>
-      <p:sp>
-        <p:nvSpPr>
-          <p:cNvPr id="6" name="Text 3"/>
-          <p:cNvSpPr txBox="1"/>
-          <p:nvPr/>
-        </p:nvSpPr>
-        <p:spPr>
-          <a:xfrm>
-            <a:off x="7909560" y="2286000"/>
-            <a:ext cx="3566160" cy="640080"/>
-          </a:xfrm>
-          <a:prstGeom prst="rect">
-            <a:avLst/>
-          </a:prstGeom>
-          <a:noFill/>
-          <a:ln/>
-        </p:spPr>
-        <p:txBody>
-          <a:bodyPr wrap="square" lIns="0" tIns="0" rIns="0" bIns="0" rtlCol="0" anchor="t"/>
-          <a:lstStyle/>
-          <a:p>
-            <a:pPr indent="0" marL="0">
-              <a:buNone/>
-            </a:pPr>
-            <a:r>
-              <a:rPr lang="en-US" sz="1400" dirty="0">
-                <a:solidFill>
-                  <a:schemeClr val="tx1"/>
-                </a:solidFill>
-              </a:rPr>
-              <a:t>ROC AUC полной модели (5-fold CV)</a:t>
-            </a:r>
-            <a:endParaRPr lang="en-US" sz="1400" dirty="0"/>
-          </a:p>
-        </p:txBody>
-      </p:sp>
-      <p:sp>
-        <p:nvSpPr>
-          <p:cNvPr id="7" name="card"/>
-          <p:cNvSpPr/>
-          <p:nvPr/>
-        </p:nvSpPr>
-        <p:spPr>
-          <a:xfrm>
-            <a:off x="7680960" y="3840480"/>
-            <a:ext cx="3977640" cy="2240280"/>
-          </a:xfrm>
-          <a:prstGeom prst="roundRect">
-            <a:avLst>
-              <a:gd name="adj" fmla="val 3265"/>
-            </a:avLst>
-          </a:prstGeom>
-          <a:solidFill>
-            <a:schemeClr val="bg2"/>
-          </a:solidFill>
-          <a:ln w="12700">
-            <a:solidFill>
-              <a:schemeClr val="bg2"/>
-            </a:solidFill>
-            <a:prstDash val="solid"/>
-          </a:ln>
-        </p:spPr>
-      </p:sp>
-      <p:sp>
-        <p:nvSpPr>
-          <p:cNvPr id="8" name="Text 5"/>
-          <p:cNvSpPr txBox="1"/>
-          <p:nvPr/>
-        </p:nvSpPr>
-        <p:spPr>
-          <a:xfrm>
-            <a:off x="7909560" y="3931920"/>
-            <a:ext cx="3566160" cy="822960"/>
-          </a:xfrm>
-          <a:prstGeom prst="rect">
-            <a:avLst/>
-          </a:prstGeom>
-          <a:noFill/>
-          <a:ln/>
-        </p:spPr>
-        <p:txBody>
-          <a:bodyPr wrap="square" lIns="0" tIns="0" rIns="0" bIns="0" rtlCol="0" anchor="b"/>
-          <a:lstStyle/>
-          <a:p>
-            <a:pPr indent="0" marL="0">
-              <a:buNone/>
-            </a:pPr>
-            <a:r>
-              <a:rPr lang="en-US" sz="4400" b="1" dirty="0">
+              <a:rPr lang="en-US" sz="1700" b="1" dirty="0">
                 <a:solidFill>
                   <a:schemeClr val="tx2"/>
                 </a:solidFill>
               </a:rPr>
-              <a:t>0.61</a:t>
-            </a:r>
-            <a:endParaRPr lang="en-US" sz="4400" dirty="0"/>
-          </a:p>
-        </p:txBody>
-      </p:sp>
-      <p:sp>
-        <p:nvSpPr>
-          <p:cNvPr id="9" name="Text 6"/>
-          <p:cNvSpPr txBox="1"/>
-          <p:nvPr/>
-        </p:nvSpPr>
-        <p:spPr>
-          <a:xfrm>
-            <a:off x="7909560" y="4800600"/>
-            <a:ext cx="3566160" cy="640080"/>
-          </a:xfrm>
-          <a:prstGeom prst="rect">
-            <a:avLst/>
-          </a:prstGeom>
-          <a:noFill/>
-          <a:ln/>
-        </p:spPr>
-        <p:txBody>
-          <a:bodyPr wrap="square" lIns="0" tIns="0" rIns="0" bIns="0" rtlCol="0" anchor="t"/>
-          <a:lstStyle/>
-          <a:p>
-            <a:pPr indent="0" marL="0">
-              <a:buNone/>
-            </a:pPr>
-            <a:r>
-              <a:rPr lang="en-US" sz="1400" dirty="0">
-                <a:solidFill>
-                  <a:schemeClr val="tx1"/>
-                </a:solidFill>
-              </a:rPr>
-              <a:t>AUC только по внешним факторам: соцдем, программа, занятость</a:t>
-            </a:r>
-            <a:endParaRPr lang="en-US" sz="1400" dirty="0"/>
-          </a:p>
-        </p:txBody>
-      </p:sp>
-      <p:sp>
-        <p:nvSpPr>
-          <p:cNvPr id="25" name="Slide Number Placeholder 0"/>
-          <p:cNvSpPr>
-            <a:spLocks noGrp="1"/>
-          </p:cNvSpPr>
-          <p:nvPr>
-            <p:ph type="sldNum" sz="quarter" idx="4294967295"/>
-          </p:nvPr>
-        </p:nvSpPr>
-        <p:spPr>
-          <a:xfrm>
-            <a:off x="11094415" y="6400800"/>
-            <a:ext cx="548640" cy="274320"/>
-          </a:xfrm>
-          <a:prstGeom prst="rect">
-            <a:avLst/>
-          </a:prstGeom>
-          <a:extLst>
-            <a:ext uri="{C572A759-6A51-4108-AA02-DFA0A04FC94B}">
-              <ma14:wrappingTextBoxFlag xmlns:ma14="http://schemas.microsoft.com/office/mac/drawingml/2011/main" val="0"/>
-            </a:ext>
-          </a:extLst>
-        </p:spPr>
-        <p:txBody>
-          <a:bodyPr/>
-          <a:lstStyle>
-            <a:lvl1pPr>
-              <a:defRPr sz="1000">
-                <a:solidFill>
-                  <a:schemeClr val="tx2"/>
-                </a:solidFill>
-              </a:defRPr>
-            </a:lvl1pPr>
-          </a:lstStyle>
-          <a:p>
-            <a:pPr algn="r"/>
-            <a:fld id="{F7021451-1387-4CA6-816F-3879F97B5CBC}" type="slidenum">
-              <a:rPr b="0" lang="en-US"/>
-              <a:t>8</a:t>
-            </a:fld>
-            <a:endParaRPr lang="en-US"/>
-          </a:p>
-        </p:txBody>
-      </p:sp>
-    </p:spTree>
-  </p:cSld>
-  <p:clrMapOvr>
-    <a:masterClrMapping/>
-  </p:clrMapOvr>
-</p:sld>
-</file>
-
-<file path=ppt/slides/slide9.xml><?xml version="1.0" encoding="utf-8"?>
-<p:sld xmlns:a="http://schemas.openxmlformats.org/drawingml/2006/main" xmlns:r="http://schemas.openxmlformats.org/officeDocument/2006/relationships" xmlns:p="http://schemas.openxmlformats.org/presentationml/2006/main">
-  <p:cSld name="Slide 9">
-    <p:spTree>
-      <p:nvGrpSpPr>
-        <p:cNvPr id="1" name=""/>
-        <p:cNvGrpSpPr/>
-        <p:nvPr/>
-      </p:nvGrpSpPr>
-      <p:grpSpPr>
-        <a:xfrm>
-          <a:off x="0" y="0"/>
-          <a:ext cx="0" cy="0"/>
-          <a:chOff x="0" y="0"/>
-          <a:chExt cx="0" cy="0"/>
-        </a:xfrm>
-      </p:grpSpPr>
-      <p:sp>
-        <p:nvSpPr>
-          <p:cNvPr id="2" name="Text 0"/>
-          <p:cNvSpPr/>
-          <p:nvPr>
-            <p:ph idx="100" type="title" hasCustomPrompt="1"/>
-          </p:nvPr>
-        </p:nvSpPr>
-        <p:spPr>
-          <a:xfrm>
-            <a:off x="548640" y="320040"/>
-            <a:ext cx="11094415" cy="868680"/>
-          </a:xfrm>
-          <a:prstGeom prst="rect">
-            <a:avLst/>
-          </a:prstGeom>
-          <a:noFill/>
-          <a:ln/>
-        </p:spPr>
-        <p:txBody>
-          <a:bodyPr wrap="square" lIns="0" tIns="0" rIns="0" bIns="0" rtlCol="0" anchor="t"/>
-          <a:lstStyle/>
-          <a:p>
-            <a:pPr algn="l" indent="0" marL="0">
-              <a:buNone/>
-            </a:pPr>
-            <a:r>
-              <a:rPr lang="en-US" sz="2600" b="1" dirty="0">
-                <a:solidFill>
-                  <a:schemeClr val="tx2"/>
-                </a:solidFill>
-              </a:rPr>
-              <a:t>Механизмы: часть эффекта идёт через здоровье, а принадлежность защищает работающих</a:t>
-            </a:r>
-            <a:endParaRPr lang="en-US" sz="2600" dirty="0"/>
-          </a:p>
-        </p:txBody>
-      </p:sp>
-      <p:sp>
-        <p:nvSpPr>
-          <p:cNvPr id="3" name="Text 1"/>
-          <p:cNvSpPr txBox="1"/>
-          <p:nvPr/>
-        </p:nvSpPr>
-        <p:spPr>
-          <a:xfrm>
-            <a:off x="548640" y="1325880"/>
-            <a:ext cx="5669280" cy="365760"/>
-          </a:xfrm>
-          <a:prstGeom prst="rect">
-            <a:avLst/>
-          </a:prstGeom>
-          <a:noFill/>
-          <a:ln/>
-        </p:spPr>
-        <p:txBody>
-          <a:bodyPr wrap="square" lIns="0" tIns="0" rIns="0" bIns="0" rtlCol="0" anchor="ctr"/>
-          <a:lstStyle/>
-          <a:p>
-            <a:pPr indent="0" marL="0">
-              <a:buNone/>
-            </a:pPr>
-            <a:r>
-              <a:rPr lang="en-US" sz="1500" b="1" dirty="0">
-                <a:solidFill>
-                  <a:schemeClr val="tx2"/>
-                </a:solidFill>
-              </a:rPr>
-              <a:t>Медиация через PHQ-8 (LPM, бутстрэп)</a:t>
-            </a:r>
-            <a:endParaRPr lang="en-US" sz="1500" dirty="0"/>
+              <a:t>Медиация через PHQ-8 (бутстрэп)</a:t>
+            </a:r>
+            <a:endParaRPr lang="en-US" sz="1700" dirty="0"/>
           </a:p>
         </p:txBody>
       </p:sp>
@@ -9249,7 +9168,7 @@
       </p:sp>
       <p:graphicFrame>
         <p:nvGraphicFramePr>
-          <p:cNvPr id="10" name="Table 0"/>
+          <p:cNvPr id="9" name="Table 0"/>
           <p:cNvGraphicFramePr>
             <a:graphicFrameLocks noGrp="1"/>
           </p:cNvGraphicFramePr>
@@ -10175,14 +10094,14 @@
               <a:buNone/>
             </a:pPr>
             <a:r>
-              <a:rPr lang="en-US" sz="1500" b="1" dirty="0">
+              <a:rPr lang="en-US" sz="1700" b="1" dirty="0">
                 <a:solidFill>
                   <a:schemeClr val="tx2"/>
                 </a:solidFill>
               </a:rPr>
-              <a:t>Модерация: принадлежность × полный день вне вуза</a:t>
-            </a:r>
-            <a:endParaRPr lang="en-US" sz="1500" dirty="0"/>
+              <a:t>Модерация: принадлежность × работа</a:t>
+            </a:r>
+            <a:endParaRPr lang="en-US" sz="1700" dirty="0"/>
           </a:p>
         </p:txBody>
       </p:sp>
@@ -10232,6 +10151,9 @@
           <a:lstStyle/>
           <a:p>
             <a:pPr indent="0" marL="0">
+              <a:spcAft>
+                <a:spcPts val="600"/>
+              </a:spcAft>
               <a:buNone/>
             </a:pPr>
             <a:r>
@@ -10240,7 +10162,1751 @@
                   <a:schemeClr val="tx1"/>
                 </a:solidFill>
               </a:rPr>
-              <a:t>Взаимодействие β = -0.27, p = 0.001: при слабой принадлежности работающие полный день вне вуза в зоне наибольшего риска (H4).</a:t>
+              <a:t>β = -0.27, p = 0.001: работа опасна только без академической опоры. При высокой принадлежности работающие по модели рискуют даже меньше.</a:t>
+            </a:r>
+            <a:endParaRPr lang="en-US" sz="1300" dirty="0"/>
+          </a:p>
+        </p:txBody>
+      </p:sp>
+      <p:sp>
+        <p:nvSpPr>
+          <p:cNvPr id="25" name="Slide Number Placeholder 0"/>
+          <p:cNvSpPr>
+            <a:spLocks noGrp="1"/>
+          </p:cNvSpPr>
+          <p:nvPr>
+            <p:ph type="sldNum" sz="quarter" idx="4294967295"/>
+          </p:nvPr>
+        </p:nvSpPr>
+        <p:spPr>
+          <a:xfrm>
+            <a:off x="11094415" y="6400800"/>
+            <a:ext cx="548640" cy="274320"/>
+          </a:xfrm>
+          <a:prstGeom prst="rect">
+            <a:avLst/>
+          </a:prstGeom>
+          <a:extLst>
+            <a:ext uri="{C572A759-6A51-4108-AA02-DFA0A04FC94B}">
+              <ma14:wrappingTextBoxFlag xmlns:ma14="http://schemas.microsoft.com/office/mac/drawingml/2011/main" val="0"/>
+            </a:ext>
+          </a:extLst>
+        </p:spPr>
+        <p:txBody>
+          <a:bodyPr/>
+          <a:lstStyle>
+            <a:lvl1pPr>
+              <a:defRPr sz="1000">
+                <a:solidFill>
+                  <a:schemeClr val="tx2"/>
+                </a:solidFill>
+              </a:defRPr>
+            </a:lvl1pPr>
+          </a:lstStyle>
+          <a:p>
+            <a:pPr algn="r"/>
+            <a:fld id="{F7021451-1387-4CA6-816F-3879F97B5CBC}" type="slidenum">
+              <a:rPr b="0" lang="en-US"/>
+              <a:t>8</a:t>
+            </a:fld>
+            <a:endParaRPr lang="en-US"/>
+          </a:p>
+        </p:txBody>
+      </p:sp>
+    </p:spTree>
+  </p:cSld>
+  <p:clrMapOvr>
+    <a:masterClrMapping/>
+  </p:clrMapOvr>
+</p:sld>
+</file>
+
+<file path=ppt/slides/slide9.xml><?xml version="1.0" encoding="utf-8"?>
+<p:sld xmlns:a="http://schemas.openxmlformats.org/drawingml/2006/main" xmlns:r="http://schemas.openxmlformats.org/officeDocument/2006/relationships" xmlns:p="http://schemas.openxmlformats.org/presentationml/2006/main">
+  <p:cSld name="Slide 9">
+    <p:spTree>
+      <p:nvGrpSpPr>
+        <p:cNvPr id="1" name=""/>
+        <p:cNvGrpSpPr/>
+        <p:nvPr/>
+      </p:nvGrpSpPr>
+      <p:grpSpPr>
+        <a:xfrm>
+          <a:off x="0" y="0"/>
+          <a:ext cx="0" cy="0"/>
+          <a:chOff x="0" y="0"/>
+          <a:chExt cx="0" cy="0"/>
+        </a:xfrm>
+      </p:grpSpPr>
+      <p:sp>
+        <p:nvSpPr>
+          <p:cNvPr id="2" name="Text 0"/>
+          <p:cNvSpPr/>
+          <p:nvPr>
+            <p:ph idx="100" type="title" hasCustomPrompt="1"/>
+          </p:nvPr>
+        </p:nvSpPr>
+        <p:spPr>
+          <a:xfrm>
+            <a:off x="548640" y="320040"/>
+            <a:ext cx="11094415" cy="868680"/>
+          </a:xfrm>
+          <a:prstGeom prst="rect">
+            <a:avLst/>
+          </a:prstGeom>
+          <a:noFill/>
+          <a:ln/>
+        </p:spPr>
+        <p:txBody>
+          <a:bodyPr wrap="square" lIns="0" tIns="0" rIns="0" bIns="0" rtlCol="0" anchor="t"/>
+          <a:lstStyle/>
+          <a:p>
+            <a:pPr algn="l" indent="0" marL="0">
+              <a:buNone/>
+            </a:pPr>
+            <a:r>
+              <a:rPr lang="en-US" sz="2600" b="1" dirty="0">
+                <a:solidFill>
+                  <a:schemeClr val="tx2"/>
+                </a:solidFill>
+              </a:rPr>
+              <a:t>Вуз тоже важен: в «конвейерах защит» аспиранты чаще хотят уйти</a:t>
+            </a:r>
+            <a:endParaRPr lang="en-US" sz="2600" dirty="0"/>
+          </a:p>
+        </p:txBody>
+      </p:sp>
+      <p:pic>
+        <p:nvPicPr>
+          <p:cNvPr id="3" name="Image 0" descr="/home/user/khakatonIVO/output/figures/06_universities.png">    </p:cNvPr>
+          <p:cNvPicPr>
+            <a:picLocks noChangeAspect="1"/>
+          </p:cNvPicPr>
+          <p:nvPr/>
+        </p:nvPicPr>
+        <p:blipFill>
+          <a:blip r:embed="rId1"/>
+          <a:stretch>
+            <a:fillRect/>
+          </a:stretch>
+        </p:blipFill>
+        <p:spPr>
+          <a:xfrm>
+            <a:off x="548640" y="1325880"/>
+            <a:ext cx="6035040" cy="2926994"/>
+          </a:xfrm>
+          <a:prstGeom prst="rect">
+            <a:avLst/>
+          </a:prstGeom>
+        </p:spPr>
+      </p:pic>
+      <p:sp>
+        <p:nvSpPr>
+          <p:cNvPr id="4" name="Text 1"/>
+          <p:cNvSpPr txBox="1"/>
+          <p:nvPr/>
+        </p:nvSpPr>
+        <p:spPr>
+          <a:xfrm>
+            <a:off x="548640" y="4297680"/>
+            <a:ext cx="6035040" cy="320040"/>
+          </a:xfrm>
+          <a:prstGeom prst="rect">
+            <a:avLst/>
+          </a:prstGeom>
+          <a:noFill/>
+          <a:ln/>
+        </p:spPr>
+        <p:txBody>
+          <a:bodyPr wrap="square" lIns="0" tIns="0" rIns="0" bIns="0" rtlCol="0" anchor="t"/>
+          <a:lstStyle/>
+          <a:p>
+            <a:pPr indent="0" marL="0">
+              <a:spcAft>
+                <a:spcPts val="600"/>
+              </a:spcAft>
+              <a:buNone/>
+            </a:pPr>
+            <a:r>
+              <a:rPr lang="en-US" sz="1200" dirty="0">
+                <a:solidFill>
+                  <a:schemeClr val="tx2"/>
+                </a:solidFill>
+              </a:rPr>
+              <a:t>Оценки многоуровневой модели для 37 вузов с 30+ ответами, обезличено.</a:t>
+            </a:r>
+            <a:endParaRPr lang="en-US" sz="1200" dirty="0"/>
+          </a:p>
+        </p:txBody>
+      </p:sp>
+      <p:sp>
+        <p:nvSpPr>
+          <p:cNvPr id="5" name="Text 2"/>
+          <p:cNvSpPr txBox="1"/>
+          <p:nvPr/>
+        </p:nvSpPr>
+        <p:spPr>
+          <a:xfrm>
+            <a:off x="548640" y="4709160"/>
+            <a:ext cx="1920240" cy="548640"/>
+          </a:xfrm>
+          <a:prstGeom prst="rect">
+            <a:avLst/>
+          </a:prstGeom>
+          <a:noFill/>
+          <a:ln/>
+        </p:spPr>
+        <p:txBody>
+          <a:bodyPr wrap="square" lIns="0" tIns="0" rIns="0" bIns="0" rtlCol="0" anchor="ctr"/>
+          <a:lstStyle/>
+          <a:p>
+            <a:pPr indent="0" marL="0">
+              <a:buNone/>
+            </a:pPr>
+            <a:r>
+              <a:rPr lang="en-US" sz="2600" b="1" dirty="0">
+                <a:solidFill>
+                  <a:schemeClr val="accent2"/>
+                </a:solidFill>
+              </a:rPr>
+              <a:t>12%–31%</a:t>
+            </a:r>
+            <a:endParaRPr lang="en-US" sz="2600" dirty="0"/>
+          </a:p>
+        </p:txBody>
+      </p:sp>
+      <p:sp>
+        <p:nvSpPr>
+          <p:cNvPr id="6" name="Text 3"/>
+          <p:cNvSpPr txBox="1"/>
+          <p:nvPr/>
+        </p:nvSpPr>
+        <p:spPr>
+          <a:xfrm>
+            <a:off x="548640" y="5303520"/>
+            <a:ext cx="1874520" cy="731520"/>
+          </a:xfrm>
+          <a:prstGeom prst="rect">
+            <a:avLst/>
+          </a:prstGeom>
+          <a:noFill/>
+          <a:ln/>
+        </p:spPr>
+        <p:txBody>
+          <a:bodyPr wrap="square" lIns="0" tIns="0" rIns="0" bIns="0" rtlCol="0" anchor="t"/>
+          <a:lstStyle/>
+          <a:p>
+            <a:pPr indent="0" marL="0">
+              <a:buNone/>
+            </a:pPr>
+            <a:r>
+              <a:rPr lang="en-US" sz="1200" dirty="0">
+                <a:solidFill>
+                  <a:schemeClr val="tx1"/>
+                </a:solidFill>
+              </a:rPr>
+              <a:t>разброс доли «хочу бросить» между вузами</a:t>
+            </a:r>
+            <a:endParaRPr lang="en-US" sz="1200" dirty="0"/>
+          </a:p>
+        </p:txBody>
+      </p:sp>
+      <p:sp>
+        <p:nvSpPr>
+          <p:cNvPr id="7" name="Text 4"/>
+          <p:cNvSpPr txBox="1"/>
+          <p:nvPr/>
+        </p:nvSpPr>
+        <p:spPr>
+          <a:xfrm>
+            <a:off x="2606040" y="4709160"/>
+            <a:ext cx="1920240" cy="548640"/>
+          </a:xfrm>
+          <a:prstGeom prst="rect">
+            <a:avLst/>
+          </a:prstGeom>
+          <a:noFill/>
+          <a:ln/>
+        </p:spPr>
+        <p:txBody>
+          <a:bodyPr wrap="square" lIns="0" tIns="0" rIns="0" bIns="0" rtlCol="0" anchor="ctr"/>
+          <a:lstStyle/>
+          <a:p>
+            <a:pPr indent="0" marL="0">
+              <a:buNone/>
+            </a:pPr>
+            <a:r>
+              <a:rPr lang="en-US" sz="2600" b="1" dirty="0">
+                <a:solidFill>
+                  <a:schemeClr val="accent1"/>
+                </a:solidFill>
+              </a:rPr>
+              <a:t>3.6%</a:t>
+            </a:r>
+            <a:endParaRPr lang="en-US" sz="2600" dirty="0"/>
+          </a:p>
+        </p:txBody>
+      </p:sp>
+      <p:sp>
+        <p:nvSpPr>
+          <p:cNvPr id="8" name="Text 5"/>
+          <p:cNvSpPr txBox="1"/>
+          <p:nvPr/>
+        </p:nvSpPr>
+        <p:spPr>
+          <a:xfrm>
+            <a:off x="2606040" y="5303520"/>
+            <a:ext cx="1874520" cy="731520"/>
+          </a:xfrm>
+          <a:prstGeom prst="rect">
+            <a:avLst/>
+          </a:prstGeom>
+          <a:noFill/>
+          <a:ln/>
+        </p:spPr>
+        <p:txBody>
+          <a:bodyPr wrap="square" lIns="0" tIns="0" rIns="0" bIns="0" rtlCol="0" anchor="t"/>
+          <a:lstStyle/>
+          <a:p>
+            <a:pPr indent="0" marL="0">
+              <a:buNone/>
+            </a:pPr>
+            <a:r>
+              <a:rPr lang="en-US" sz="1200" dirty="0">
+                <a:solidFill>
+                  <a:schemeClr val="tx1"/>
+                </a:solidFill>
+              </a:rPr>
+              <a:t>дисперсии на уровне вуза (ICC): главное внутри вуза</a:t>
+            </a:r>
+            <a:endParaRPr lang="en-US" sz="1200" dirty="0"/>
+          </a:p>
+        </p:txBody>
+      </p:sp>
+      <p:sp>
+        <p:nvSpPr>
+          <p:cNvPr id="9" name="Text 6"/>
+          <p:cNvSpPr txBox="1"/>
+          <p:nvPr/>
+        </p:nvSpPr>
+        <p:spPr>
+          <a:xfrm>
+            <a:off x="4663440" y="4709160"/>
+            <a:ext cx="1920240" cy="548640"/>
+          </a:xfrm>
+          <a:prstGeom prst="rect">
+            <a:avLst/>
+          </a:prstGeom>
+          <a:noFill/>
+          <a:ln/>
+        </p:spPr>
+        <p:txBody>
+          <a:bodyPr wrap="square" lIns="0" tIns="0" rIns="0" bIns="0" rtlCol="0" anchor="ctr"/>
+          <a:lstStyle/>
+          <a:p>
+            <a:pPr indent="0" marL="0">
+              <a:buNone/>
+            </a:pPr>
+            <a:r>
+              <a:rPr lang="en-US" sz="2600" b="1" dirty="0">
+                <a:solidFill>
+                  <a:schemeClr val="accent1"/>
+                </a:solidFill>
+              </a:rPr>
+              <a:t>1.40</a:t>
+            </a:r>
+            <a:endParaRPr lang="en-US" sz="2600" dirty="0"/>
+          </a:p>
+        </p:txBody>
+      </p:sp>
+      <p:sp>
+        <p:nvSpPr>
+          <p:cNvPr id="10" name="Text 7"/>
+          <p:cNvSpPr txBox="1"/>
+          <p:nvPr/>
+        </p:nvSpPr>
+        <p:spPr>
+          <a:xfrm>
+            <a:off x="4663440" y="5303520"/>
+            <a:ext cx="1874520" cy="731520"/>
+          </a:xfrm>
+          <a:prstGeom prst="rect">
+            <a:avLst/>
+          </a:prstGeom>
+          <a:noFill/>
+          <a:ln/>
+        </p:spPr>
+        <p:txBody>
+          <a:bodyPr wrap="square" lIns="0" tIns="0" rIns="0" bIns="0" rtlCol="0" anchor="t"/>
+          <a:lstStyle/>
+          <a:p>
+            <a:pPr indent="0" marL="0">
+              <a:buNone/>
+            </a:pPr>
+            <a:r>
+              <a:rPr lang="en-US" sz="1200" dirty="0">
+                <a:solidFill>
+                  <a:schemeClr val="tx1"/>
+                </a:solidFill>
+              </a:rPr>
+              <a:t>медианное отношение шансов между вузами</a:t>
+            </a:r>
+            <a:endParaRPr lang="en-US" sz="1200" dirty="0"/>
+          </a:p>
+        </p:txBody>
+      </p:sp>
+      <p:graphicFrame>
+        <p:nvGraphicFramePr>
+          <p:cNvPr id="10" name="Table 0"/>
+          <p:cNvGraphicFramePr>
+            <a:graphicFrameLocks noGrp="1"/>
+          </p:cNvGraphicFramePr>
+          <p:nvPr>
+            <p:extLst>
+              <p:ext uri="{D42A27DB-BD31-4B8C-83A1-F6EECF244321}">
+                <p14:modId xmlns:p14="http://schemas.microsoft.com/office/powerpoint/2010/main" val="1579011935"/>
+              </p:ext>
+            </p:extLst>
+          </p:nvPr>
+        </p:nvGraphicFramePr>
+        <p:xfrm>
+          <a:off x="6903720" y="1325880"/>
+          <a:ext cx="4754880" cy="914400"/>
+        </p:xfrm>
+        <a:graphic>
+          <a:graphicData uri="http://schemas.openxmlformats.org/drawingml/2006/table">
+            <a:tbl>
+              <a:tblPr/>
+              <a:tblGrid>
+                <a:gridCol w="3200400"/>
+                <a:gridCol w="731520"/>
+                <a:gridCol w="822960"/>
+              </a:tblGrid>
+              <a:tr h="329184">
+                <a:tc>
+                  <a:txBody>
+                    <a:bodyPr/>
+                    <a:lstStyle/>
+                    <a:p>
+                      <a:pPr indent="0" marL="0">
+                        <a:buNone/>
+                      </a:pPr>
+                      <a:r>
+                        <a:rPr lang="en-US" sz="1200" b="1" dirty="0">
+                          <a:solidFill>
+                            <a:srgbClr val="14213D"/>
+                          </a:solidFill>
+                        </a:rPr>
+                        <a:t>Показатель МЭВ (+1 SD)</a:t>
+                      </a:r>
+                      <a:endParaRPr lang="en-US" sz="1200" dirty="0"/>
+                    </a:p>
+                  </a:txBody>
+                  <a:tcPr marL="76200" marR="76200" marT="25400" marB="25400">
+                    <a:lnL w="9525" cap="flat" cmpd="sng" algn="ctr">
+                      <a:solidFill>
+                        <a:srgbClr val="E6E5E0"/>
+                      </a:solidFill>
+                      <a:prstDash val="solid"/>
+                      <a:round/>
+                      <a:headEnd type="none" w="med" len="med"/>
+                      <a:tailEnd type="none" w="med" len="med"/>
+                    </a:lnL>
+                    <a:lnR w="9525" cap="flat" cmpd="sng" algn="ctr">
+                      <a:solidFill>
+                        <a:srgbClr val="E6E5E0"/>
+                      </a:solidFill>
+                      <a:prstDash val="solid"/>
+                      <a:round/>
+                      <a:headEnd type="none" w="med" len="med"/>
+                      <a:tailEnd type="none" w="med" len="med"/>
+                    </a:lnR>
+                    <a:lnT w="9525" cap="flat" cmpd="sng" algn="ctr">
+                      <a:solidFill>
+                        <a:srgbClr val="E6E5E0"/>
+                      </a:solidFill>
+                      <a:prstDash val="solid"/>
+                      <a:round/>
+                      <a:headEnd type="none" w="med" len="med"/>
+                      <a:tailEnd type="none" w="med" len="med"/>
+                    </a:lnT>
+                    <a:lnB w="9525" cap="flat" cmpd="sng" algn="ctr">
+                      <a:solidFill>
+                        <a:srgbClr val="E6E5E0"/>
+                      </a:solidFill>
+                      <a:prstDash val="solid"/>
+                      <a:round/>
+                      <a:headEnd type="none" w="med" len="med"/>
+                      <a:tailEnd type="none" w="med" len="med"/>
+                    </a:lnB>
+                  </a:tcPr>
+                </a:tc>
+                <a:tc>
+                  <a:txBody>
+                    <a:bodyPr/>
+                    <a:lstStyle/>
+                    <a:p>
+                      <a:pPr indent="0" marL="0">
+                        <a:buNone/>
+                      </a:pPr>
+                      <a:r>
+                        <a:rPr lang="en-US" sz="1200" b="1" dirty="0">
+                          <a:solidFill>
+                            <a:srgbClr val="14213D"/>
+                          </a:solidFill>
+                        </a:rPr>
+                        <a:t>ОШ</a:t>
+                      </a:r>
+                      <a:endParaRPr lang="en-US" sz="1200" dirty="0"/>
+                    </a:p>
+                  </a:txBody>
+                  <a:tcPr marL="76200" marR="76200" marT="25400" marB="25400">
+                    <a:lnL w="9525" cap="flat" cmpd="sng" algn="ctr">
+                      <a:solidFill>
+                        <a:srgbClr val="E6E5E0"/>
+                      </a:solidFill>
+                      <a:prstDash val="solid"/>
+                      <a:round/>
+                      <a:headEnd type="none" w="med" len="med"/>
+                      <a:tailEnd type="none" w="med" len="med"/>
+                    </a:lnL>
+                    <a:lnR w="9525" cap="flat" cmpd="sng" algn="ctr">
+                      <a:solidFill>
+                        <a:srgbClr val="E6E5E0"/>
+                      </a:solidFill>
+                      <a:prstDash val="solid"/>
+                      <a:round/>
+                      <a:headEnd type="none" w="med" len="med"/>
+                      <a:tailEnd type="none" w="med" len="med"/>
+                    </a:lnR>
+                    <a:lnT w="9525" cap="flat" cmpd="sng" algn="ctr">
+                      <a:solidFill>
+                        <a:srgbClr val="E6E5E0"/>
+                      </a:solidFill>
+                      <a:prstDash val="solid"/>
+                      <a:round/>
+                      <a:headEnd type="none" w="med" len="med"/>
+                      <a:tailEnd type="none" w="med" len="med"/>
+                    </a:lnT>
+                    <a:lnB w="9525" cap="flat" cmpd="sng" algn="ctr">
+                      <a:solidFill>
+                        <a:srgbClr val="E6E5E0"/>
+                      </a:solidFill>
+                      <a:prstDash val="solid"/>
+                      <a:round/>
+                      <a:headEnd type="none" w="med" len="med"/>
+                      <a:tailEnd type="none" w="med" len="med"/>
+                    </a:lnB>
+                  </a:tcPr>
+                </a:tc>
+                <a:tc>
+                  <a:txBody>
+                    <a:bodyPr/>
+                    <a:lstStyle/>
+                    <a:p>
+                      <a:pPr indent="0" marL="0">
+                        <a:buNone/>
+                      </a:pPr>
+                      <a:r>
+                        <a:rPr lang="en-US" sz="1200" b="1" dirty="0">
+                          <a:solidFill>
+                            <a:srgbClr val="14213D"/>
+                          </a:solidFill>
+                        </a:rPr>
+                        <a:t>p</a:t>
+                      </a:r>
+                      <a:endParaRPr lang="en-US" sz="1200" dirty="0"/>
+                    </a:p>
+                  </a:txBody>
+                  <a:tcPr marL="76200" marR="76200" marT="25400" marB="25400">
+                    <a:lnL w="9525" cap="flat" cmpd="sng" algn="ctr">
+                      <a:solidFill>
+                        <a:srgbClr val="E6E5E0"/>
+                      </a:solidFill>
+                      <a:prstDash val="solid"/>
+                      <a:round/>
+                      <a:headEnd type="none" w="med" len="med"/>
+                      <a:tailEnd type="none" w="med" len="med"/>
+                    </a:lnL>
+                    <a:lnR w="9525" cap="flat" cmpd="sng" algn="ctr">
+                      <a:solidFill>
+                        <a:srgbClr val="E6E5E0"/>
+                      </a:solidFill>
+                      <a:prstDash val="solid"/>
+                      <a:round/>
+                      <a:headEnd type="none" w="med" len="med"/>
+                      <a:tailEnd type="none" w="med" len="med"/>
+                    </a:lnR>
+                    <a:lnT w="9525" cap="flat" cmpd="sng" algn="ctr">
+                      <a:solidFill>
+                        <a:srgbClr val="E6E5E0"/>
+                      </a:solidFill>
+                      <a:prstDash val="solid"/>
+                      <a:round/>
+                      <a:headEnd type="none" w="med" len="med"/>
+                      <a:tailEnd type="none" w="med" len="med"/>
+                    </a:lnT>
+                    <a:lnB w="9525" cap="flat" cmpd="sng" algn="ctr">
+                      <a:solidFill>
+                        <a:srgbClr val="E6E5E0"/>
+                      </a:solidFill>
+                      <a:prstDash val="solid"/>
+                      <a:round/>
+                      <a:headEnd type="none" w="med" len="med"/>
+                      <a:tailEnd type="none" w="med" len="med"/>
+                    </a:lnB>
+                  </a:tcPr>
+                </a:tc>
+              </a:tr>
+              <a:tr h="329184">
+                <a:tc>
+                  <a:txBody>
+                    <a:bodyPr/>
+                    <a:lstStyle/>
+                    <a:p>
+                      <a:pPr indent="0" marL="0">
+                        <a:buNone/>
+                      </a:pPr>
+                      <a:r>
+                        <a:rPr lang="en-US" sz="1200" dirty="0">
+                          <a:solidFill>
+                            <a:srgbClr val="14213D"/>
+                          </a:solidFill>
+                        </a:rPr>
+                        <a:t>Доля НПР, защитивших диссертации за год</a:t>
+                      </a:r>
+                      <a:endParaRPr lang="en-US" sz="1200" dirty="0"/>
+                    </a:p>
+                  </a:txBody>
+                  <a:tcPr marL="76200" marR="76200" marT="25400" marB="25400">
+                    <a:lnL w="9525" cap="flat" cmpd="sng" algn="ctr">
+                      <a:solidFill>
+                        <a:srgbClr val="E6E5E0"/>
+                      </a:solidFill>
+                      <a:prstDash val="solid"/>
+                      <a:round/>
+                      <a:headEnd type="none" w="med" len="med"/>
+                      <a:tailEnd type="none" w="med" len="med"/>
+                    </a:lnL>
+                    <a:lnR w="9525" cap="flat" cmpd="sng" algn="ctr">
+                      <a:solidFill>
+                        <a:srgbClr val="E6E5E0"/>
+                      </a:solidFill>
+                      <a:prstDash val="solid"/>
+                      <a:round/>
+                      <a:headEnd type="none" w="med" len="med"/>
+                      <a:tailEnd type="none" w="med" len="med"/>
+                    </a:lnR>
+                    <a:lnT w="9525" cap="flat" cmpd="sng" algn="ctr">
+                      <a:solidFill>
+                        <a:srgbClr val="E6E5E0"/>
+                      </a:solidFill>
+                      <a:prstDash val="solid"/>
+                      <a:round/>
+                      <a:headEnd type="none" w="med" len="med"/>
+                      <a:tailEnd type="none" w="med" len="med"/>
+                    </a:lnT>
+                    <a:lnB w="9525" cap="flat" cmpd="sng" algn="ctr">
+                      <a:solidFill>
+                        <a:srgbClr val="E6E5E0"/>
+                      </a:solidFill>
+                      <a:prstDash val="solid"/>
+                      <a:round/>
+                      <a:headEnd type="none" w="med" len="med"/>
+                      <a:tailEnd type="none" w="med" len="med"/>
+                    </a:lnB>
+                  </a:tcPr>
+                </a:tc>
+                <a:tc>
+                  <a:txBody>
+                    <a:bodyPr/>
+                    <a:lstStyle/>
+                    <a:p>
+                      <a:pPr indent="0" marL="0">
+                        <a:buNone/>
+                      </a:pPr>
+                      <a:r>
+                        <a:rPr lang="en-US" sz="1200" b="1" dirty="0">
+                          <a:solidFill>
+                            <a:srgbClr val="EB6834"/>
+                          </a:solidFill>
+                        </a:rPr>
+                        <a:t>1.30</a:t>
+                      </a:r>
+                      <a:endParaRPr lang="en-US" sz="1200" dirty="0"/>
+                    </a:p>
+                  </a:txBody>
+                  <a:tcPr marL="76200" marR="76200" marT="25400" marB="25400">
+                    <a:lnL w="9525" cap="flat" cmpd="sng" algn="ctr">
+                      <a:solidFill>
+                        <a:srgbClr val="E6E5E0"/>
+                      </a:solidFill>
+                      <a:prstDash val="solid"/>
+                      <a:round/>
+                      <a:headEnd type="none" w="med" len="med"/>
+                      <a:tailEnd type="none" w="med" len="med"/>
+                    </a:lnL>
+                    <a:lnR w="9525" cap="flat" cmpd="sng" algn="ctr">
+                      <a:solidFill>
+                        <a:srgbClr val="E6E5E0"/>
+                      </a:solidFill>
+                      <a:prstDash val="solid"/>
+                      <a:round/>
+                      <a:headEnd type="none" w="med" len="med"/>
+                      <a:tailEnd type="none" w="med" len="med"/>
+                    </a:lnR>
+                    <a:lnT w="9525" cap="flat" cmpd="sng" algn="ctr">
+                      <a:solidFill>
+                        <a:srgbClr val="E6E5E0"/>
+                      </a:solidFill>
+                      <a:prstDash val="solid"/>
+                      <a:round/>
+                      <a:headEnd type="none" w="med" len="med"/>
+                      <a:tailEnd type="none" w="med" len="med"/>
+                    </a:lnT>
+                    <a:lnB w="9525" cap="flat" cmpd="sng" algn="ctr">
+                      <a:solidFill>
+                        <a:srgbClr val="E6E5E0"/>
+                      </a:solidFill>
+                      <a:prstDash val="solid"/>
+                      <a:round/>
+                      <a:headEnd type="none" w="med" len="med"/>
+                      <a:tailEnd type="none" w="med" len="med"/>
+                    </a:lnB>
+                  </a:tcPr>
+                </a:tc>
+                <a:tc>
+                  <a:txBody>
+                    <a:bodyPr/>
+                    <a:lstStyle/>
+                    <a:p>
+                      <a:pPr indent="0" marL="0">
+                        <a:buNone/>
+                      </a:pPr>
+                      <a:r>
+                        <a:rPr lang="en-US" sz="1200" dirty="0">
+                          <a:solidFill>
+                            <a:srgbClr val="14213D"/>
+                          </a:solidFill>
+                        </a:rPr>
+                        <a:t>&lt;0.001</a:t>
+                      </a:r>
+                      <a:endParaRPr lang="en-US" sz="1200" dirty="0"/>
+                    </a:p>
+                  </a:txBody>
+                  <a:tcPr marL="76200" marR="76200" marT="25400" marB="25400">
+                    <a:lnL w="9525" cap="flat" cmpd="sng" algn="ctr">
+                      <a:solidFill>
+                        <a:srgbClr val="E6E5E0"/>
+                      </a:solidFill>
+                      <a:prstDash val="solid"/>
+                      <a:round/>
+                      <a:headEnd type="none" w="med" len="med"/>
+                      <a:tailEnd type="none" w="med" len="med"/>
+                    </a:lnL>
+                    <a:lnR w="9525" cap="flat" cmpd="sng" algn="ctr">
+                      <a:solidFill>
+                        <a:srgbClr val="E6E5E0"/>
+                      </a:solidFill>
+                      <a:prstDash val="solid"/>
+                      <a:round/>
+                      <a:headEnd type="none" w="med" len="med"/>
+                      <a:tailEnd type="none" w="med" len="med"/>
+                    </a:lnR>
+                    <a:lnT w="9525" cap="flat" cmpd="sng" algn="ctr">
+                      <a:solidFill>
+                        <a:srgbClr val="E6E5E0"/>
+                      </a:solidFill>
+                      <a:prstDash val="solid"/>
+                      <a:round/>
+                      <a:headEnd type="none" w="med" len="med"/>
+                      <a:tailEnd type="none" w="med" len="med"/>
+                    </a:lnT>
+                    <a:lnB w="9525" cap="flat" cmpd="sng" algn="ctr">
+                      <a:solidFill>
+                        <a:srgbClr val="E6E5E0"/>
+                      </a:solidFill>
+                      <a:prstDash val="solid"/>
+                      <a:round/>
+                      <a:headEnd type="none" w="med" len="med"/>
+                      <a:tailEnd type="none" w="med" len="med"/>
+                    </a:lnB>
+                  </a:tcPr>
+                </a:tc>
+              </a:tr>
+              <a:tr h="329184">
+                <a:tc>
+                  <a:txBody>
+                    <a:bodyPr/>
+                    <a:lstStyle/>
+                    <a:p>
+                      <a:pPr indent="0" marL="0">
+                        <a:buNone/>
+                      </a:pPr>
+                      <a:r>
+                        <a:rPr lang="en-US" sz="1200" dirty="0">
+                          <a:solidFill>
+                            <a:srgbClr val="14213D"/>
+                          </a:solidFill>
+                        </a:rPr>
+                        <a:t>Аспиранты на 100 студентов</a:t>
+                      </a:r>
+                      <a:endParaRPr lang="en-US" sz="1200" dirty="0"/>
+                    </a:p>
+                  </a:txBody>
+                  <a:tcPr marL="76200" marR="76200" marT="25400" marB="25400">
+                    <a:lnL w="9525" cap="flat" cmpd="sng" algn="ctr">
+                      <a:solidFill>
+                        <a:srgbClr val="E6E5E0"/>
+                      </a:solidFill>
+                      <a:prstDash val="solid"/>
+                      <a:round/>
+                      <a:headEnd type="none" w="med" len="med"/>
+                      <a:tailEnd type="none" w="med" len="med"/>
+                    </a:lnL>
+                    <a:lnR w="9525" cap="flat" cmpd="sng" algn="ctr">
+                      <a:solidFill>
+                        <a:srgbClr val="E6E5E0"/>
+                      </a:solidFill>
+                      <a:prstDash val="solid"/>
+                      <a:round/>
+                      <a:headEnd type="none" w="med" len="med"/>
+                      <a:tailEnd type="none" w="med" len="med"/>
+                    </a:lnR>
+                    <a:lnT w="9525" cap="flat" cmpd="sng" algn="ctr">
+                      <a:solidFill>
+                        <a:srgbClr val="E6E5E0"/>
+                      </a:solidFill>
+                      <a:prstDash val="solid"/>
+                      <a:round/>
+                      <a:headEnd type="none" w="med" len="med"/>
+                      <a:tailEnd type="none" w="med" len="med"/>
+                    </a:lnT>
+                    <a:lnB w="9525" cap="flat" cmpd="sng" algn="ctr">
+                      <a:solidFill>
+                        <a:srgbClr val="E6E5E0"/>
+                      </a:solidFill>
+                      <a:prstDash val="solid"/>
+                      <a:round/>
+                      <a:headEnd type="none" w="med" len="med"/>
+                      <a:tailEnd type="none" w="med" len="med"/>
+                    </a:lnB>
+                  </a:tcPr>
+                </a:tc>
+                <a:tc>
+                  <a:txBody>
+                    <a:bodyPr/>
+                    <a:lstStyle/>
+                    <a:p>
+                      <a:pPr indent="0" marL="0">
+                        <a:buNone/>
+                      </a:pPr>
+                      <a:r>
+                        <a:rPr lang="en-US" sz="1200" b="1" dirty="0">
+                          <a:solidFill>
+                            <a:srgbClr val="EB6834"/>
+                          </a:solidFill>
+                        </a:rPr>
+                        <a:t>1.17</a:t>
+                      </a:r>
+                      <a:endParaRPr lang="en-US" sz="1200" dirty="0"/>
+                    </a:p>
+                  </a:txBody>
+                  <a:tcPr marL="76200" marR="76200" marT="25400" marB="25400">
+                    <a:lnL w="9525" cap="flat" cmpd="sng" algn="ctr">
+                      <a:solidFill>
+                        <a:srgbClr val="E6E5E0"/>
+                      </a:solidFill>
+                      <a:prstDash val="solid"/>
+                      <a:round/>
+                      <a:headEnd type="none" w="med" len="med"/>
+                      <a:tailEnd type="none" w="med" len="med"/>
+                    </a:lnL>
+                    <a:lnR w="9525" cap="flat" cmpd="sng" algn="ctr">
+                      <a:solidFill>
+                        <a:srgbClr val="E6E5E0"/>
+                      </a:solidFill>
+                      <a:prstDash val="solid"/>
+                      <a:round/>
+                      <a:headEnd type="none" w="med" len="med"/>
+                      <a:tailEnd type="none" w="med" len="med"/>
+                    </a:lnR>
+                    <a:lnT w="9525" cap="flat" cmpd="sng" algn="ctr">
+                      <a:solidFill>
+                        <a:srgbClr val="E6E5E0"/>
+                      </a:solidFill>
+                      <a:prstDash val="solid"/>
+                      <a:round/>
+                      <a:headEnd type="none" w="med" len="med"/>
+                      <a:tailEnd type="none" w="med" len="med"/>
+                    </a:lnT>
+                    <a:lnB w="9525" cap="flat" cmpd="sng" algn="ctr">
+                      <a:solidFill>
+                        <a:srgbClr val="E6E5E0"/>
+                      </a:solidFill>
+                      <a:prstDash val="solid"/>
+                      <a:round/>
+                      <a:headEnd type="none" w="med" len="med"/>
+                      <a:tailEnd type="none" w="med" len="med"/>
+                    </a:lnB>
+                  </a:tcPr>
+                </a:tc>
+                <a:tc>
+                  <a:txBody>
+                    <a:bodyPr/>
+                    <a:lstStyle/>
+                    <a:p>
+                      <a:pPr indent="0" marL="0">
+                        <a:buNone/>
+                      </a:pPr>
+                      <a:r>
+                        <a:rPr lang="en-US" sz="1200" dirty="0">
+                          <a:solidFill>
+                            <a:srgbClr val="14213D"/>
+                          </a:solidFill>
+                        </a:rPr>
+                        <a:t>0.049</a:t>
+                      </a:r>
+                      <a:endParaRPr lang="en-US" sz="1200" dirty="0"/>
+                    </a:p>
+                  </a:txBody>
+                  <a:tcPr marL="76200" marR="76200" marT="25400" marB="25400">
+                    <a:lnL w="9525" cap="flat" cmpd="sng" algn="ctr">
+                      <a:solidFill>
+                        <a:srgbClr val="E6E5E0"/>
+                      </a:solidFill>
+                      <a:prstDash val="solid"/>
+                      <a:round/>
+                      <a:headEnd type="none" w="med" len="med"/>
+                      <a:tailEnd type="none" w="med" len="med"/>
+                    </a:lnL>
+                    <a:lnR w="9525" cap="flat" cmpd="sng" algn="ctr">
+                      <a:solidFill>
+                        <a:srgbClr val="E6E5E0"/>
+                      </a:solidFill>
+                      <a:prstDash val="solid"/>
+                      <a:round/>
+                      <a:headEnd type="none" w="med" len="med"/>
+                      <a:tailEnd type="none" w="med" len="med"/>
+                    </a:lnR>
+                    <a:lnT w="9525" cap="flat" cmpd="sng" algn="ctr">
+                      <a:solidFill>
+                        <a:srgbClr val="E6E5E0"/>
+                      </a:solidFill>
+                      <a:prstDash val="solid"/>
+                      <a:round/>
+                      <a:headEnd type="none" w="med" len="med"/>
+                      <a:tailEnd type="none" w="med" len="med"/>
+                    </a:lnT>
+                    <a:lnB w="9525" cap="flat" cmpd="sng" algn="ctr">
+                      <a:solidFill>
+                        <a:srgbClr val="E6E5E0"/>
+                      </a:solidFill>
+                      <a:prstDash val="solid"/>
+                      <a:round/>
+                      <a:headEnd type="none" w="med" len="med"/>
+                      <a:tailEnd type="none" w="med" len="med"/>
+                    </a:lnB>
+                  </a:tcPr>
+                </a:tc>
+              </a:tr>
+              <a:tr h="329184">
+                <a:tc>
+                  <a:txBody>
+                    <a:bodyPr/>
+                    <a:lstStyle/>
+                    <a:p>
+                      <a:pPr indent="0" marL="0">
+                        <a:buNone/>
+                      </a:pPr>
+                      <a:r>
+                        <a:rPr lang="en-US" sz="1200" dirty="0">
+                          <a:solidFill>
+                            <a:srgbClr val="14213D"/>
+                          </a:solidFill>
+                        </a:rPr>
+                        <a:t>Средний балл ЕГЭ</a:t>
+                      </a:r>
+                      <a:endParaRPr lang="en-US" sz="1200" dirty="0"/>
+                    </a:p>
+                  </a:txBody>
+                  <a:tcPr marL="76200" marR="76200" marT="25400" marB="25400">
+                    <a:lnL w="9525" cap="flat" cmpd="sng" algn="ctr">
+                      <a:solidFill>
+                        <a:srgbClr val="E6E5E0"/>
+                      </a:solidFill>
+                      <a:prstDash val="solid"/>
+                      <a:round/>
+                      <a:headEnd type="none" w="med" len="med"/>
+                      <a:tailEnd type="none" w="med" len="med"/>
+                    </a:lnL>
+                    <a:lnR w="9525" cap="flat" cmpd="sng" algn="ctr">
+                      <a:solidFill>
+                        <a:srgbClr val="E6E5E0"/>
+                      </a:solidFill>
+                      <a:prstDash val="solid"/>
+                      <a:round/>
+                      <a:headEnd type="none" w="med" len="med"/>
+                      <a:tailEnd type="none" w="med" len="med"/>
+                    </a:lnR>
+                    <a:lnT w="9525" cap="flat" cmpd="sng" algn="ctr">
+                      <a:solidFill>
+                        <a:srgbClr val="E6E5E0"/>
+                      </a:solidFill>
+                      <a:prstDash val="solid"/>
+                      <a:round/>
+                      <a:headEnd type="none" w="med" len="med"/>
+                      <a:tailEnd type="none" w="med" len="med"/>
+                    </a:lnT>
+                    <a:lnB w="9525" cap="flat" cmpd="sng" algn="ctr">
+                      <a:solidFill>
+                        <a:srgbClr val="E6E5E0"/>
+                      </a:solidFill>
+                      <a:prstDash val="solid"/>
+                      <a:round/>
+                      <a:headEnd type="none" w="med" len="med"/>
+                      <a:tailEnd type="none" w="med" len="med"/>
+                    </a:lnB>
+                  </a:tcPr>
+                </a:tc>
+                <a:tc>
+                  <a:txBody>
+                    <a:bodyPr/>
+                    <a:lstStyle/>
+                    <a:p>
+                      <a:pPr indent="0" marL="0">
+                        <a:buNone/>
+                      </a:pPr>
+                      <a:r>
+                        <a:rPr lang="en-US" sz="1200" dirty="0">
+                          <a:solidFill>
+                            <a:srgbClr val="14213D"/>
+                          </a:solidFill>
+                        </a:rPr>
+                        <a:t>0.85</a:t>
+                      </a:r>
+                      <a:endParaRPr lang="en-US" sz="1200" dirty="0"/>
+                    </a:p>
+                  </a:txBody>
+                  <a:tcPr marL="76200" marR="76200" marT="25400" marB="25400">
+                    <a:lnL w="9525" cap="flat" cmpd="sng" algn="ctr">
+                      <a:solidFill>
+                        <a:srgbClr val="E6E5E0"/>
+                      </a:solidFill>
+                      <a:prstDash val="solid"/>
+                      <a:round/>
+                      <a:headEnd type="none" w="med" len="med"/>
+                      <a:tailEnd type="none" w="med" len="med"/>
+                    </a:lnL>
+                    <a:lnR w="9525" cap="flat" cmpd="sng" algn="ctr">
+                      <a:solidFill>
+                        <a:srgbClr val="E6E5E0"/>
+                      </a:solidFill>
+                      <a:prstDash val="solid"/>
+                      <a:round/>
+                      <a:headEnd type="none" w="med" len="med"/>
+                      <a:tailEnd type="none" w="med" len="med"/>
+                    </a:lnR>
+                    <a:lnT w="9525" cap="flat" cmpd="sng" algn="ctr">
+                      <a:solidFill>
+                        <a:srgbClr val="E6E5E0"/>
+                      </a:solidFill>
+                      <a:prstDash val="solid"/>
+                      <a:round/>
+                      <a:headEnd type="none" w="med" len="med"/>
+                      <a:tailEnd type="none" w="med" len="med"/>
+                    </a:lnT>
+                    <a:lnB w="9525" cap="flat" cmpd="sng" algn="ctr">
+                      <a:solidFill>
+                        <a:srgbClr val="E6E5E0"/>
+                      </a:solidFill>
+                      <a:prstDash val="solid"/>
+                      <a:round/>
+                      <a:headEnd type="none" w="med" len="med"/>
+                      <a:tailEnd type="none" w="med" len="med"/>
+                    </a:lnB>
+                  </a:tcPr>
+                </a:tc>
+                <a:tc>
+                  <a:txBody>
+                    <a:bodyPr/>
+                    <a:lstStyle/>
+                    <a:p>
+                      <a:pPr indent="0" marL="0">
+                        <a:buNone/>
+                      </a:pPr>
+                      <a:r>
+                        <a:rPr lang="en-US" sz="1200" dirty="0">
+                          <a:solidFill>
+                            <a:srgbClr val="14213D"/>
+                          </a:solidFill>
+                        </a:rPr>
+                        <a:t>0.108</a:t>
+                      </a:r>
+                      <a:endParaRPr lang="en-US" sz="1200" dirty="0"/>
+                    </a:p>
+                  </a:txBody>
+                  <a:tcPr marL="76200" marR="76200" marT="25400" marB="25400">
+                    <a:lnL w="9525" cap="flat" cmpd="sng" algn="ctr">
+                      <a:solidFill>
+                        <a:srgbClr val="E6E5E0"/>
+                      </a:solidFill>
+                      <a:prstDash val="solid"/>
+                      <a:round/>
+                      <a:headEnd type="none" w="med" len="med"/>
+                      <a:tailEnd type="none" w="med" len="med"/>
+                    </a:lnL>
+                    <a:lnR w="9525" cap="flat" cmpd="sng" algn="ctr">
+                      <a:solidFill>
+                        <a:srgbClr val="E6E5E0"/>
+                      </a:solidFill>
+                      <a:prstDash val="solid"/>
+                      <a:round/>
+                      <a:headEnd type="none" w="med" len="med"/>
+                      <a:tailEnd type="none" w="med" len="med"/>
+                    </a:lnR>
+                    <a:lnT w="9525" cap="flat" cmpd="sng" algn="ctr">
+                      <a:solidFill>
+                        <a:srgbClr val="E6E5E0"/>
+                      </a:solidFill>
+                      <a:prstDash val="solid"/>
+                      <a:round/>
+                      <a:headEnd type="none" w="med" len="med"/>
+                      <a:tailEnd type="none" w="med" len="med"/>
+                    </a:lnT>
+                    <a:lnB w="9525" cap="flat" cmpd="sng" algn="ctr">
+                      <a:solidFill>
+                        <a:srgbClr val="E6E5E0"/>
+                      </a:solidFill>
+                      <a:prstDash val="solid"/>
+                      <a:round/>
+                      <a:headEnd type="none" w="med" len="med"/>
+                      <a:tailEnd type="none" w="med" len="med"/>
+                    </a:lnB>
+                  </a:tcPr>
+                </a:tc>
+              </a:tr>
+              <a:tr h="329184">
+                <a:tc>
+                  <a:txBody>
+                    <a:bodyPr/>
+                    <a:lstStyle/>
+                    <a:p>
+                      <a:pPr indent="0" marL="0">
+                        <a:buNone/>
+                      </a:pPr>
+                      <a:r>
+                        <a:rPr lang="en-US" sz="1200" dirty="0">
+                          <a:solidFill>
+                            <a:srgbClr val="14213D"/>
+                          </a:solidFill>
+                        </a:rPr>
+                        <a:t>Доходы на 1 студента</a:t>
+                      </a:r>
+                      <a:endParaRPr lang="en-US" sz="1200" dirty="0"/>
+                    </a:p>
+                  </a:txBody>
+                  <a:tcPr marL="76200" marR="76200" marT="25400" marB="25400">
+                    <a:lnL w="9525" cap="flat" cmpd="sng" algn="ctr">
+                      <a:solidFill>
+                        <a:srgbClr val="E6E5E0"/>
+                      </a:solidFill>
+                      <a:prstDash val="solid"/>
+                      <a:round/>
+                      <a:headEnd type="none" w="med" len="med"/>
+                      <a:tailEnd type="none" w="med" len="med"/>
+                    </a:lnL>
+                    <a:lnR w="9525" cap="flat" cmpd="sng" algn="ctr">
+                      <a:solidFill>
+                        <a:srgbClr val="E6E5E0"/>
+                      </a:solidFill>
+                      <a:prstDash val="solid"/>
+                      <a:round/>
+                      <a:headEnd type="none" w="med" len="med"/>
+                      <a:tailEnd type="none" w="med" len="med"/>
+                    </a:lnR>
+                    <a:lnT w="9525" cap="flat" cmpd="sng" algn="ctr">
+                      <a:solidFill>
+                        <a:srgbClr val="E6E5E0"/>
+                      </a:solidFill>
+                      <a:prstDash val="solid"/>
+                      <a:round/>
+                      <a:headEnd type="none" w="med" len="med"/>
+                      <a:tailEnd type="none" w="med" len="med"/>
+                    </a:lnT>
+                    <a:lnB w="9525" cap="flat" cmpd="sng" algn="ctr">
+                      <a:solidFill>
+                        <a:srgbClr val="E6E5E0"/>
+                      </a:solidFill>
+                      <a:prstDash val="solid"/>
+                      <a:round/>
+                      <a:headEnd type="none" w="med" len="med"/>
+                      <a:tailEnd type="none" w="med" len="med"/>
+                    </a:lnB>
+                  </a:tcPr>
+                </a:tc>
+                <a:tc>
+                  <a:txBody>
+                    <a:bodyPr/>
+                    <a:lstStyle/>
+                    <a:p>
+                      <a:pPr indent="0" marL="0">
+                        <a:buNone/>
+                      </a:pPr>
+                      <a:r>
+                        <a:rPr lang="en-US" sz="1200" dirty="0">
+                          <a:solidFill>
+                            <a:srgbClr val="14213D"/>
+                          </a:solidFill>
+                        </a:rPr>
+                        <a:t>1.19</a:t>
+                      </a:r>
+                      <a:endParaRPr lang="en-US" sz="1200" dirty="0"/>
+                    </a:p>
+                  </a:txBody>
+                  <a:tcPr marL="76200" marR="76200" marT="25400" marB="25400">
+                    <a:lnL w="9525" cap="flat" cmpd="sng" algn="ctr">
+                      <a:solidFill>
+                        <a:srgbClr val="E6E5E0"/>
+                      </a:solidFill>
+                      <a:prstDash val="solid"/>
+                      <a:round/>
+                      <a:headEnd type="none" w="med" len="med"/>
+                      <a:tailEnd type="none" w="med" len="med"/>
+                    </a:lnL>
+                    <a:lnR w="9525" cap="flat" cmpd="sng" algn="ctr">
+                      <a:solidFill>
+                        <a:srgbClr val="E6E5E0"/>
+                      </a:solidFill>
+                      <a:prstDash val="solid"/>
+                      <a:round/>
+                      <a:headEnd type="none" w="med" len="med"/>
+                      <a:tailEnd type="none" w="med" len="med"/>
+                    </a:lnR>
+                    <a:lnT w="9525" cap="flat" cmpd="sng" algn="ctr">
+                      <a:solidFill>
+                        <a:srgbClr val="E6E5E0"/>
+                      </a:solidFill>
+                      <a:prstDash val="solid"/>
+                      <a:round/>
+                      <a:headEnd type="none" w="med" len="med"/>
+                      <a:tailEnd type="none" w="med" len="med"/>
+                    </a:lnT>
+                    <a:lnB w="9525" cap="flat" cmpd="sng" algn="ctr">
+                      <a:solidFill>
+                        <a:srgbClr val="E6E5E0"/>
+                      </a:solidFill>
+                      <a:prstDash val="solid"/>
+                      <a:round/>
+                      <a:headEnd type="none" w="med" len="med"/>
+                      <a:tailEnd type="none" w="med" len="med"/>
+                    </a:lnB>
+                  </a:tcPr>
+                </a:tc>
+                <a:tc>
+                  <a:txBody>
+                    <a:bodyPr/>
+                    <a:lstStyle/>
+                    <a:p>
+                      <a:pPr indent="0" marL="0">
+                        <a:buNone/>
+                      </a:pPr>
+                      <a:r>
+                        <a:rPr lang="en-US" sz="1200" dirty="0">
+                          <a:solidFill>
+                            <a:srgbClr val="14213D"/>
+                          </a:solidFill>
+                        </a:rPr>
+                        <a:t>0.086</a:t>
+                      </a:r>
+                      <a:endParaRPr lang="en-US" sz="1200" dirty="0"/>
+                    </a:p>
+                  </a:txBody>
+                  <a:tcPr marL="76200" marR="76200" marT="25400" marB="25400">
+                    <a:lnL w="9525" cap="flat" cmpd="sng" algn="ctr">
+                      <a:solidFill>
+                        <a:srgbClr val="E6E5E0"/>
+                      </a:solidFill>
+                      <a:prstDash val="solid"/>
+                      <a:round/>
+                      <a:headEnd type="none" w="med" len="med"/>
+                      <a:tailEnd type="none" w="med" len="med"/>
+                    </a:lnL>
+                    <a:lnR w="9525" cap="flat" cmpd="sng" algn="ctr">
+                      <a:solidFill>
+                        <a:srgbClr val="E6E5E0"/>
+                      </a:solidFill>
+                      <a:prstDash val="solid"/>
+                      <a:round/>
+                      <a:headEnd type="none" w="med" len="med"/>
+                      <a:tailEnd type="none" w="med" len="med"/>
+                    </a:lnR>
+                    <a:lnT w="9525" cap="flat" cmpd="sng" algn="ctr">
+                      <a:solidFill>
+                        <a:srgbClr val="E6E5E0"/>
+                      </a:solidFill>
+                      <a:prstDash val="solid"/>
+                      <a:round/>
+                      <a:headEnd type="none" w="med" len="med"/>
+                      <a:tailEnd type="none" w="med" len="med"/>
+                    </a:lnT>
+                    <a:lnB w="9525" cap="flat" cmpd="sng" algn="ctr">
+                      <a:solidFill>
+                        <a:srgbClr val="E6E5E0"/>
+                      </a:solidFill>
+                      <a:prstDash val="solid"/>
+                      <a:round/>
+                      <a:headEnd type="none" w="med" len="med"/>
+                      <a:tailEnd type="none" w="med" len="med"/>
+                    </a:lnB>
+                  </a:tcPr>
+                </a:tc>
+              </a:tr>
+              <a:tr h="329184">
+                <a:tc>
+                  <a:txBody>
+                    <a:bodyPr/>
+                    <a:lstStyle/>
+                    <a:p>
+                      <a:pPr indent="0" marL="0">
+                        <a:buNone/>
+                      </a:pPr>
+                      <a:r>
+                        <a:rPr lang="en-US" sz="1200" dirty="0">
+                          <a:solidFill>
+                            <a:srgbClr val="14213D"/>
+                          </a:solidFill>
+                        </a:rPr>
+                        <a:t>Гранты на 100 НПР</a:t>
+                      </a:r>
+                      <a:endParaRPr lang="en-US" sz="1200" dirty="0"/>
+                    </a:p>
+                  </a:txBody>
+                  <a:tcPr marL="76200" marR="76200" marT="25400" marB="25400">
+                    <a:lnL w="9525" cap="flat" cmpd="sng" algn="ctr">
+                      <a:solidFill>
+                        <a:srgbClr val="E6E5E0"/>
+                      </a:solidFill>
+                      <a:prstDash val="solid"/>
+                      <a:round/>
+                      <a:headEnd type="none" w="med" len="med"/>
+                      <a:tailEnd type="none" w="med" len="med"/>
+                    </a:lnL>
+                    <a:lnR w="9525" cap="flat" cmpd="sng" algn="ctr">
+                      <a:solidFill>
+                        <a:srgbClr val="E6E5E0"/>
+                      </a:solidFill>
+                      <a:prstDash val="solid"/>
+                      <a:round/>
+                      <a:headEnd type="none" w="med" len="med"/>
+                      <a:tailEnd type="none" w="med" len="med"/>
+                    </a:lnR>
+                    <a:lnT w="9525" cap="flat" cmpd="sng" algn="ctr">
+                      <a:solidFill>
+                        <a:srgbClr val="E6E5E0"/>
+                      </a:solidFill>
+                      <a:prstDash val="solid"/>
+                      <a:round/>
+                      <a:headEnd type="none" w="med" len="med"/>
+                      <a:tailEnd type="none" w="med" len="med"/>
+                    </a:lnT>
+                    <a:lnB w="9525" cap="flat" cmpd="sng" algn="ctr">
+                      <a:solidFill>
+                        <a:srgbClr val="E6E5E0"/>
+                      </a:solidFill>
+                      <a:prstDash val="solid"/>
+                      <a:round/>
+                      <a:headEnd type="none" w="med" len="med"/>
+                      <a:tailEnd type="none" w="med" len="med"/>
+                    </a:lnB>
+                  </a:tcPr>
+                </a:tc>
+                <a:tc>
+                  <a:txBody>
+                    <a:bodyPr/>
+                    <a:lstStyle/>
+                    <a:p>
+                      <a:pPr indent="0" marL="0">
+                        <a:buNone/>
+                      </a:pPr>
+                      <a:r>
+                        <a:rPr lang="en-US" sz="1200" dirty="0">
+                          <a:solidFill>
+                            <a:srgbClr val="14213D"/>
+                          </a:solidFill>
+                        </a:rPr>
+                        <a:t>0.98</a:t>
+                      </a:r>
+                      <a:endParaRPr lang="en-US" sz="1200" dirty="0"/>
+                    </a:p>
+                  </a:txBody>
+                  <a:tcPr marL="76200" marR="76200" marT="25400" marB="25400">
+                    <a:lnL w="9525" cap="flat" cmpd="sng" algn="ctr">
+                      <a:solidFill>
+                        <a:srgbClr val="E6E5E0"/>
+                      </a:solidFill>
+                      <a:prstDash val="solid"/>
+                      <a:round/>
+                      <a:headEnd type="none" w="med" len="med"/>
+                      <a:tailEnd type="none" w="med" len="med"/>
+                    </a:lnL>
+                    <a:lnR w="9525" cap="flat" cmpd="sng" algn="ctr">
+                      <a:solidFill>
+                        <a:srgbClr val="E6E5E0"/>
+                      </a:solidFill>
+                      <a:prstDash val="solid"/>
+                      <a:round/>
+                      <a:headEnd type="none" w="med" len="med"/>
+                      <a:tailEnd type="none" w="med" len="med"/>
+                    </a:lnR>
+                    <a:lnT w="9525" cap="flat" cmpd="sng" algn="ctr">
+                      <a:solidFill>
+                        <a:srgbClr val="E6E5E0"/>
+                      </a:solidFill>
+                      <a:prstDash val="solid"/>
+                      <a:round/>
+                      <a:headEnd type="none" w="med" len="med"/>
+                      <a:tailEnd type="none" w="med" len="med"/>
+                    </a:lnT>
+                    <a:lnB w="9525" cap="flat" cmpd="sng" algn="ctr">
+                      <a:solidFill>
+                        <a:srgbClr val="E6E5E0"/>
+                      </a:solidFill>
+                      <a:prstDash val="solid"/>
+                      <a:round/>
+                      <a:headEnd type="none" w="med" len="med"/>
+                      <a:tailEnd type="none" w="med" len="med"/>
+                    </a:lnB>
+                  </a:tcPr>
+                </a:tc>
+                <a:tc>
+                  <a:txBody>
+                    <a:bodyPr/>
+                    <a:lstStyle/>
+                    <a:p>
+                      <a:pPr indent="0" marL="0">
+                        <a:buNone/>
+                      </a:pPr>
+                      <a:r>
+                        <a:rPr lang="en-US" sz="1200" dirty="0">
+                          <a:solidFill>
+                            <a:srgbClr val="14213D"/>
+                          </a:solidFill>
+                        </a:rPr>
+                        <a:t>0.710</a:t>
+                      </a:r>
+                      <a:endParaRPr lang="en-US" sz="1200" dirty="0"/>
+                    </a:p>
+                  </a:txBody>
+                  <a:tcPr marL="76200" marR="76200" marT="25400" marB="25400">
+                    <a:lnL w="9525" cap="flat" cmpd="sng" algn="ctr">
+                      <a:solidFill>
+                        <a:srgbClr val="E6E5E0"/>
+                      </a:solidFill>
+                      <a:prstDash val="solid"/>
+                      <a:round/>
+                      <a:headEnd type="none" w="med" len="med"/>
+                      <a:tailEnd type="none" w="med" len="med"/>
+                    </a:lnL>
+                    <a:lnR w="9525" cap="flat" cmpd="sng" algn="ctr">
+                      <a:solidFill>
+                        <a:srgbClr val="E6E5E0"/>
+                      </a:solidFill>
+                      <a:prstDash val="solid"/>
+                      <a:round/>
+                      <a:headEnd type="none" w="med" len="med"/>
+                      <a:tailEnd type="none" w="med" len="med"/>
+                    </a:lnR>
+                    <a:lnT w="9525" cap="flat" cmpd="sng" algn="ctr">
+                      <a:solidFill>
+                        <a:srgbClr val="E6E5E0"/>
+                      </a:solidFill>
+                      <a:prstDash val="solid"/>
+                      <a:round/>
+                      <a:headEnd type="none" w="med" len="med"/>
+                      <a:tailEnd type="none" w="med" len="med"/>
+                    </a:lnT>
+                    <a:lnB w="9525" cap="flat" cmpd="sng" algn="ctr">
+                      <a:solidFill>
+                        <a:srgbClr val="E6E5E0"/>
+                      </a:solidFill>
+                      <a:prstDash val="solid"/>
+                      <a:round/>
+                      <a:headEnd type="none" w="med" len="med"/>
+                      <a:tailEnd type="none" w="med" len="med"/>
+                    </a:lnB>
+                  </a:tcPr>
+                </a:tc>
+              </a:tr>
+              <a:tr h="329184">
+                <a:tc>
+                  <a:txBody>
+                    <a:bodyPr/>
+                    <a:lstStyle/>
+                    <a:p>
+                      <a:pPr indent="0" marL="0">
+                        <a:buNone/>
+                      </a:pPr>
+                      <a:r>
+                        <a:rPr lang="en-US" sz="1200" dirty="0">
+                          <a:solidFill>
+                            <a:srgbClr val="14213D"/>
+                          </a:solidFill>
+                        </a:rPr>
+                        <a:t>Доля доходов от НИОКР</a:t>
+                      </a:r>
+                      <a:endParaRPr lang="en-US" sz="1200" dirty="0"/>
+                    </a:p>
+                  </a:txBody>
+                  <a:tcPr marL="76200" marR="76200" marT="25400" marB="25400">
+                    <a:lnL w="9525" cap="flat" cmpd="sng" algn="ctr">
+                      <a:solidFill>
+                        <a:srgbClr val="E6E5E0"/>
+                      </a:solidFill>
+                      <a:prstDash val="solid"/>
+                      <a:round/>
+                      <a:headEnd type="none" w="med" len="med"/>
+                      <a:tailEnd type="none" w="med" len="med"/>
+                    </a:lnL>
+                    <a:lnR w="9525" cap="flat" cmpd="sng" algn="ctr">
+                      <a:solidFill>
+                        <a:srgbClr val="E6E5E0"/>
+                      </a:solidFill>
+                      <a:prstDash val="solid"/>
+                      <a:round/>
+                      <a:headEnd type="none" w="med" len="med"/>
+                      <a:tailEnd type="none" w="med" len="med"/>
+                    </a:lnR>
+                    <a:lnT w="9525" cap="flat" cmpd="sng" algn="ctr">
+                      <a:solidFill>
+                        <a:srgbClr val="E6E5E0"/>
+                      </a:solidFill>
+                      <a:prstDash val="solid"/>
+                      <a:round/>
+                      <a:headEnd type="none" w="med" len="med"/>
+                      <a:tailEnd type="none" w="med" len="med"/>
+                    </a:lnT>
+                    <a:lnB w="9525" cap="flat" cmpd="sng" algn="ctr">
+                      <a:solidFill>
+                        <a:srgbClr val="E6E5E0"/>
+                      </a:solidFill>
+                      <a:prstDash val="solid"/>
+                      <a:round/>
+                      <a:headEnd type="none" w="med" len="med"/>
+                      <a:tailEnd type="none" w="med" len="med"/>
+                    </a:lnB>
+                  </a:tcPr>
+                </a:tc>
+                <a:tc>
+                  <a:txBody>
+                    <a:bodyPr/>
+                    <a:lstStyle/>
+                    <a:p>
+                      <a:pPr indent="0" marL="0">
+                        <a:buNone/>
+                      </a:pPr>
+                      <a:r>
+                        <a:rPr lang="en-US" sz="1200" dirty="0">
+                          <a:solidFill>
+                            <a:srgbClr val="14213D"/>
+                          </a:solidFill>
+                        </a:rPr>
+                        <a:t>1.00</a:t>
+                      </a:r>
+                      <a:endParaRPr lang="en-US" sz="1200" dirty="0"/>
+                    </a:p>
+                  </a:txBody>
+                  <a:tcPr marL="76200" marR="76200" marT="25400" marB="25400">
+                    <a:lnL w="9525" cap="flat" cmpd="sng" algn="ctr">
+                      <a:solidFill>
+                        <a:srgbClr val="E6E5E0"/>
+                      </a:solidFill>
+                      <a:prstDash val="solid"/>
+                      <a:round/>
+                      <a:headEnd type="none" w="med" len="med"/>
+                      <a:tailEnd type="none" w="med" len="med"/>
+                    </a:lnL>
+                    <a:lnR w="9525" cap="flat" cmpd="sng" algn="ctr">
+                      <a:solidFill>
+                        <a:srgbClr val="E6E5E0"/>
+                      </a:solidFill>
+                      <a:prstDash val="solid"/>
+                      <a:round/>
+                      <a:headEnd type="none" w="med" len="med"/>
+                      <a:tailEnd type="none" w="med" len="med"/>
+                    </a:lnR>
+                    <a:lnT w="9525" cap="flat" cmpd="sng" algn="ctr">
+                      <a:solidFill>
+                        <a:srgbClr val="E6E5E0"/>
+                      </a:solidFill>
+                      <a:prstDash val="solid"/>
+                      <a:round/>
+                      <a:headEnd type="none" w="med" len="med"/>
+                      <a:tailEnd type="none" w="med" len="med"/>
+                    </a:lnT>
+                    <a:lnB w="9525" cap="flat" cmpd="sng" algn="ctr">
+                      <a:solidFill>
+                        <a:srgbClr val="E6E5E0"/>
+                      </a:solidFill>
+                      <a:prstDash val="solid"/>
+                      <a:round/>
+                      <a:headEnd type="none" w="med" len="med"/>
+                      <a:tailEnd type="none" w="med" len="med"/>
+                    </a:lnB>
+                  </a:tcPr>
+                </a:tc>
+                <a:tc>
+                  <a:txBody>
+                    <a:bodyPr/>
+                    <a:lstStyle/>
+                    <a:p>
+                      <a:pPr indent="0" marL="0">
+                        <a:buNone/>
+                      </a:pPr>
+                      <a:r>
+                        <a:rPr lang="en-US" sz="1200" dirty="0">
+                          <a:solidFill>
+                            <a:srgbClr val="14213D"/>
+                          </a:solidFill>
+                        </a:rPr>
+                        <a:t>0.956</a:t>
+                      </a:r>
+                      <a:endParaRPr lang="en-US" sz="1200" dirty="0"/>
+                    </a:p>
+                  </a:txBody>
+                  <a:tcPr marL="76200" marR="76200" marT="25400" marB="25400">
+                    <a:lnL w="9525" cap="flat" cmpd="sng" algn="ctr">
+                      <a:solidFill>
+                        <a:srgbClr val="E6E5E0"/>
+                      </a:solidFill>
+                      <a:prstDash val="solid"/>
+                      <a:round/>
+                      <a:headEnd type="none" w="med" len="med"/>
+                      <a:tailEnd type="none" w="med" len="med"/>
+                    </a:lnL>
+                    <a:lnR w="9525" cap="flat" cmpd="sng" algn="ctr">
+                      <a:solidFill>
+                        <a:srgbClr val="E6E5E0"/>
+                      </a:solidFill>
+                      <a:prstDash val="solid"/>
+                      <a:round/>
+                      <a:headEnd type="none" w="med" len="med"/>
+                      <a:tailEnd type="none" w="med" len="med"/>
+                    </a:lnR>
+                    <a:lnT w="9525" cap="flat" cmpd="sng" algn="ctr">
+                      <a:solidFill>
+                        <a:srgbClr val="E6E5E0"/>
+                      </a:solidFill>
+                      <a:prstDash val="solid"/>
+                      <a:round/>
+                      <a:headEnd type="none" w="med" len="med"/>
+                      <a:tailEnd type="none" w="med" len="med"/>
+                    </a:lnT>
+                    <a:lnB w="9525" cap="flat" cmpd="sng" algn="ctr">
+                      <a:solidFill>
+                        <a:srgbClr val="E6E5E0"/>
+                      </a:solidFill>
+                      <a:prstDash val="solid"/>
+                      <a:round/>
+                      <a:headEnd type="none" w="med" len="med"/>
+                      <a:tailEnd type="none" w="med" len="med"/>
+                    </a:lnB>
+                  </a:tcPr>
+                </a:tc>
+              </a:tr>
+            </a:tbl>
+          </a:graphicData>
+        </a:graphic>
+      </p:graphicFrame>
+      <p:sp>
+        <p:nvSpPr>
+          <p:cNvPr id="12" name="card"/>
+          <p:cNvSpPr/>
+          <p:nvPr/>
+        </p:nvSpPr>
+        <p:spPr>
+          <a:xfrm>
+            <a:off x="6903720" y="3840480"/>
+            <a:ext cx="4754880" cy="2331720"/>
+          </a:xfrm>
+          <a:prstGeom prst="roundRect">
+            <a:avLst>
+              <a:gd name="adj" fmla="val 3137"/>
+            </a:avLst>
+          </a:prstGeom>
+          <a:solidFill>
+            <a:schemeClr val="bg2"/>
+          </a:solidFill>
+          <a:ln w="12700">
+            <a:solidFill>
+              <a:schemeClr val="bg2"/>
+            </a:solidFill>
+            <a:prstDash val="solid"/>
+          </a:ln>
+        </p:spPr>
+      </p:sp>
+      <p:sp>
+        <p:nvSpPr>
+          <p:cNvPr id="13" name="Text 9"/>
+          <p:cNvSpPr txBox="1"/>
+          <p:nvPr/>
+        </p:nvSpPr>
+        <p:spPr>
+          <a:xfrm>
+            <a:off x="7086600" y="3977640"/>
+            <a:ext cx="4434840" cy="2103120"/>
+          </a:xfrm>
+          <a:prstGeom prst="rect">
+            <a:avLst/>
+          </a:prstGeom>
+          <a:noFill/>
+          <a:ln/>
+        </p:spPr>
+        <p:txBody>
+          <a:bodyPr wrap="square" lIns="0" tIns="0" rIns="0" bIns="0" rtlCol="0" anchor="t"/>
+          <a:lstStyle/>
+          <a:p>
+            <a:pPr indent="0" marL="0">
+              <a:spcAft>
+                <a:spcPts val="600"/>
+              </a:spcAft>
+              <a:buNone/>
+            </a:pPr>
+            <a:r>
+              <a:rPr lang="en-US" sz="1300" b="1" dirty="0">
+                <a:solidFill>
+                  <a:schemeClr val="tx1"/>
+                </a:solidFill>
+              </a:rPr>
+              <a:t>H5 подтверждена частично. </a:t>
+            </a:r>
+            <a:pPr indent="0" marL="0">
+              <a:spcAft>
+                <a:spcPts val="600"/>
+              </a:spcAft>
+              <a:buNone/>
+            </a:pPr>
+            <a:r>
+              <a:rPr lang="en-US" sz="1300" dirty="0">
+                <a:solidFill>
+                  <a:schemeClr val="tx1"/>
+                </a:solidFill>
+              </a:rPr>
+              <a:t>Там, где за год защищается больше сотрудников, шансы хотеть уйти выше на 30% при равных индивидуальных факторах (устойчиво без двух крупнейших вузов). Поддержка руководителя там важнее: взаимодействие β = -0.11, p = 0.02. </a:t>
+            </a:r>
+            <a:pPr indent="0" marL="0">
+              <a:spcAft>
+                <a:spcPts val="600"/>
+              </a:spcAft>
+              <a:buNone/>
+            </a:pPr>
+            <a:r>
+              <a:rPr lang="en-US" sz="1300" i="1" dirty="0">
+                <a:solidFill>
+                  <a:schemeClr val="tx1"/>
+                </a:solidFill>
+              </a:rPr>
+              <a:t>Вероятная причина: давление «защищайся быстрее» без ресурсов.</a:t>
             </a:r>
             <a:endParaRPr lang="en-US" sz="1300" dirty="0"/>
           </a:p>

--- a/output/IVO2026_aspiranty_dropout.pptx
+++ b/output/IVO2026_aspiranty_dropout.pptx
@@ -116,23 +116,23 @@
   <p:extLst>
     <p:ext uri="{521415D9-36F7-43E2-AB2F-B90AF26B5E84}">
       <p14:sectionLst xmlns:p14="http://schemas.microsoft.com/office/powerpoint/2010/main">
-        <p14:section name="Вступление" id="{f612aba6-fcfa-292c-7b15-88d4eb232e9b}">
+        <p14:section name="Вступление" id="{c5bae37e-839f-d1e1-459a-e68588cf2795}">
           <p14:sldIdLst>
             <p14:sldId id="256"/>
           </p14:sldIdLst>
         </p14:section>
-        <p14:section name="Вопрос и данные" id="{8c3f5aa2-ffe7-68a0-ac91-56741371e234}">
+        <p14:section name="Вопрос и данные" id="{9f3d3219-19e5-6379-3d1b-c4ee5362a361}">
           <p14:sldIdLst>
             <p14:sldId id="257"/>
             <p14:sldId id="258"/>
           </p14:sldIdLst>
         </p14:section>
-        <p14:section name="Методы" id="{4f60ec3f-d6e9-aa45-7a7e-c6e1bd9ffa53}">
+        <p14:section name="Методы" id="{6db80f17-673a-cf09-3ed7-d939f3299ff1}">
           <p14:sldIdLst>
             <p14:sldId id="259"/>
           </p14:sldIdLst>
         </p14:section>
-        <p14:section name="Результаты" id="{6f5a06c4-84ce-c25b-4144-e2ed74758c9a}">
+        <p14:section name="Результаты" id="{3a467fc7-25c9-13c5-7c97-aedfcc7b519d}">
           <p14:sldIdLst>
             <p14:sldId id="260"/>
             <p14:sldId id="261"/>
@@ -141,7 +141,7 @@
             <p14:sldId id="264"/>
           </p14:sldIdLst>
         </p14:section>
-        <p14:section name="Выводы" id="{b78d92bd-abbf-d8ce-e8e9-d4344bb0729e}">
+        <p14:section name="Выводы" id="{6e975efc-28e8-c59c-fc97-afbb26e034e4}">
           <p14:sldIdLst>
             <p14:sldId id="265"/>
           </p14:sldIdLst>
@@ -2182,7 +2182,7 @@
           <a:p>
             <a:r>
               <a:rPr lang="en-US" dirty="0"/>
-              <a:t>Главная мысль за 10 секунд: работа почти не связана с желанием уйти; решают руководитель, академическое сообщество и ментальное здоровье, а вузы с «конвейером защит» усиливают риск.</a:t>
+              <a:t>Добрый вечер. Я Егор, участвую один. Мой вопрос: почему аспиранты хотят бросить аспирантуру. Короткий ответ на 10 секунд: не из-за работы. Решают научный руководитель, чувство своей кафедры и ментальное здоровье. А ещё сам вуз: в «конвейерах защит» риск выше. Я связал все три массива хакатона.</a:t>
             </a:r>
             <a:endParaRPr lang="en-US" dirty="0"/>
           </a:p>
@@ -2270,7 +2270,7 @@
           <a:p>
             <a:r>
               <a:rPr lang="en-US" dirty="0"/>
-              <a:t/>
+              <a:t>Что делать. Я посчитал меры на модели. Комплекс из встреч с руководителем, сообщества кафедры и психологической помощи снижает долю желающих уйти с 20 до 13 процентов. Уход с работы не даёт ничего. Для защиты я сделал интерактивный калькулятор риска: могу показать его вживую. Спасибо!</a:t>
             </a:r>
             <a:endParaRPr lang="en-US" dirty="0"/>
           </a:p>
@@ -2358,7 +2358,7 @@
           <a:p>
             <a:r>
               <a:rPr lang="en-US" dirty="0"/>
-              <a:t/>
+              <a:t>Меньше пятой части аспирантов защищается в срок. Намерение уйти появляется раньше отчисления, значит, его можно поймать. Самое частое объяснение отсева: «они работают». Я проверил пять гипотез: от работы до эффекта самого вуза.</a:t>
             </a:r>
             <a:endParaRPr lang="en-US" dirty="0"/>
           </a:p>
@@ -2446,7 +2446,7 @@
           <a:p>
             <a:r>
               <a:rPr lang="en-US" dirty="0"/>
-              <a:t/>
+              <a:t>Основа: опрос 5 007 аспирантов из 249 вузов, 2021 год. Я сопоставил названия вузов с Мониторингом эффективности за тот же год и получил связанный массив: 85 вузов и 3 570 человек. Лонгитюд студентов использую для репликации. Каждый пятый аспирант часто хочет уйти, у каждого четвёртого умеренные и выше депрессивные симптомы.</a:t>
             </a:r>
             <a:endParaRPr lang="en-US" dirty="0"/>
           </a:p>
@@ -2534,7 +2534,7 @@
           <a:p>
             <a:r>
               <a:rPr lang="en-US" dirty="0"/>
-              <a:t/>
+              <a:t>Методов семь, и у каждого свой вопрос. Логит отвечает, что связано. Шепли показывает, что важнее. Бустинг проверяет предсказуемость и нелинейности. Кластеры показывают, кто в группе риска. Медиация объясняет, как это работает. Многоуровневая модель проверяет роль вуза. G-computation считает, что дадут меры.</a:t>
             </a:r>
             <a:endParaRPr lang="en-US" dirty="0"/>
           </a:p>
@@ -2622,7 +2622,7 @@
           <a:p>
             <a:r>
               <a:rPr lang="en-US" dirty="0"/>
-              <a:t/>
+              <a:t>Главный слайд. Слева тип занятости: от 20 до 24 процентов, разницы почти нет. Справа руководитель, кафедра и симптомы: разброс в четыре–шесть раз. Сопоставление похожих аспирантов даёт эффект работы около нуля. На студентах начало работы тоже не повышает мысли об уходе. Важна не работа, а переживание конфликта.</a:t>
             </a:r>
             <a:endParaRPr lang="en-US" dirty="0"/>
           </a:p>
@@ -2710,7 +2710,7 @@
           <a:p>
             <a:r>
               <a:rPr lang="en-US" dirty="0"/>
-              <a:t/>
+              <a:t>Разложение Шепли: здоровье, среда и руководитель дают две трети объяснённого, занятость меньше двух процентов. Модель хорошо различает группы: AUC 0.83, а только на внешних факторах 0.61. Пятая часть аспирантов с самым высоким прогнозом риска покрывает больше половины желающих уйти. E-value около двух: связь не объяснить слабым скрытым фактором.</a:t>
             </a:r>
             <a:endParaRPr lang="en-US" dirty="0"/>
           </a:p>
@@ -2798,7 +2798,7 @@
           <a:p>
             <a:r>
               <a:rPr lang="en-US" dirty="0"/>
-              <a:t/>
+              <a:t>Четыре типа аспирантов. Почти половина вовлечены, и уйти хотят всего 5%. Отстранённые: с руководителем всё нормально, но нет своей кафедры. Выгорающие: среда хорошая, но выраженные симптомы. И 10% без опоры на руководителя: там уйти хотят 59%. Доля работающих во всех четырёх группах около 45%.</a:t>
             </a:r>
             <a:endParaRPr lang="en-US" dirty="0"/>
           </a:p>
@@ -2886,7 +2886,7 @@
           <a:p>
             <a:r>
               <a:rPr lang="en-US" dirty="0"/>
-              <a:t/>
+              <a:t>Механизм. Около 15% эффекта руководителя и среды идёт через депрессивные симптомы. И модерация: работа опасна только без академической опоры. При сильной принадлежности к кафедре работающие по модели рискуют даже меньше.</a:t>
             </a:r>
             <a:endParaRPr lang="en-US" dirty="0"/>
           </a:p>
@@ -2974,7 +2974,7 @@
           <a:p>
             <a:r>
               <a:rPr lang="en-US" dirty="0"/>
-              <a:t/>
+              <a:t>Вуз тоже важен, хотя на уровне вузов лежит лишь около 4% различий. Самая сильная связь с Мониторингом: где за год защищается больше сотрудников, аспиранты на 30% чаще хотят уйти. Это устойчиво без двух крупнейших вузов. И именно там руководитель важнее всего. Моя интерпретация: давление «защищайся быстрее» без ресурсов.</a:t>
             </a:r>
             <a:endParaRPr lang="en-US" dirty="0"/>
           </a:p>
@@ -3251,7 +3251,7 @@
                   </a:schemeClr>
                 </a:solidFill>
               </a:rPr>
-              <a:t>Данные: Всероссийский опрос аспирантов 2021 (HSE-BR-2025-009); Мониторинг эффективности вузов 2022 (Минобрнауки)</a:t>
+              <a:t>Данные: опрос аспирантов 2021 (HSE-BR-2025-009); Мониторинг эффективности вузов 2022; лонгитюд студентов 2024–2026 (HSE-BR-2025-009)</a:t>
             </a:r>
             <a:endParaRPr lang="en-US" sz="1000" dirty="0"/>
           </a:p>
@@ -3838,7 +3838,7 @@
                   <a:schemeClr val="bg2"/>
                 </a:solidFill>
               </a:rPr>
-              <a:t>Связка двух массивов хакатона: опрос 5 007 аспирантов × Мониторинг эффективности вузов</a:t>
+              <a:t>Все три массива хакатона: опрос 5 007 аспирантов × Мониторинг вузов + репликация на лонгитюде студентов</a:t>
             </a:r>
             <a:endParaRPr lang="en-US" sz="1800" dirty="0"/>
           </a:p>
@@ -4088,7 +4088,7 @@
                   <a:schemeClr val="bg1"/>
                 </a:solidFill>
               </a:rPr>
-              <a:t>Ранний сигнал: короткая анкета находит 20% группы риска</a:t>
+              <a:t>Короткий скрининг (8 показателей, AUC 0.83) находит группу риска заранее</a:t>
             </a:r>
             <a:endParaRPr lang="en-US" sz="1400" dirty="0"/>
           </a:p>
@@ -5122,7 +5122,7 @@
                   <a:schemeClr val="tx2"/>
                 </a:solidFill>
               </a:rPr>
-              <a:t>Данные: два массива хакатона, связанные на уровне вуза</a:t>
+              <a:t>Данные: все три массива хакатона, связанные на уровне вуза</a:t>
             </a:r>
             <a:endParaRPr lang="en-US" sz="2600" dirty="0"/>
           </a:p>
@@ -6046,7 +6046,7 @@
                   <a:schemeClr val="accent1"/>
                 </a:solidFill>
               </a:rPr>
-              <a:t>87%</a:t>
+              <a:t>3 из 3</a:t>
             </a:r>
             <a:endParaRPr lang="en-US" sz="4400" dirty="0"/>
           </a:p>
@@ -6082,7 +6082,7 @@
                   <a:schemeClr val="tx1"/>
                 </a:solidFill>
               </a:rPr>
-              <a:t>анкет с полными ответами для моделей</a:t>
+              <a:t>массивов хакатона: опрос, МЭВ и лонгитюд студентов (для репликации)</a:t>
             </a:r>
             <a:endParaRPr lang="en-US" sz="1400" dirty="0"/>
           </a:p>
@@ -7292,8 +7292,8 @@
           <p:nvPr/>
         </p:nvGraphicFramePr>
         <p:xfrm>
-          <a:off x="548640" y="1783080"/>
-          <a:ext cx="2697480" cy="3520440"/>
+          <a:off x="548640" y="1737360"/>
+          <a:ext cx="2697480" cy="3337560"/>
         </p:xfrm>
         <a:graphic xmlns:a="http://schemas.openxmlformats.org/drawingml/2006/main">
           <a:graphicData uri="http://schemas.openxmlformats.org/drawingml/2006/chart">
@@ -7308,8 +7308,8 @@
           <p:nvPr/>
         </p:nvGraphicFramePr>
         <p:xfrm>
-          <a:off x="3337560" y="1783080"/>
-          <a:ext cx="2697480" cy="3520440"/>
+          <a:off x="3337560" y="1737360"/>
+          <a:ext cx="2697480" cy="3337560"/>
         </p:xfrm>
         <a:graphic xmlns:a="http://schemas.openxmlformats.org/drawingml/2006/main">
           <a:graphicData uri="http://schemas.openxmlformats.org/drawingml/2006/chart">
@@ -7324,8 +7324,8 @@
           <p:nvPr/>
         </p:nvGraphicFramePr>
         <p:xfrm>
-          <a:off x="6126480" y="1783080"/>
-          <a:ext cx="2697480" cy="3520440"/>
+          <a:off x="6126480" y="1737360"/>
+          <a:ext cx="2697480" cy="3337560"/>
         </p:xfrm>
         <a:graphic xmlns:a="http://schemas.openxmlformats.org/drawingml/2006/main">
           <a:graphicData uri="http://schemas.openxmlformats.org/drawingml/2006/chart">
@@ -7340,8 +7340,8 @@
           <p:nvPr/>
         </p:nvGraphicFramePr>
         <p:xfrm>
-          <a:off x="8915400" y="1783080"/>
-          <a:ext cx="2697480" cy="3520440"/>
+          <a:off x="8915400" y="1737360"/>
+          <a:ext cx="2697480" cy="3337560"/>
         </p:xfrm>
         <a:graphic xmlns:a="http://schemas.openxmlformats.org/drawingml/2006/main">
           <a:graphicData uri="http://schemas.openxmlformats.org/drawingml/2006/chart">
@@ -7357,12 +7357,12 @@
         </p:nvSpPr>
         <p:spPr>
           <a:xfrm>
-            <a:off x="548640" y="5440680"/>
-            <a:ext cx="11094415" cy="777240"/>
+            <a:off x="548640" y="5166360"/>
+            <a:ext cx="5410048" cy="1097280"/>
           </a:xfrm>
           <a:prstGeom prst="roundRect">
             <a:avLst>
-              <a:gd name="adj" fmla="val 9412"/>
+              <a:gd name="adj" fmla="val 6667"/>
             </a:avLst>
           </a:prstGeom>
           <a:solidFill>
@@ -7384,8 +7384,8 @@
         </p:nvSpPr>
         <p:spPr>
           <a:xfrm>
-            <a:off x="777240" y="5532120"/>
-            <a:ext cx="10637215" cy="640080"/>
+            <a:off x="731520" y="5257800"/>
+            <a:ext cx="5044288" cy="960120"/>
           </a:xfrm>
           <a:prstGeom prst="rect">
             <a:avLst/>
@@ -7404,12 +7404,12 @@
               <a:buNone/>
             </a:pPr>
             <a:r>
-              <a:rPr lang="en-US" sz="1400" b="1" dirty="0">
+              <a:rPr lang="en-US" sz="1300" b="1" dirty="0">
                 <a:solidFill>
                   <a:schemeClr val="tx1"/>
                 </a:solidFill>
               </a:rPr>
-              <a:t>Парадокс: </a:t>
+              <a:t>Парадокс. </a:t>
             </a:r>
             <a:pPr indent="0" marL="0">
               <a:spcAft>
@@ -7418,14 +7418,94 @@
               <a:buNone/>
             </a:pPr>
             <a:r>
-              <a:rPr lang="en-US" sz="1400" dirty="0">
+              <a:rPr lang="en-US" sz="1300" dirty="0">
                 <a:solidFill>
                   <a:schemeClr val="tx1"/>
                 </a:solidFill>
               </a:rPr>
-              <a:t>45% называют совмещение с работой серьёзной трудностью, но сам факт работы риск не меняет. Сопоставление по склонности (PSM, 1 971 пар): эффект полного дня вне вуза +0.6 п.п. [-1.7; 3.0]. H1 отвергнута.</a:t>
-            </a:r>
-            <a:endParaRPr lang="en-US" sz="1400" dirty="0"/>
+              <a:t>45% называют работу серьёзной трудностью, но сам факт работы риск не меняет. PSM (1 971 пар): +0.6 п.п. [-1.7; 3.0]. H1 отвергнута.</a:t>
+            </a:r>
+            <a:endParaRPr lang="en-US" sz="1300" dirty="0"/>
+          </a:p>
+        </p:txBody>
+      </p:sp>
+      <p:sp>
+        <p:nvSpPr>
+          <p:cNvPr id="10" name="card"/>
+          <p:cNvSpPr/>
+          <p:nvPr/>
+        </p:nvSpPr>
+        <p:spPr>
+          <a:xfrm>
+            <a:off x="6233008" y="5166360"/>
+            <a:ext cx="5410048" cy="1097280"/>
+          </a:xfrm>
+          <a:prstGeom prst="roundRect">
+            <a:avLst>
+              <a:gd name="adj" fmla="val 6667"/>
+            </a:avLst>
+          </a:prstGeom>
+          <a:solidFill>
+            <a:schemeClr val="bg2"/>
+          </a:solidFill>
+          <a:ln w="12700">
+            <a:solidFill>
+              <a:schemeClr val="bg2"/>
+            </a:solidFill>
+            <a:prstDash val="solid"/>
+          </a:ln>
+        </p:spPr>
+      </p:sp>
+      <p:sp>
+        <p:nvSpPr>
+          <p:cNvPr id="11" name="Text 5"/>
+          <p:cNvSpPr txBox="1"/>
+          <p:nvPr/>
+        </p:nvSpPr>
+        <p:spPr>
+          <a:xfrm>
+            <a:off x="6415888" y="5257800"/>
+            <a:ext cx="5044288" cy="960120"/>
+          </a:xfrm>
+          <a:prstGeom prst="rect">
+            <a:avLst/>
+          </a:prstGeom>
+          <a:noFill/>
+          <a:ln/>
+        </p:spPr>
+        <p:txBody>
+          <a:bodyPr wrap="square" lIns="0" tIns="0" rIns="0" bIns="0" rtlCol="0" anchor="t"/>
+          <a:lstStyle/>
+          <a:p>
+            <a:pPr indent="0" marL="0">
+              <a:spcAft>
+                <a:spcPts val="600"/>
+              </a:spcAft>
+              <a:buNone/>
+            </a:pPr>
+            <a:r>
+              <a:rPr lang="en-US" sz="1300" b="1" dirty="0">
+                <a:solidFill>
+                  <a:schemeClr val="tx1"/>
+                </a:solidFill>
+              </a:rPr>
+              <a:t>Репликация на студентах (лонгитюд, 3-й массив). </a:t>
+            </a:r>
+            <a:pPr indent="0" marL="0">
+              <a:spcAft>
+                <a:spcPts val="600"/>
+              </a:spcAft>
+              <a:buNone/>
+            </a:pPr>
+            <a:r>
+              <a:rPr lang="en-US" sz="1300" dirty="0">
+                <a:solidFill>
+                  <a:schemeClr val="tx1"/>
+                </a:solidFill>
+              </a:rPr>
+              <a:t>Начало работы между волнами не повышает мысли об уходе (ОШ 0.87, p = 0.65, n = 564). Решает переживание конфликта: 58% против 36%.</a:t>
+            </a:r>
+            <a:endParaRPr lang="en-US" sz="1300" dirty="0"/>
           </a:p>
         </p:txBody>
       </p:sp>
